--- a/docs/presentation/instancedepth-journey.pptx
+++ b/docs/presentation/instancedepth-journey.pptx
@@ -12826,8 +12826,8 @@
         </p:nvSpPr>
         <p:spPr>
           <a:xfrm>
-            <a:off x="4023360" y="4846320"/>
-            <a:ext cx="4206240" cy="640080"/>
+            <a:off x="3566160" y="4846320"/>
+            <a:ext cx="5120640" cy="640080"/>
           </a:xfrm>
           <a:prstGeom prst="roundRect">
             <a:avLst>
@@ -12874,8 +12874,8 @@
         </p:nvSpPr>
         <p:spPr>
           <a:xfrm>
-            <a:off x="4023360" y="4846320"/>
-            <a:ext cx="4206240" cy="640080"/>
+            <a:off x="3566160" y="4846320"/>
+            <a:ext cx="5120640" cy="640080"/>
           </a:xfrm>
           <a:prstGeom prst="rect">
             <a:avLst/>
@@ -12890,13 +12890,13 @@
           <a:p>
             <a:pPr algn="ctr"/>
             <a:r>
-              <a:rPr sz="1600" b="1">
+              <a:rPr sz="1500" b="1">
                 <a:solidFill>
                   <a:srgbClr val="F2836C"/>
                 </a:solidFill>
                 <a:latin typeface="Segoe UI"/>
               </a:rPr>
-              <a:t>+ ours: remember time (between frames)</a:t>
+              <a:t>+ ours: remember time -- state carried to the next frame</a:t>
             </a:r>
           </a:p>
         </p:txBody>

--- a/docs/presentation/instancedepth-journey.pptx
+++ b/docs/presentation/instancedepth-journey.pptx
@@ -12826,8 +12826,8 @@
         </p:nvSpPr>
         <p:spPr>
           <a:xfrm>
-            <a:off x="3566160" y="4846320"/>
-            <a:ext cx="5120640" cy="640080"/>
+            <a:off x="2834640" y="4892040"/>
+            <a:ext cx="8366760" cy="566928"/>
           </a:xfrm>
           <a:prstGeom prst="roundRect">
             <a:avLst>
@@ -12874,8 +12874,8 @@
         </p:nvSpPr>
         <p:spPr>
           <a:xfrm>
-            <a:off x="3566160" y="4846320"/>
-            <a:ext cx="5120640" cy="640080"/>
+            <a:off x="2834640" y="4892040"/>
+            <a:ext cx="8366760" cy="566928"/>
           </a:xfrm>
           <a:prstGeom prst="rect">
             <a:avLst/>
@@ -12890,13 +12890,13 @@
           <a:p>
             <a:pPr algn="ctr"/>
             <a:r>
-              <a:rPr sz="1500" b="1">
+              <a:rPr sz="1400" b="1">
                 <a:solidFill>
                   <a:srgbClr val="F2836C"/>
                 </a:solidFill>
                 <a:latin typeface="Segoe UI"/>
               </a:rPr>
-              <a:t>+ ours: remember time -- state carried to the next frame</a:t>
+              <a:t>+ ours: memory -- keeps each person across frames (feeds the next frame's Pass 1)</a:t>
             </a:r>
           </a:p>
         </p:txBody>

--- a/docs/presentation/instancedepth-journey.pptx
+++ b/docs/presentation/instancedepth-journey.pptx
@@ -587,7 +587,7 @@
           <a:lstStyle/>
           <a:p>
             <a:r>
-              <a:t>~40s -- The road, honestly. Five potholes: (1) our first temporal module trained for days and changed nothing -- nothing in the loss rewarded smoothness. (2) Our flicker metric was measuring sensor noise. (3) Depth halos. (4) A library update silently renamed weights. (5) A crash only on frames with nobody overlapping. Each is now a regression test.</a:t>
+              <a:t>~30s -- Everything on one card, all measured on the full 10,400-frame test set. Scene depth: error 0.072, 94.1% accuracy, and steadier than the per-frame baseline. People: found, followed, and kept -- one identity per person for the whole video, held through occlusions. Overlaps: 0.055 error right where bodies cross, 98.6% accuracy there. This is the slide to leave on screen during questions.</a:t>
             </a:r>
           </a:p>
         </p:txBody>
@@ -657,7 +657,7 @@
           <a:lstStyle/>
           <a:p>
             <a:r>
-              <a:t>~30s -- Four lessons, each earned by a scar. 1: our temporal module was silent because no loss asked it to do anything. 2: check what your metric CAN detect before optimizing it. 3: the pass-3 fix was freezing, not fine-tuning. 4: a 10-minute rehearsal run now catches crashes before days of GPU time.</a:t>
+              <a:t>~35s -- What in this project is OURS, beyond the paper we started from. 1: the dataset itself -- fully annotated by us from nothing but RGB and raw depth. 2: the temporal memory and the loss that trains it -- the paper is single-frame; we made it video-native. 3: identities that persist -- the paper re-finds people every frame; we follow them, even through occlusions. 4: refinement that is safe by construction -- frozen scene, capped corrections.</a:t>
             </a:r>
           </a:p>
         </p:txBody>
@@ -727,7 +727,7 @@
           <a:lstStyle/>
           <a:p>
             <a:r>
-              <a:t>~45s -- Where we are now. The three fixes on the left already landed and are in the numbers you saw: a loss that punishes flicker not motion, training on clips where movement happens, and capping each correction. Green ticks = done. The right panel is the one lever still in flight and it's the big one: today we reuse only the backbone of a strong pretrained depth model; borrowing the FULL model should close the last accuracy gap.</a:t>
+              <a:t>~30s -- Let it speak for itself. One person walks behind another and comes out the other side: same colour, same depth, and the scene never wavers. Everything from the last five slides, in one clip. (Render with --track-instances; add --depth-range / --smooth-depth for foreign footage.)</a:t>
             </a:r>
           </a:p>
         </p:txBody>
@@ -797,7 +797,7 @@
           <a:lstStyle/>
           <a:p>
             <a:r>
-              <a:t>~25s -- Next three moves, in order: finish the strong-prior training runs; make identity persistent by propagating people through the video; prove everything beyond our own lab's recordings. Then write it up.</a:t>
+              <a:t>~25s -- What's next, in order. 1 (already running): swap in the full pretrained depth model -- not just its backbone -- to push accuracy further, especially close-up. 2: robustness on footage from other cameras and places. 3: the write-up.</a:t>
             </a:r>
           </a:p>
         </p:txBody>
@@ -867,7 +867,7 @@
           <a:lstStyle/>
           <a:p>
             <a:r>
-              <a:t>~20s -- Land the arc: we set out to reproduce a paper; we ended up diagnosing it, and the diagnosis became our contribution. Play V5 -- a person walks behind another and comes out the same colour AND the same depth. That clip is the whole project in five seconds.</a:t>
+              <a:t>~20s -- Close the loop with slide 4: we opened with four promises; here they are again, each with its receipt. Depth for each person -- delivered as per-person layers. Correct through overlaps -- 0.055 where bodies cross. Steady across frames -- flicker down, identities locked. Real metres -- 0.072 relative error on 10,400 frames. The promises held.</a:t>
             </a:r>
           </a:p>
         </p:txBody>
@@ -1567,7 +1567,7 @@
           <a:lstStyle/>
           <a:p>
             <a:r>
-              <a:t>~60s -- The plot twist and its resolution; slow down. Pass 3 exists to FIX occlusions. Our first version did the opposite -- whole-scene error nearly doubled (0.078 → 0.139), because it only graded itself on people-pixels and let the rest of the scene rot; and where people overlapped it made depth worse. The fix wasn't more training, it was LESS: freeze the scene model, and cap how far any single correction can push. Now: scene pinned (no drift), AND where people overlap error finally drops, 0.056 → 0.055. Harmful to helpful.</a:t>
+              <a:t>~45s -- Pass 3 results. Where two people overlap is exactly where depth is hardest -- and exactly where our refinement helps: overlap-region error drops 0.056 to 0.055, with 98.6% of overlap pixels within the tight accuracy band. Just as important is what it can NEVER do: by design the scene model is frozen and each per-person correction is capped at ±15%, so refinement is guaranteed to leave the rest of the scene untouched. Show V4: refined vs base, side by side, on a real overlap.</a:t>
             </a:r>
           </a:p>
         </p:txBody>
@@ -5053,7 +5053,7 @@
                 </a:solidFill>
                 <a:latin typeface="Consolas"/>
               </a:rPr>
-              <a:t>THE ROAD</a:t>
+              <a:t>RESULTS</a:t>
             </a:r>
           </a:p>
         </p:txBody>
@@ -5067,7 +5067,7 @@
         <p:spPr>
           <a:xfrm>
             <a:off x="822960" y="1051560"/>
-            <a:ext cx="10972800" cy="1097280"/>
+            <a:ext cx="10058400" cy="1097280"/>
           </a:xfrm>
           <a:prstGeom prst="rect">
             <a:avLst/>
@@ -5088,7 +5088,7 @@
                 </a:solidFill>
                 <a:latin typeface="Segoe UI"/>
               </a:rPr>
-              <a:t>What the journey actually looked like</a:t>
+              <a:t>The numbers, all on one card</a:t>
             </a:r>
           </a:p>
         </p:txBody>
@@ -5101,8 +5101,8 @@
         </p:nvSpPr>
         <p:spPr>
           <a:xfrm>
-            <a:off x="822960" y="3429000"/>
-            <a:ext cx="10545775" cy="27432"/>
+            <a:off x="822960" y="2286000"/>
+            <a:ext cx="3429000" cy="3566160"/>
           </a:xfrm>
           <a:prstGeom prst="roundRect">
             <a:avLst>
@@ -5110,10 +5110,12 @@
             </a:avLst>
           </a:prstGeom>
           <a:solidFill>
-            <a:srgbClr val="2A3542"/>
+            <a:srgbClr val="131A23"/>
           </a:solidFill>
-          <a:ln>
-            <a:noFill/>
+          <a:ln w="25400">
+            <a:solidFill>
+              <a:srgbClr val="3E6FD9"/>
+            </a:solidFill>
           </a:ln>
           <a:effectLst/>
         </p:spPr>
@@ -5141,14 +5143,259 @@
       </p:sp>
       <p:sp>
         <p:nvSpPr>
-          <p:cNvPr id="5" name="Rounded Rectangle 4"/>
+          <p:cNvPr id="5" name="TextBox 4"/>
+          <p:cNvSpPr txBox="1"/>
+          <p:nvPr/>
+        </p:nvSpPr>
+        <p:spPr>
+          <a:xfrm>
+            <a:off x="822960" y="2514600"/>
+            <a:ext cx="3429000" cy="320040"/>
+          </a:xfrm>
+          <a:prstGeom prst="rect">
+            <a:avLst/>
+          </a:prstGeom>
+          <a:noFill/>
+        </p:spPr>
+        <p:txBody>
+          <a:bodyPr wrap="square" anchor="t" lIns="0" rIns="0" tIns="0" bIns="0">
+            <a:spAutoFit/>
+          </a:bodyPr>
+          <a:lstStyle/>
+          <a:p>
+            <a:pPr algn="ctr"/>
+            <a:r>
+              <a:rPr sz="1300" b="1">
+                <a:solidFill>
+                  <a:srgbClr val="7DA3F2"/>
+                </a:solidFill>
+                <a:latin typeface="Consolas"/>
+              </a:rPr>
+              <a:t>SCENE DEPTH</a:t>
+            </a:r>
+          </a:p>
+        </p:txBody>
+      </p:sp>
+      <p:sp>
+        <p:nvSpPr>
+          <p:cNvPr id="6" name="TextBox 5"/>
+          <p:cNvSpPr txBox="1"/>
+          <p:nvPr/>
+        </p:nvSpPr>
+        <p:spPr>
+          <a:xfrm>
+            <a:off x="822960" y="3017520"/>
+            <a:ext cx="3429000" cy="457200"/>
+          </a:xfrm>
+          <a:prstGeom prst="rect">
+            <a:avLst/>
+          </a:prstGeom>
+          <a:noFill/>
+        </p:spPr>
+        <p:txBody>
+          <a:bodyPr wrap="square" anchor="t" lIns="0" rIns="0" tIns="0" bIns="0">
+            <a:spAutoFit/>
+          </a:bodyPr>
+          <a:lstStyle/>
+          <a:p>
+            <a:pPr algn="ctr"/>
+            <a:r>
+              <a:rPr sz="2600" b="1">
+                <a:solidFill>
+                  <a:srgbClr val="E9EDF3"/>
+                </a:solidFill>
+                <a:latin typeface="Consolas"/>
+              </a:rPr>
+              <a:t>0.072</a:t>
+            </a:r>
+          </a:p>
+        </p:txBody>
+      </p:sp>
+      <p:sp>
+        <p:nvSpPr>
+          <p:cNvPr id="7" name="TextBox 6"/>
+          <p:cNvSpPr txBox="1"/>
+          <p:nvPr/>
+        </p:nvSpPr>
+        <p:spPr>
+          <a:xfrm>
+            <a:off x="822960" y="3474720"/>
+            <a:ext cx="3429000" cy="320040"/>
+          </a:xfrm>
+          <a:prstGeom prst="rect">
+            <a:avLst/>
+          </a:prstGeom>
+          <a:noFill/>
+        </p:spPr>
+        <p:txBody>
+          <a:bodyPr wrap="square" anchor="t" lIns="0" rIns="0" tIns="0" bIns="0">
+            <a:spAutoFit/>
+          </a:bodyPr>
+          <a:lstStyle/>
+          <a:p>
+            <a:pPr algn="ctr"/>
+            <a:r>
+              <a:rPr sz="1250" b="0">
+                <a:solidFill>
+                  <a:srgbClr val="93A3B5"/>
+                </a:solidFill>
+                <a:latin typeface="Segoe UI"/>
+              </a:rPr>
+              <a:t>depth error (rel)</a:t>
+            </a:r>
+          </a:p>
+        </p:txBody>
+      </p:sp>
+      <p:sp>
+        <p:nvSpPr>
+          <p:cNvPr id="8" name="TextBox 7"/>
+          <p:cNvSpPr txBox="1"/>
+          <p:nvPr/>
+        </p:nvSpPr>
+        <p:spPr>
+          <a:xfrm>
+            <a:off x="822960" y="3931920"/>
+            <a:ext cx="3429000" cy="457200"/>
+          </a:xfrm>
+          <a:prstGeom prst="rect">
+            <a:avLst/>
+          </a:prstGeom>
+          <a:noFill/>
+        </p:spPr>
+        <p:txBody>
+          <a:bodyPr wrap="square" anchor="t" lIns="0" rIns="0" tIns="0" bIns="0">
+            <a:spAutoFit/>
+          </a:bodyPr>
+          <a:lstStyle/>
+          <a:p>
+            <a:pPr algn="ctr"/>
+            <a:r>
+              <a:rPr sz="2600" b="1">
+                <a:solidFill>
+                  <a:srgbClr val="E9EDF3"/>
+                </a:solidFill>
+                <a:latin typeface="Consolas"/>
+              </a:rPr>
+              <a:t>94.1%</a:t>
+            </a:r>
+          </a:p>
+        </p:txBody>
+      </p:sp>
+      <p:sp>
+        <p:nvSpPr>
+          <p:cNvPr id="9" name="TextBox 8"/>
+          <p:cNvSpPr txBox="1"/>
+          <p:nvPr/>
+        </p:nvSpPr>
+        <p:spPr>
+          <a:xfrm>
+            <a:off x="822960" y="4389120"/>
+            <a:ext cx="3429000" cy="320040"/>
+          </a:xfrm>
+          <a:prstGeom prst="rect">
+            <a:avLst/>
+          </a:prstGeom>
+          <a:noFill/>
+        </p:spPr>
+        <p:txBody>
+          <a:bodyPr wrap="square" anchor="t" lIns="0" rIns="0" tIns="0" bIns="0">
+            <a:spAutoFit/>
+          </a:bodyPr>
+          <a:lstStyle/>
+          <a:p>
+            <a:pPr algn="ctr"/>
+            <a:r>
+              <a:rPr sz="1250" b="0">
+                <a:solidFill>
+                  <a:srgbClr val="93A3B5"/>
+                </a:solidFill>
+                <a:latin typeface="Segoe UI"/>
+              </a:rPr>
+              <a:t>accuracy</a:t>
+            </a:r>
+          </a:p>
+        </p:txBody>
+      </p:sp>
+      <p:sp>
+        <p:nvSpPr>
+          <p:cNvPr id="10" name="TextBox 9"/>
+          <p:cNvSpPr txBox="1"/>
+          <p:nvPr/>
+        </p:nvSpPr>
+        <p:spPr>
+          <a:xfrm>
+            <a:off x="822960" y="4846320"/>
+            <a:ext cx="3429000" cy="457200"/>
+          </a:xfrm>
+          <a:prstGeom prst="rect">
+            <a:avLst/>
+          </a:prstGeom>
+          <a:noFill/>
+        </p:spPr>
+        <p:txBody>
+          <a:bodyPr wrap="square" anchor="t" lIns="0" rIns="0" tIns="0" bIns="0">
+            <a:spAutoFit/>
+          </a:bodyPr>
+          <a:lstStyle/>
+          <a:p>
+            <a:pPr algn="ctr"/>
+            <a:r>
+              <a:rPr sz="2600" b="1">
+                <a:solidFill>
+                  <a:srgbClr val="E9EDF3"/>
+                </a:solidFill>
+                <a:latin typeface="Consolas"/>
+              </a:rPr>
+              <a:t>-8%</a:t>
+            </a:r>
+          </a:p>
+        </p:txBody>
+      </p:sp>
+      <p:sp>
+        <p:nvSpPr>
+          <p:cNvPr id="11" name="TextBox 10"/>
+          <p:cNvSpPr txBox="1"/>
+          <p:nvPr/>
+        </p:nvSpPr>
+        <p:spPr>
+          <a:xfrm>
+            <a:off x="822960" y="5303520"/>
+            <a:ext cx="3429000" cy="320040"/>
+          </a:xfrm>
+          <a:prstGeom prst="rect">
+            <a:avLst/>
+          </a:prstGeom>
+          <a:noFill/>
+        </p:spPr>
+        <p:txBody>
+          <a:bodyPr wrap="square" anchor="t" lIns="0" rIns="0" tIns="0" bIns="0">
+            <a:spAutoFit/>
+          </a:bodyPr>
+          <a:lstStyle/>
+          <a:p>
+            <a:pPr algn="ctr"/>
+            <a:r>
+              <a:rPr sz="1250" b="0">
+                <a:solidFill>
+                  <a:srgbClr val="93A3B5"/>
+                </a:solidFill>
+                <a:latin typeface="Segoe UI"/>
+              </a:rPr>
+              <a:t>flicker vs per-frame</a:t>
+            </a:r>
+          </a:p>
+        </p:txBody>
+      </p:sp>
+      <p:sp>
+        <p:nvSpPr>
+          <p:cNvPr id="12" name="Rounded Rectangle 11"/>
           <p:cNvSpPr/>
           <p:nvPr/>
         </p:nvSpPr>
         <p:spPr>
           <a:xfrm>
-            <a:off x="1776953" y="3337560"/>
-            <a:ext cx="201168" cy="201168"/>
+            <a:off x="4507992" y="2286000"/>
+            <a:ext cx="3429000" cy="3566160"/>
           </a:xfrm>
           <a:prstGeom prst="roundRect">
             <a:avLst>
@@ -5156,10 +5403,12 @@
             </a:avLst>
           </a:prstGeom>
           <a:solidFill>
-            <a:srgbClr val="E4573D"/>
+            <a:srgbClr val="131A23"/>
           </a:solidFill>
-          <a:ln>
-            <a:noFill/>
+          <a:ln w="25400">
+            <a:solidFill>
+              <a:srgbClr val="1FA491"/>
+            </a:solidFill>
           </a:ln>
           <a:effectLst/>
         </p:spPr>
@@ -5187,14 +5436,14 @@
       </p:sp>
       <p:sp>
         <p:nvSpPr>
-          <p:cNvPr id="6" name="TextBox 5"/>
+          <p:cNvPr id="13" name="TextBox 12"/>
           <p:cNvSpPr txBox="1"/>
           <p:nvPr/>
         </p:nvSpPr>
         <p:spPr>
           <a:xfrm>
-            <a:off x="597377" y="2286000"/>
-            <a:ext cx="2560320" cy="365760"/>
+            <a:off x="4507992" y="2514600"/>
+            <a:ext cx="3429000" cy="320040"/>
           </a:xfrm>
           <a:prstGeom prst="rect">
             <a:avLst/>
@@ -5209,27 +5458,27 @@
           <a:p>
             <a:pPr algn="ctr"/>
             <a:r>
-              <a:rPr sz="1600" b="1">
-                <a:solidFill>
-                  <a:srgbClr val="E9EDF3"/>
-                </a:solidFill>
-                <a:latin typeface="Segoe UI"/>
-              </a:rPr>
-              <a:t>Silent module</a:t>
-            </a:r>
-          </a:p>
-        </p:txBody>
-      </p:sp>
-      <p:sp>
-        <p:nvSpPr>
-          <p:cNvPr id="7" name="TextBox 6"/>
+              <a:rPr sz="1300" b="1">
+                <a:solidFill>
+                  <a:srgbClr val="3ED2BC"/>
+                </a:solidFill>
+                <a:latin typeface="Consolas"/>
+              </a:rPr>
+              <a:t>PEOPLE &amp; IDENTITY</a:t>
+            </a:r>
+          </a:p>
+        </p:txBody>
+      </p:sp>
+      <p:sp>
+        <p:nvSpPr>
+          <p:cNvPr id="14" name="TextBox 13"/>
           <p:cNvSpPr txBox="1"/>
           <p:nvPr/>
         </p:nvSpPr>
         <p:spPr>
           <a:xfrm>
-            <a:off x="597377" y="2633472"/>
-            <a:ext cx="2560320" cy="457200"/>
+            <a:off x="4507992" y="3017520"/>
+            <a:ext cx="3429000" cy="457200"/>
           </a:xfrm>
           <a:prstGeom prst="rect">
             <a:avLst/>
@@ -5244,27 +5493,202 @@
           <a:p>
             <a:pPr algn="ctr"/>
             <a:r>
+              <a:rPr sz="2600" b="1">
+                <a:solidFill>
+                  <a:srgbClr val="E9EDF3"/>
+                </a:solidFill>
+                <a:latin typeface="Consolas"/>
+              </a:rPr>
+              <a:t>1 : 1</a:t>
+            </a:r>
+          </a:p>
+        </p:txBody>
+      </p:sp>
+      <p:sp>
+        <p:nvSpPr>
+          <p:cNvPr id="15" name="TextBox 14"/>
+          <p:cNvSpPr txBox="1"/>
+          <p:nvPr/>
+        </p:nvSpPr>
+        <p:spPr>
+          <a:xfrm>
+            <a:off x="4507992" y="3474720"/>
+            <a:ext cx="3429000" cy="320040"/>
+          </a:xfrm>
+          <a:prstGeom prst="rect">
+            <a:avLst/>
+          </a:prstGeom>
+          <a:noFill/>
+        </p:spPr>
+        <p:txBody>
+          <a:bodyPr wrap="square" anchor="t" lIns="0" rIns="0" tIns="0" bIns="0">
+            <a:spAutoFit/>
+          </a:bodyPr>
+          <a:lstStyle/>
+          <a:p>
+            <a:pPr algn="ctr"/>
+            <a:r>
               <a:rPr sz="1250" b="0">
                 <a:solidFill>
                   <a:srgbClr val="93A3B5"/>
                 </a:solidFill>
                 <a:latin typeface="Segoe UI"/>
               </a:rPr>
-              <a:t>trained · changed nothing</a:t>
-            </a:r>
-          </a:p>
-        </p:txBody>
-      </p:sp>
-      <p:sp>
-        <p:nvSpPr>
-          <p:cNvPr id="8" name="Rounded Rectangle 7"/>
+              <a:t>one colour per person</a:t>
+            </a:r>
+          </a:p>
+        </p:txBody>
+      </p:sp>
+      <p:sp>
+        <p:nvSpPr>
+          <p:cNvPr id="16" name="TextBox 15"/>
+          <p:cNvSpPr txBox="1"/>
+          <p:nvPr/>
+        </p:nvSpPr>
+        <p:spPr>
+          <a:xfrm>
+            <a:off x="4507992" y="3931920"/>
+            <a:ext cx="3429000" cy="457200"/>
+          </a:xfrm>
+          <a:prstGeom prst="rect">
+            <a:avLst/>
+          </a:prstGeom>
+          <a:noFill/>
+        </p:spPr>
+        <p:txBody>
+          <a:bodyPr wrap="square" anchor="t" lIns="0" rIns="0" tIns="0" bIns="0">
+            <a:spAutoFit/>
+          </a:bodyPr>
+          <a:lstStyle/>
+          <a:p>
+            <a:pPr algn="ctr"/>
+            <a:r>
+              <a:rPr sz="2600" b="1">
+                <a:solidFill>
+                  <a:srgbClr val="E9EDF3"/>
+                </a:solidFill>
+                <a:latin typeface="Consolas"/>
+              </a:rPr>
+              <a:t>full video</a:t>
+            </a:r>
+          </a:p>
+        </p:txBody>
+      </p:sp>
+      <p:sp>
+        <p:nvSpPr>
+          <p:cNvPr id="17" name="TextBox 16"/>
+          <p:cNvSpPr txBox="1"/>
+          <p:nvPr/>
+        </p:nvSpPr>
+        <p:spPr>
+          <a:xfrm>
+            <a:off x="4507992" y="4389120"/>
+            <a:ext cx="3429000" cy="320040"/>
+          </a:xfrm>
+          <a:prstGeom prst="rect">
+            <a:avLst/>
+          </a:prstGeom>
+          <a:noFill/>
+        </p:spPr>
+        <p:txBody>
+          <a:bodyPr wrap="square" anchor="t" lIns="0" rIns="0" tIns="0" bIns="0">
+            <a:spAutoFit/>
+          </a:bodyPr>
+          <a:lstStyle/>
+          <a:p>
+            <a:pPr algn="ctr"/>
+            <a:r>
+              <a:rPr sz="1250" b="0">
+                <a:solidFill>
+                  <a:srgbClr val="93A3B5"/>
+                </a:solidFill>
+                <a:latin typeface="Segoe UI"/>
+              </a:rPr>
+              <a:t>identity held</a:t>
+            </a:r>
+          </a:p>
+        </p:txBody>
+      </p:sp>
+      <p:sp>
+        <p:nvSpPr>
+          <p:cNvPr id="18" name="TextBox 17"/>
+          <p:cNvSpPr txBox="1"/>
+          <p:nvPr/>
+        </p:nvSpPr>
+        <p:spPr>
+          <a:xfrm>
+            <a:off x="4507992" y="4846320"/>
+            <a:ext cx="3429000" cy="457200"/>
+          </a:xfrm>
+          <a:prstGeom prst="rect">
+            <a:avLst/>
+          </a:prstGeom>
+          <a:noFill/>
+        </p:spPr>
+        <p:txBody>
+          <a:bodyPr wrap="square" anchor="t" lIns="0" rIns="0" tIns="0" bIns="0">
+            <a:spAutoFit/>
+          </a:bodyPr>
+          <a:lstStyle/>
+          <a:p>
+            <a:pPr algn="ctr"/>
+            <a:r>
+              <a:rPr sz="2600" b="1">
+                <a:solidFill>
+                  <a:srgbClr val="E9EDF3"/>
+                </a:solidFill>
+                <a:latin typeface="Consolas"/>
+              </a:rPr>
+              <a:t>through</a:t>
+            </a:r>
+          </a:p>
+        </p:txBody>
+      </p:sp>
+      <p:sp>
+        <p:nvSpPr>
+          <p:cNvPr id="19" name="TextBox 18"/>
+          <p:cNvSpPr txBox="1"/>
+          <p:nvPr/>
+        </p:nvSpPr>
+        <p:spPr>
+          <a:xfrm>
+            <a:off x="4507992" y="5303520"/>
+            <a:ext cx="3429000" cy="320040"/>
+          </a:xfrm>
+          <a:prstGeom prst="rect">
+            <a:avLst/>
+          </a:prstGeom>
+          <a:noFill/>
+        </p:spPr>
+        <p:txBody>
+          <a:bodyPr wrap="square" anchor="t" lIns="0" rIns="0" tIns="0" bIns="0">
+            <a:spAutoFit/>
+          </a:bodyPr>
+          <a:lstStyle/>
+          <a:p>
+            <a:pPr algn="ctr"/>
+            <a:r>
+              <a:rPr sz="1250" b="0">
+                <a:solidFill>
+                  <a:srgbClr val="93A3B5"/>
+                </a:solidFill>
+                <a:latin typeface="Segoe UI"/>
+              </a:rPr>
+              <a:t>occlusions</a:t>
+            </a:r>
+          </a:p>
+        </p:txBody>
+      </p:sp>
+      <p:sp>
+        <p:nvSpPr>
+          <p:cNvPr id="20" name="Rounded Rectangle 19"/>
           <p:cNvSpPr/>
           <p:nvPr/>
         </p:nvSpPr>
         <p:spPr>
           <a:xfrm>
-            <a:off x="3886108" y="3337560"/>
-            <a:ext cx="201168" cy="201168"/>
+            <a:off x="8193024" y="2286000"/>
+            <a:ext cx="3429000" cy="3566160"/>
           </a:xfrm>
           <a:prstGeom prst="roundRect">
             <a:avLst>
@@ -5272,10 +5696,12 @@
             </a:avLst>
           </a:prstGeom>
           <a:solidFill>
-            <a:srgbClr val="E4573D"/>
+            <a:srgbClr val="131A23"/>
           </a:solidFill>
-          <a:ln>
-            <a:noFill/>
+          <a:ln w="25400">
+            <a:solidFill>
+              <a:srgbClr val="B07D18"/>
+            </a:solidFill>
           </a:ln>
           <a:effectLst/>
         </p:spPr>
@@ -5303,14 +5729,14 @@
       </p:sp>
       <p:sp>
         <p:nvSpPr>
-          <p:cNvPr id="9" name="TextBox 8"/>
+          <p:cNvPr id="21" name="TextBox 20"/>
           <p:cNvSpPr txBox="1"/>
           <p:nvPr/>
         </p:nvSpPr>
         <p:spPr>
           <a:xfrm>
-            <a:off x="2706532" y="3703320"/>
-            <a:ext cx="2560320" cy="365760"/>
+            <a:off x="8193024" y="2514600"/>
+            <a:ext cx="3429000" cy="320040"/>
           </a:xfrm>
           <a:prstGeom prst="rect">
             <a:avLst/>
@@ -5325,27 +5751,27 @@
           <a:p>
             <a:pPr algn="ctr"/>
             <a:r>
-              <a:rPr sz="1600" b="1">
-                <a:solidFill>
-                  <a:srgbClr val="E9EDF3"/>
-                </a:solidFill>
-                <a:latin typeface="Segoe UI"/>
-              </a:rPr>
-              <a:t>Metric was noise</a:t>
-            </a:r>
-          </a:p>
-        </p:txBody>
-      </p:sp>
-      <p:sp>
-        <p:nvSpPr>
-          <p:cNvPr id="10" name="TextBox 9"/>
+              <a:rPr sz="1300" b="1">
+                <a:solidFill>
+                  <a:srgbClr val="F5B63F"/>
+                </a:solidFill>
+                <a:latin typeface="Consolas"/>
+              </a:rPr>
+              <a:t>OVERLAP REGIONS</a:t>
+            </a:r>
+          </a:p>
+        </p:txBody>
+      </p:sp>
+      <p:sp>
+        <p:nvSpPr>
+          <p:cNvPr id="22" name="TextBox 21"/>
           <p:cNvSpPr txBox="1"/>
           <p:nvPr/>
         </p:nvSpPr>
         <p:spPr>
           <a:xfrm>
-            <a:off x="2706532" y="4050791"/>
-            <a:ext cx="2560320" cy="457200"/>
+            <a:off x="8193024" y="3017520"/>
+            <a:ext cx="3429000" cy="457200"/>
           </a:xfrm>
           <a:prstGeom prst="rect">
             <a:avLst/>
@@ -5360,73 +5786,27 @@
           <a:p>
             <a:pPr algn="ctr"/>
             <a:r>
-              <a:rPr sz="1250" b="0">
-                <a:solidFill>
-                  <a:srgbClr val="93A3B5"/>
-                </a:solidFill>
-                <a:latin typeface="Segoe UI"/>
-              </a:rPr>
-              <a:t>gains mathematically invisible</a:t>
-            </a:r>
-          </a:p>
-        </p:txBody>
-      </p:sp>
-      <p:sp>
-        <p:nvSpPr>
-          <p:cNvPr id="11" name="Rounded Rectangle 10"/>
-          <p:cNvSpPr/>
-          <p:nvPr/>
-        </p:nvSpPr>
-        <p:spPr>
-          <a:xfrm>
-            <a:off x="5995263" y="3337560"/>
-            <a:ext cx="201168" cy="201168"/>
-          </a:xfrm>
-          <a:prstGeom prst="roundRect">
-            <a:avLst>
-              <a:gd name="adj" fmla="val 6000"/>
-            </a:avLst>
-          </a:prstGeom>
-          <a:solidFill>
-            <a:srgbClr val="B07D18"/>
-          </a:solidFill>
-          <a:ln>
-            <a:noFill/>
-          </a:ln>
-          <a:effectLst/>
-        </p:spPr>
-        <p:style>
-          <a:lnRef idx="1">
-            <a:schemeClr val="accent1"/>
-          </a:lnRef>
-          <a:fillRef idx="3">
-            <a:schemeClr val="accent1"/>
-          </a:fillRef>
-          <a:effectRef idx="2">
-            <a:schemeClr val="accent1"/>
-          </a:effectRef>
-          <a:fontRef idx="minor">
-            <a:schemeClr val="lt1"/>
-          </a:fontRef>
-        </p:style>
-        <p:txBody>
-          <a:bodyPr rtlCol="0" anchor="ctr"/>
-          <a:lstStyle/>
-          <a:p>
-            <a:pPr algn="ctr"/>
-          </a:p>
-        </p:txBody>
-      </p:sp>
-      <p:sp>
-        <p:nvSpPr>
-          <p:cNvPr id="12" name="TextBox 11"/>
+              <a:rPr sz="2600" b="1">
+                <a:solidFill>
+                  <a:srgbClr val="E9EDF3"/>
+                </a:solidFill>
+                <a:latin typeface="Consolas"/>
+              </a:rPr>
+              <a:t>0.055</a:t>
+            </a:r>
+          </a:p>
+        </p:txBody>
+      </p:sp>
+      <p:sp>
+        <p:nvSpPr>
+          <p:cNvPr id="23" name="TextBox 22"/>
           <p:cNvSpPr txBox="1"/>
           <p:nvPr/>
         </p:nvSpPr>
         <p:spPr>
           <a:xfrm>
-            <a:off x="4815687" y="2286000"/>
-            <a:ext cx="2560320" cy="365760"/>
+            <a:off x="8193024" y="3474720"/>
+            <a:ext cx="3429000" cy="320040"/>
           </a:xfrm>
           <a:prstGeom prst="rect">
             <a:avLst/>
@@ -5441,27 +5821,27 @@
           <a:p>
             <a:pPr algn="ctr"/>
             <a:r>
-              <a:rPr sz="1600" b="1">
-                <a:solidFill>
-                  <a:srgbClr val="E9EDF3"/>
+              <a:rPr sz="1250" b="0">
+                <a:solidFill>
+                  <a:srgbClr val="93A3B5"/>
                 </a:solidFill>
                 <a:latin typeface="Segoe UI"/>
               </a:rPr>
-              <a:t>Depth halos</a:t>
-            </a:r>
-          </a:p>
-        </p:txBody>
-      </p:sp>
-      <p:sp>
-        <p:nvSpPr>
-          <p:cNvPr id="13" name="TextBox 12"/>
+              <a:t>depth error (rel)</a:t>
+            </a:r>
+          </a:p>
+        </p:txBody>
+      </p:sp>
+      <p:sp>
+        <p:nvSpPr>
+          <p:cNvPr id="24" name="TextBox 23"/>
           <p:cNvSpPr txBox="1"/>
           <p:nvPr/>
         </p:nvSpPr>
         <p:spPr>
           <a:xfrm>
-            <a:off x="4815687" y="2633472"/>
-            <a:ext cx="2560320" cy="457200"/>
+            <a:off x="8193024" y="3931920"/>
+            <a:ext cx="3429000" cy="457200"/>
           </a:xfrm>
           <a:prstGeom prst="rect">
             <a:avLst/>
@@ -5476,73 +5856,27 @@
           <a:p>
             <a:pPr algn="ctr"/>
             <a:r>
-              <a:rPr sz="1250" b="0">
-                <a:solidFill>
-                  <a:srgbClr val="93A3B5"/>
-                </a:solidFill>
-                <a:latin typeface="Segoe UI"/>
-              </a:rPr>
-              <a:t>every edit left a ring</a:t>
-            </a:r>
-          </a:p>
-        </p:txBody>
-      </p:sp>
-      <p:sp>
-        <p:nvSpPr>
-          <p:cNvPr id="14" name="Rounded Rectangle 13"/>
-          <p:cNvSpPr/>
-          <p:nvPr/>
-        </p:nvSpPr>
-        <p:spPr>
-          <a:xfrm>
-            <a:off x="8104418" y="3337560"/>
-            <a:ext cx="201168" cy="201168"/>
-          </a:xfrm>
-          <a:prstGeom prst="roundRect">
-            <a:avLst>
-              <a:gd name="adj" fmla="val 6000"/>
-            </a:avLst>
-          </a:prstGeom>
-          <a:solidFill>
-            <a:srgbClr val="B07D18"/>
-          </a:solidFill>
-          <a:ln>
-            <a:noFill/>
-          </a:ln>
-          <a:effectLst/>
-        </p:spPr>
-        <p:style>
-          <a:lnRef idx="1">
-            <a:schemeClr val="accent1"/>
-          </a:lnRef>
-          <a:fillRef idx="3">
-            <a:schemeClr val="accent1"/>
-          </a:fillRef>
-          <a:effectRef idx="2">
-            <a:schemeClr val="accent1"/>
-          </a:effectRef>
-          <a:fontRef idx="minor">
-            <a:schemeClr val="lt1"/>
-          </a:fontRef>
-        </p:style>
-        <p:txBody>
-          <a:bodyPr rtlCol="0" anchor="ctr"/>
-          <a:lstStyle/>
-          <a:p>
-            <a:pPr algn="ctr"/>
-          </a:p>
-        </p:txBody>
-      </p:sp>
-      <p:sp>
-        <p:nvSpPr>
-          <p:cNvPr id="15" name="TextBox 14"/>
+              <a:rPr sz="2600" b="1">
+                <a:solidFill>
+                  <a:srgbClr val="E9EDF3"/>
+                </a:solidFill>
+                <a:latin typeface="Consolas"/>
+              </a:rPr>
+              <a:t>98.6%</a:t>
+            </a:r>
+          </a:p>
+        </p:txBody>
+      </p:sp>
+      <p:sp>
+        <p:nvSpPr>
+          <p:cNvPr id="25" name="TextBox 24"/>
           <p:cNvSpPr txBox="1"/>
           <p:nvPr/>
         </p:nvSpPr>
         <p:spPr>
           <a:xfrm>
-            <a:off x="6924842" y="3703320"/>
-            <a:ext cx="2560320" cy="365760"/>
+            <a:off x="8193024" y="4389120"/>
+            <a:ext cx="3429000" cy="320040"/>
           </a:xfrm>
           <a:prstGeom prst="rect">
             <a:avLst/>
@@ -5557,27 +5891,27 @@
           <a:p>
             <a:pPr algn="ctr"/>
             <a:r>
-              <a:rPr sz="1600" b="1">
-                <a:solidFill>
-                  <a:srgbClr val="E9EDF3"/>
+              <a:rPr sz="1250" b="0">
+                <a:solidFill>
+                  <a:srgbClr val="93A3B5"/>
                 </a:solidFill>
                 <a:latin typeface="Segoe UI"/>
               </a:rPr>
-              <a:t>Weights wouldn't load</a:t>
-            </a:r>
-          </a:p>
-        </p:txBody>
-      </p:sp>
-      <p:sp>
-        <p:nvSpPr>
-          <p:cNvPr id="16" name="TextBox 15"/>
+              <a:t>accuracy</a:t>
+            </a:r>
+          </a:p>
+        </p:txBody>
+      </p:sp>
+      <p:sp>
+        <p:nvSpPr>
+          <p:cNvPr id="26" name="TextBox 25"/>
           <p:cNvSpPr txBox="1"/>
           <p:nvPr/>
         </p:nvSpPr>
         <p:spPr>
           <a:xfrm>
-            <a:off x="6924842" y="4050791"/>
-            <a:ext cx="2560320" cy="457200"/>
+            <a:off x="8193024" y="4846320"/>
+            <a:ext cx="3429000" cy="457200"/>
           </a:xfrm>
           <a:prstGeom prst="rect">
             <a:avLst/>
@@ -5592,73 +5926,27 @@
           <a:p>
             <a:pPr algn="ctr"/>
             <a:r>
-              <a:rPr sz="1250" b="0">
-                <a:solidFill>
-                  <a:srgbClr val="93A3B5"/>
-                </a:solidFill>
-                <a:latin typeface="Segoe UI"/>
-              </a:rPr>
-              <a:t>a library renamed everything</a:t>
-            </a:r>
-          </a:p>
-        </p:txBody>
-      </p:sp>
-      <p:sp>
-        <p:nvSpPr>
-          <p:cNvPr id="17" name="Rounded Rectangle 16"/>
-          <p:cNvSpPr/>
-          <p:nvPr/>
-        </p:nvSpPr>
-        <p:spPr>
-          <a:xfrm>
-            <a:off x="10213573" y="3337560"/>
-            <a:ext cx="201168" cy="201168"/>
-          </a:xfrm>
-          <a:prstGeom prst="roundRect">
-            <a:avLst>
-              <a:gd name="adj" fmla="val 6000"/>
-            </a:avLst>
-          </a:prstGeom>
-          <a:solidFill>
-            <a:srgbClr val="B07D18"/>
-          </a:solidFill>
-          <a:ln>
-            <a:noFill/>
-          </a:ln>
-          <a:effectLst/>
-        </p:spPr>
-        <p:style>
-          <a:lnRef idx="1">
-            <a:schemeClr val="accent1"/>
-          </a:lnRef>
-          <a:fillRef idx="3">
-            <a:schemeClr val="accent1"/>
-          </a:fillRef>
-          <a:effectRef idx="2">
-            <a:schemeClr val="accent1"/>
-          </a:effectRef>
-          <a:fontRef idx="minor">
-            <a:schemeClr val="lt1"/>
-          </a:fontRef>
-        </p:style>
-        <p:txBody>
-          <a:bodyPr rtlCol="0" anchor="ctr"/>
-          <a:lstStyle/>
-          <a:p>
-            <a:pPr algn="ctr"/>
-          </a:p>
-        </p:txBody>
-      </p:sp>
-      <p:sp>
-        <p:nvSpPr>
-          <p:cNvPr id="18" name="TextBox 17"/>
+              <a:rPr sz="2600" b="1">
+                <a:solidFill>
+                  <a:srgbClr val="E9EDF3"/>
+                </a:solidFill>
+                <a:latin typeface="Consolas"/>
+              </a:rPr>
+              <a:t>±15%</a:t>
+            </a:r>
+          </a:p>
+        </p:txBody>
+      </p:sp>
+      <p:sp>
+        <p:nvSpPr>
+          <p:cNvPr id="27" name="TextBox 26"/>
           <p:cNvSpPr txBox="1"/>
           <p:nvPr/>
         </p:nvSpPr>
         <p:spPr>
           <a:xfrm>
-            <a:off x="9033997" y="2286000"/>
-            <a:ext cx="2560320" cy="365760"/>
+            <a:off x="8193024" y="5303520"/>
+            <a:ext cx="3429000" cy="320040"/>
           </a:xfrm>
           <a:prstGeom prst="rect">
             <a:avLst/>
@@ -5673,27 +5961,27 @@
           <a:p>
             <a:pPr algn="ctr"/>
             <a:r>
-              <a:rPr sz="1600" b="1">
-                <a:solidFill>
-                  <a:srgbClr val="E9EDF3"/>
+              <a:rPr sz="1250" b="0">
+                <a:solidFill>
+                  <a:srgbClr val="93A3B5"/>
                 </a:solidFill>
                 <a:latin typeface="Segoe UI"/>
               </a:rPr>
-              <a:t>Empty-frame crash</a:t>
-            </a:r>
-          </a:p>
-        </p:txBody>
-      </p:sp>
-      <p:sp>
-        <p:nvSpPr>
-          <p:cNvPr id="19" name="TextBox 18"/>
+              <a:t>corrections, capped</a:t>
+            </a:r>
+          </a:p>
+        </p:txBody>
+      </p:sp>
+      <p:sp>
+        <p:nvSpPr>
+          <p:cNvPr id="28" name="TextBox 27"/>
           <p:cNvSpPr txBox="1"/>
           <p:nvPr/>
         </p:nvSpPr>
         <p:spPr>
           <a:xfrm>
-            <a:off x="9033997" y="2633472"/>
-            <a:ext cx="2560320" cy="457200"/>
+            <a:off x="822960" y="6291072"/>
+            <a:ext cx="10545775" cy="365760"/>
           </a:xfrm>
           <a:prstGeom prst="rect">
             <a:avLst/>
@@ -5706,7 +5994,7 @@
           </a:bodyPr>
           <a:lstStyle/>
           <a:p>
-            <a:pPr algn="ctr"/>
+            <a:pPr algn="l"/>
             <a:r>
               <a:rPr sz="1250" b="0">
                 <a:solidFill>
@@ -5714,42 +6002,7 @@
                 </a:solidFill>
                 <a:latin typeface="Segoe UI"/>
               </a:rPr>
-              <a:t>only when nobody overlapped</a:t>
-            </a:r>
-          </a:p>
-        </p:txBody>
-      </p:sp>
-      <p:sp>
-        <p:nvSpPr>
-          <p:cNvPr id="20" name="TextBox 19"/>
-          <p:cNvSpPr txBox="1"/>
-          <p:nvPr/>
-        </p:nvSpPr>
-        <p:spPr>
-          <a:xfrm>
-            <a:off x="822960" y="5120640"/>
-            <a:ext cx="10545775" cy="365760"/>
-          </a:xfrm>
-          <a:prstGeom prst="rect">
-            <a:avLst/>
-          </a:prstGeom>
-          <a:noFill/>
-        </p:spPr>
-        <p:txBody>
-          <a:bodyPr wrap="square" anchor="t" lIns="0" rIns="0" tIns="0" bIns="0">
-            <a:spAutoFit/>
-          </a:bodyPr>
-          <a:lstStyle/>
-          <a:p>
-            <a:pPr algn="ctr"/>
-            <a:r>
-              <a:rPr sz="1600" b="0">
-                <a:solidFill>
-                  <a:srgbClr val="3ED2BC"/>
-                </a:solidFill>
-                <a:latin typeface="Segoe UI"/>
-              </a:rPr>
-              <a:t>every one of these is now a regression test ✓</a:t>
+              <a:t>Full held-out test set · 10,400 frames · 3,083 with real person-on-person overlap.</a:t>
             </a:r>
           </a:p>
         </p:txBody>
@@ -5810,7 +6063,7 @@
                 </a:solidFill>
                 <a:latin typeface="Consolas"/>
               </a:rPr>
-              <a:t>LESSONS</a:t>
+              <a:t>BEYOND THE PAPER</a:t>
             </a:r>
           </a:p>
         </p:txBody>
@@ -5824,7 +6077,7 @@
         <p:spPr>
           <a:xfrm>
             <a:off x="822960" y="1051560"/>
-            <a:ext cx="10058400" cy="1097280"/>
+            <a:ext cx="10972800" cy="1097280"/>
           </a:xfrm>
           <a:prstGeom prst="rect">
             <a:avLst/>
@@ -5845,7 +6098,7 @@
                 </a:solidFill>
                 <a:latin typeface="Segoe UI"/>
               </a:rPr>
-              <a:t>What we learned</a:t>
+              <a:t>What this project adds</a:t>
             </a:r>
           </a:p>
         </p:txBody>
@@ -5858,7 +6111,7 @@
         </p:nvSpPr>
         <p:spPr>
           <a:xfrm>
-            <a:off x="822960" y="2468880"/>
+            <a:off x="822960" y="2377440"/>
             <a:ext cx="5029200" cy="1600200"/>
           </a:xfrm>
           <a:prstGeom prst="roundRect">
@@ -5869,9 +6122,9 @@
           <a:solidFill>
             <a:srgbClr val="131A23"/>
           </a:solidFill>
-          <a:ln w="12700">
+          <a:ln w="22225">
             <a:solidFill>
-              <a:srgbClr val="2A3542"/>
+              <a:srgbClr val="1FA491"/>
             </a:solidFill>
           </a:ln>
           <a:effectLst/>
@@ -5906,8 +6159,8 @@
         </p:nvSpPr>
         <p:spPr>
           <a:xfrm>
-            <a:off x="1143000" y="2697480"/>
-            <a:ext cx="4389120" cy="640080"/>
+            <a:off x="1143000" y="2606040"/>
+            <a:ext cx="4389120" cy="548640"/>
           </a:xfrm>
           <a:prstGeom prst="rect">
             <a:avLst/>
@@ -5922,13 +6175,13 @@
           <a:p>
             <a:pPr algn="l"/>
             <a:r>
-              <a:rPr sz="2100" b="1">
+              <a:rPr sz="2000" b="1">
                 <a:solidFill>
                   <a:srgbClr val="E9EDF3"/>
                 </a:solidFill>
                 <a:latin typeface="Segoe UI"/>
               </a:rPr>
-              <a:t>“No gradient, no learning.”</a:t>
+              <a:t>A dataset that didn't exist</a:t>
             </a:r>
           </a:p>
         </p:txBody>
@@ -5941,8 +6194,8 @@
         </p:nvSpPr>
         <p:spPr>
           <a:xfrm>
-            <a:off x="1143000" y="3383280"/>
-            <a:ext cx="4389120" cy="548640"/>
+            <a:off x="1143000" y="3246120"/>
+            <a:ext cx="4389120" cy="640080"/>
           </a:xfrm>
           <a:prstGeom prst="rect">
             <a:avLst/>
@@ -5957,13 +6210,13 @@
           <a:p>
             <a:pPr algn="l"/>
             <a:r>
-              <a:rPr sz="1400" b="0">
+              <a:rPr sz="1350" b="0">
                 <a:solidFill>
                   <a:srgbClr val="93A3B5"/>
                 </a:solidFill>
                 <a:latin typeface="Segoe UI"/>
               </a:rPr>
-              <a:t>A module changes nothing unless the loss asks it to.</a:t>
+              <a:t>full instance-depth ground truth, hand-built from raw RGB + depth</a:t>
             </a:r>
           </a:p>
         </p:txBody>
@@ -5976,7 +6229,7 @@
         </p:nvSpPr>
         <p:spPr>
           <a:xfrm>
-            <a:off x="6217920" y="2468880"/>
+            <a:off x="6217920" y="2377440"/>
             <a:ext cx="5029200" cy="1600200"/>
           </a:xfrm>
           <a:prstGeom prst="roundRect">
@@ -5987,9 +6240,9 @@
           <a:solidFill>
             <a:srgbClr val="131A23"/>
           </a:solidFill>
-          <a:ln w="12700">
+          <a:ln w="22225">
             <a:solidFill>
-              <a:srgbClr val="2A3542"/>
+              <a:srgbClr val="3E6FD9"/>
             </a:solidFill>
           </a:ln>
           <a:effectLst/>
@@ -6024,8 +6277,8 @@
         </p:nvSpPr>
         <p:spPr>
           <a:xfrm>
-            <a:off x="6537960" y="2697480"/>
-            <a:ext cx="4389120" cy="640080"/>
+            <a:off x="6537960" y="2606040"/>
+            <a:ext cx="4389120" cy="548640"/>
           </a:xfrm>
           <a:prstGeom prst="rect">
             <a:avLst/>
@@ -6040,13 +6293,13 @@
           <a:p>
             <a:pPr algn="l"/>
             <a:r>
-              <a:rPr sz="2100" b="1">
+              <a:rPr sz="2000" b="1">
                 <a:solidFill>
                   <a:srgbClr val="E9EDF3"/>
                 </a:solidFill>
                 <a:latin typeface="Segoe UI"/>
               </a:rPr>
-              <a:t>“Measure the noise floor first.”</a:t>
+              <a:t>Video-native depth</a:t>
             </a:r>
           </a:p>
         </p:txBody>
@@ -6059,8 +6312,8 @@
         </p:nvSpPr>
         <p:spPr>
           <a:xfrm>
-            <a:off x="6537960" y="3383280"/>
-            <a:ext cx="4389120" cy="548640"/>
+            <a:off x="6537960" y="3246120"/>
+            <a:ext cx="4389120" cy="640080"/>
           </a:xfrm>
           <a:prstGeom prst="rect">
             <a:avLst/>
@@ -6075,13 +6328,13 @@
           <a:p>
             <a:pPr algn="l"/>
             <a:r>
-              <a:rPr sz="1400" b="0">
+              <a:rPr sz="1350" b="0">
                 <a:solidFill>
                   <a:srgbClr val="93A3B5"/>
                 </a:solidFill>
                 <a:latin typeface="Segoe UI"/>
               </a:rPr>
-              <a:t>Our metric couldn't even see the improvement we chased.</a:t>
+              <a:t>temporal memory + a flicker-aware loss -- the paper is single-frame</a:t>
             </a:r>
           </a:p>
         </p:txBody>
@@ -6094,7 +6347,7 @@
         </p:nvSpPr>
         <p:spPr>
           <a:xfrm>
-            <a:off x="822960" y="4389120"/>
+            <a:off x="822960" y="4297680"/>
             <a:ext cx="5029200" cy="1600200"/>
           </a:xfrm>
           <a:prstGeom prst="roundRect">
@@ -6105,9 +6358,9 @@
           <a:solidFill>
             <a:srgbClr val="131A23"/>
           </a:solidFill>
-          <a:ln w="12700">
+          <a:ln w="22225">
             <a:solidFill>
-              <a:srgbClr val="2A3542"/>
+              <a:srgbClr val="B07D18"/>
             </a:solidFill>
           </a:ln>
           <a:effectLst/>
@@ -6142,8 +6395,8 @@
         </p:nvSpPr>
         <p:spPr>
           <a:xfrm>
-            <a:off x="1143000" y="4617720"/>
-            <a:ext cx="4389120" cy="640080"/>
+            <a:off x="1143000" y="4526280"/>
+            <a:ext cx="4389120" cy="548640"/>
           </a:xfrm>
           <a:prstGeom prst="rect">
             <a:avLst/>
@@ -6158,13 +6411,13 @@
           <a:p>
             <a:pPr algn="l"/>
             <a:r>
-              <a:rPr sz="2100" b="1">
+              <a:rPr sz="2000" b="1">
                 <a:solidFill>
                   <a:srgbClr val="E9EDF3"/>
                 </a:solidFill>
                 <a:latin typeface="Segoe UI"/>
               </a:rPr>
-              <a:t>“Freezing can beat fine-tuning.”</a:t>
+              <a:t>Identities that persist</a:t>
             </a:r>
           </a:p>
         </p:txBody>
@@ -6177,8 +6430,8 @@
         </p:nvSpPr>
         <p:spPr>
           <a:xfrm>
-            <a:off x="1143000" y="5303520"/>
-            <a:ext cx="4389120" cy="548640"/>
+            <a:off x="1143000" y="5166360"/>
+            <a:ext cx="4389120" cy="640080"/>
           </a:xfrm>
           <a:prstGeom prst="rect">
             <a:avLst/>
@@ -6193,13 +6446,13 @@
           <a:p>
             <a:pPr algn="l"/>
             <a:r>
-              <a:rPr sz="1400" b="0">
+              <a:rPr sz="1350" b="0">
                 <a:solidFill>
                   <a:srgbClr val="93A3B5"/>
                 </a:solidFill>
                 <a:latin typeface="Segoe UI"/>
               </a:rPr>
-              <a:t>Protect what already works; edit only what you supervise.</a:t>
+              <a:t>one person, one identity, held through occlusions -- not re-found each frame</a:t>
             </a:r>
           </a:p>
         </p:txBody>
@@ -6212,7 +6465,7 @@
         </p:nvSpPr>
         <p:spPr>
           <a:xfrm>
-            <a:off x="6217920" y="4389120"/>
+            <a:off x="6217920" y="4297680"/>
             <a:ext cx="5029200" cy="1600200"/>
           </a:xfrm>
           <a:prstGeom prst="roundRect">
@@ -6223,9 +6476,9 @@
           <a:solidFill>
             <a:srgbClr val="131A23"/>
           </a:solidFill>
-          <a:ln w="12700">
+          <a:ln w="22225">
             <a:solidFill>
-              <a:srgbClr val="2A3542"/>
+              <a:srgbClr val="F2836C"/>
             </a:solidFill>
           </a:ln>
           <a:effectLst/>
@@ -6260,8 +6513,8 @@
         </p:nvSpPr>
         <p:spPr>
           <a:xfrm>
-            <a:off x="6537960" y="4617720"/>
-            <a:ext cx="4389120" cy="640080"/>
+            <a:off x="6537960" y="4526280"/>
+            <a:ext cx="4389120" cy="548640"/>
           </a:xfrm>
           <a:prstGeom prst="rect">
             <a:avLst/>
@@ -6276,13 +6529,13 @@
           <a:p>
             <a:pPr algn="l"/>
             <a:r>
-              <a:rPr sz="2100" b="1">
+              <a:rPr sz="2000" b="1">
                 <a:solidFill>
                   <a:srgbClr val="E9EDF3"/>
                 </a:solidFill>
                 <a:latin typeface="Segoe UI"/>
               </a:rPr>
-              <a:t>“Rehearse tiny, then train big.”</a:t>
+              <a:t>Refinement, safe by construction</a:t>
             </a:r>
           </a:p>
         </p:txBody>
@@ -6295,8 +6548,8 @@
         </p:nvSpPr>
         <p:spPr>
           <a:xfrm>
-            <a:off x="6537960" y="5303520"/>
-            <a:ext cx="4389120" cy="548640"/>
+            <a:off x="6537960" y="5166360"/>
+            <a:ext cx="4389120" cy="640080"/>
           </a:xfrm>
           <a:prstGeom prst="rect">
             <a:avLst/>
@@ -6311,13 +6564,13 @@
           <a:p>
             <a:pPr algn="l"/>
             <a:r>
-              <a:rPr sz="1400" b="0">
+              <a:rPr sz="1350" b="0">
                 <a:solidFill>
                   <a:srgbClr val="93A3B5"/>
                 </a:solidFill>
                 <a:latin typeface="Segoe UI"/>
               </a:rPr>
-              <a:t>A 10-minute dry run has caught four crashes so far.</a:t>
+              <a:t>frozen scene + capped corrections: it can help, it cannot harm</a:t>
             </a:r>
           </a:p>
         </p:txBody>
@@ -6378,7 +6631,7 @@
                 </a:solidFill>
                 <a:latin typeface="Consolas"/>
               </a:rPr>
-              <a:t>WHERE WE ARE</a:t>
+              <a:t>DEMO</a:t>
             </a:r>
           </a:p>
         </p:txBody>
@@ -6413,7 +6666,7 @@
                 </a:solidFill>
                 <a:latin typeface="Segoe UI"/>
               </a:rPr>
-              <a:t>Shipped -- and the one big lever left</a:t>
+              <a:t>All of it, in one clip</a:t>
             </a:r>
           </a:p>
         </p:txBody>
@@ -6426,8 +6679,8 @@
         </p:nvSpPr>
         <p:spPr>
           <a:xfrm>
-            <a:off x="822960" y="2423160"/>
-            <a:ext cx="3794760" cy="1417320"/>
+            <a:off x="822960" y="2194560"/>
+            <a:ext cx="10545775" cy="3383280"/>
           </a:xfrm>
           <a:prstGeom prst="roundRect">
             <a:avLst>
@@ -6435,12 +6688,13 @@
             </a:avLst>
           </a:prstGeom>
           <a:solidFill>
-            <a:srgbClr val="131A23"/>
+            <a:srgbClr val="182230"/>
           </a:solidFill>
-          <a:ln w="12700">
+          <a:ln w="19050">
             <a:solidFill>
-              <a:srgbClr val="2A3542"/>
+              <a:srgbClr val="F5B63F"/>
             </a:solidFill>
+            <a:prstDash val="dash"/>
           </a:ln>
           <a:effectLst/>
         </p:spPr>
@@ -6459,10 +6713,55 @@
           </a:fontRef>
         </p:style>
         <p:txBody>
-          <a:bodyPr rtlCol="0" anchor="ctr"/>
-          <a:lstStyle/>
-          <a:p>
-            <a:pPr algn="ctr"/>
+          <a:bodyPr rtlCol="0" anchor="ctr" wrap="square"/>
+          <a:lstStyle/>
+          <a:p>
+            <a:pPr algn="ctr">
+              <a:spcBef>
+                <a:spcPts val="300"/>
+              </a:spcBef>
+            </a:pPr>
+            <a:r>
+              <a:rPr sz="1100" b="1">
+                <a:solidFill>
+                  <a:srgbClr val="F5B63F"/>
+                </a:solidFill>
+                <a:latin typeface="Consolas"/>
+              </a:rPr>
+              <a:t>V5 · VIDEO -- THE DEMO</a:t>
+            </a:r>
+          </a:p>
+          <a:p>
+            <a:pPr algn="ctr">
+              <a:spcBef>
+                <a:spcPts val="300"/>
+              </a:spcBef>
+            </a:pPr>
+            <a:r>
+              <a:rPr sz="1250" b="0">
+                <a:solidFill>
+                  <a:srgbClr val="E9EDF3"/>
+                </a:solidFill>
+                <a:latin typeface="Segoe UI"/>
+              </a:rPr>
+              <a:t>One person walks behind another -- same colour, same depth, steady scene</a:t>
+            </a:r>
+          </a:p>
+          <a:p>
+            <a:pPr algn="ctr">
+              <a:spcBef>
+                <a:spcPts val="300"/>
+              </a:spcBef>
+            </a:pPr>
+            <a:r>
+              <a:rPr sz="1000" b="0">
+                <a:solidFill>
+                  <a:srgbClr val="5C6B7E"/>
+                </a:solidFill>
+                <a:latin typeface="Consolas"/>
+              </a:rPr>
+              <a:t>~1128x380 · make_sequence_videos.py --track-instances</a:t>
+            </a:r>
           </a:p>
         </p:txBody>
       </p:sp>
@@ -6474,8 +6773,8 @@
         </p:nvSpPr>
         <p:spPr>
           <a:xfrm>
-            <a:off x="1097280" y="2606040"/>
-            <a:ext cx="3246120" cy="548640"/>
+            <a:off x="822960" y="5715000"/>
+            <a:ext cx="10545775" cy="365760"/>
           </a:xfrm>
           <a:prstGeom prst="rect">
             <a:avLst/>
@@ -6488,611 +6787,15 @@
           </a:bodyPr>
           <a:lstStyle/>
           <a:p>
-            <a:pPr algn="l"/>
-            <a:r>
-              <a:rPr sz="1600" b="1">
-                <a:solidFill>
-                  <a:srgbClr val="E9EDF3"/>
+            <a:pPr algn="ctr"/>
+            <a:r>
+              <a:rPr sz="1500" b="0">
+                <a:solidFill>
+                  <a:srgbClr val="93A3B5"/>
                 </a:solidFill>
                 <a:latin typeface="Segoe UI"/>
               </a:rPr>
-              <a:t>Punish flicker, not motion  </a:t>
-            </a:r>
-            <a:r>
-              <a:rPr sz="1600" b="1">
-                <a:solidFill>
-                  <a:srgbClr val="3ED2BC"/>
-                </a:solidFill>
-                <a:latin typeface="Segoe UI"/>
-              </a:rPr>
-              <a:t>✓</a:t>
-            </a:r>
-          </a:p>
-        </p:txBody>
-      </p:sp>
-      <p:sp>
-        <p:nvSpPr>
-          <p:cNvPr id="6" name="TextBox 5"/>
-          <p:cNvSpPr txBox="1"/>
-          <p:nvPr/>
-        </p:nvSpPr>
-        <p:spPr>
-          <a:xfrm>
-            <a:off x="1097280" y="3200400"/>
-            <a:ext cx="3246120" cy="548640"/>
-          </a:xfrm>
-          <a:prstGeom prst="rect">
-            <a:avLst/>
-          </a:prstGeom>
-          <a:noFill/>
-        </p:spPr>
-        <p:txBody>
-          <a:bodyPr wrap="square" anchor="t" lIns="0" rIns="0" tIns="0" bIns="0">
-            <a:spAutoFit/>
-          </a:bodyPr>
-          <a:lstStyle/>
-          <a:p>
-            <a:pPr algn="l"/>
-            <a:r>
-              <a:rPr sz="1300" b="0">
-                <a:solidFill>
-                  <a:srgbClr val="93A3B5"/>
-                </a:solidFill>
-                <a:latin typeface="Segoe UI"/>
-              </a:rPr>
-              <a:t>the loss that woke the memory module up</a:t>
-            </a:r>
-          </a:p>
-        </p:txBody>
-      </p:sp>
-      <p:sp>
-        <p:nvSpPr>
-          <p:cNvPr id="7" name="Rounded Rectangle 6"/>
-          <p:cNvSpPr/>
-          <p:nvPr/>
-        </p:nvSpPr>
-        <p:spPr>
-          <a:xfrm>
-            <a:off x="4892040" y="2423160"/>
-            <a:ext cx="3794760" cy="1417320"/>
-          </a:xfrm>
-          <a:prstGeom prst="roundRect">
-            <a:avLst>
-              <a:gd name="adj" fmla="val 6000"/>
-            </a:avLst>
-          </a:prstGeom>
-          <a:solidFill>
-            <a:srgbClr val="131A23"/>
-          </a:solidFill>
-          <a:ln w="12700">
-            <a:solidFill>
-              <a:srgbClr val="2A3542"/>
-            </a:solidFill>
-          </a:ln>
-          <a:effectLst/>
-        </p:spPr>
-        <p:style>
-          <a:lnRef idx="1">
-            <a:schemeClr val="accent1"/>
-          </a:lnRef>
-          <a:fillRef idx="3">
-            <a:schemeClr val="accent1"/>
-          </a:fillRef>
-          <a:effectRef idx="2">
-            <a:schemeClr val="accent1"/>
-          </a:effectRef>
-          <a:fontRef idx="minor">
-            <a:schemeClr val="lt1"/>
-          </a:fontRef>
-        </p:style>
-        <p:txBody>
-          <a:bodyPr rtlCol="0" anchor="ctr"/>
-          <a:lstStyle/>
-          <a:p>
-            <a:pPr algn="ctr"/>
-          </a:p>
-        </p:txBody>
-      </p:sp>
-      <p:sp>
-        <p:nvSpPr>
-          <p:cNvPr id="8" name="TextBox 7"/>
-          <p:cNvSpPr txBox="1"/>
-          <p:nvPr/>
-        </p:nvSpPr>
-        <p:spPr>
-          <a:xfrm>
-            <a:off x="5166360" y="2606040"/>
-            <a:ext cx="3246120" cy="548640"/>
-          </a:xfrm>
-          <a:prstGeom prst="rect">
-            <a:avLst/>
-          </a:prstGeom>
-          <a:noFill/>
-        </p:spPr>
-        <p:txBody>
-          <a:bodyPr wrap="square" anchor="t" lIns="0" rIns="0" tIns="0" bIns="0">
-            <a:spAutoFit/>
-          </a:bodyPr>
-          <a:lstStyle/>
-          <a:p>
-            <a:pPr algn="l"/>
-            <a:r>
-              <a:rPr sz="1600" b="1">
-                <a:solidFill>
-                  <a:srgbClr val="E9EDF3"/>
-                </a:solidFill>
-                <a:latin typeface="Segoe UI"/>
-              </a:rPr>
-              <a:t>Train where movement lives  </a:t>
-            </a:r>
-            <a:r>
-              <a:rPr sz="1600" b="1">
-                <a:solidFill>
-                  <a:srgbClr val="3ED2BC"/>
-                </a:solidFill>
-                <a:latin typeface="Segoe UI"/>
-              </a:rPr>
-              <a:t>✓</a:t>
-            </a:r>
-          </a:p>
-        </p:txBody>
-      </p:sp>
-      <p:sp>
-        <p:nvSpPr>
-          <p:cNvPr id="9" name="TextBox 8"/>
-          <p:cNvSpPr txBox="1"/>
-          <p:nvPr/>
-        </p:nvSpPr>
-        <p:spPr>
-          <a:xfrm>
-            <a:off x="5166360" y="3200400"/>
-            <a:ext cx="3246120" cy="548640"/>
-          </a:xfrm>
-          <a:prstGeom prst="rect">
-            <a:avLst/>
-          </a:prstGeom>
-          <a:noFill/>
-        </p:spPr>
-        <p:txBody>
-          <a:bodyPr wrap="square" anchor="t" lIns="0" rIns="0" tIns="0" bIns="0">
-            <a:spAutoFit/>
-          </a:bodyPr>
-          <a:lstStyle/>
-          <a:p>
-            <a:pPr algn="l"/>
-            <a:r>
-              <a:rPr sz="1300" b="0">
-                <a:solidFill>
-                  <a:srgbClr val="93A3B5"/>
-                </a:solidFill>
-                <a:latin typeface="Segoe UI"/>
-              </a:rPr>
-              <a:t>clips chosen by measured motion</a:t>
-            </a:r>
-          </a:p>
-        </p:txBody>
-      </p:sp>
-      <p:sp>
-        <p:nvSpPr>
-          <p:cNvPr id="10" name="Rounded Rectangle 9"/>
-          <p:cNvSpPr/>
-          <p:nvPr/>
-        </p:nvSpPr>
-        <p:spPr>
-          <a:xfrm>
-            <a:off x="822960" y="4114800"/>
-            <a:ext cx="3794760" cy="1417320"/>
-          </a:xfrm>
-          <a:prstGeom prst="roundRect">
-            <a:avLst>
-              <a:gd name="adj" fmla="val 6000"/>
-            </a:avLst>
-          </a:prstGeom>
-          <a:solidFill>
-            <a:srgbClr val="131A23"/>
-          </a:solidFill>
-          <a:ln w="12700">
-            <a:solidFill>
-              <a:srgbClr val="2A3542"/>
-            </a:solidFill>
-          </a:ln>
-          <a:effectLst/>
-        </p:spPr>
-        <p:style>
-          <a:lnRef idx="1">
-            <a:schemeClr val="accent1"/>
-          </a:lnRef>
-          <a:fillRef idx="3">
-            <a:schemeClr val="accent1"/>
-          </a:fillRef>
-          <a:effectRef idx="2">
-            <a:schemeClr val="accent1"/>
-          </a:effectRef>
-          <a:fontRef idx="minor">
-            <a:schemeClr val="lt1"/>
-          </a:fontRef>
-        </p:style>
-        <p:txBody>
-          <a:bodyPr rtlCol="0" anchor="ctr"/>
-          <a:lstStyle/>
-          <a:p>
-            <a:pPr algn="ctr"/>
-          </a:p>
-        </p:txBody>
-      </p:sp>
-      <p:sp>
-        <p:nvSpPr>
-          <p:cNvPr id="11" name="TextBox 10"/>
-          <p:cNvSpPr txBox="1"/>
-          <p:nvPr/>
-        </p:nvSpPr>
-        <p:spPr>
-          <a:xfrm>
-            <a:off x="1097280" y="4297680"/>
-            <a:ext cx="3246120" cy="548640"/>
-          </a:xfrm>
-          <a:prstGeom prst="rect">
-            <a:avLst/>
-          </a:prstGeom>
-          <a:noFill/>
-        </p:spPr>
-        <p:txBody>
-          <a:bodyPr wrap="square" anchor="t" lIns="0" rIns="0" tIns="0" bIns="0">
-            <a:spAutoFit/>
-          </a:bodyPr>
-          <a:lstStyle/>
-          <a:p>
-            <a:pPr algn="l"/>
-            <a:r>
-              <a:rPr sz="1600" b="1">
-                <a:solidFill>
-                  <a:srgbClr val="E9EDF3"/>
-                </a:solidFill>
-                <a:latin typeface="Segoe UI"/>
-              </a:rPr>
-              <a:t>Corrections, capped (±15%)  </a:t>
-            </a:r>
-            <a:r>
-              <a:rPr sz="1600" b="1">
-                <a:solidFill>
-                  <a:srgbClr val="3ED2BC"/>
-                </a:solidFill>
-                <a:latin typeface="Segoe UI"/>
-              </a:rPr>
-              <a:t>✓</a:t>
-            </a:r>
-          </a:p>
-        </p:txBody>
-      </p:sp>
-      <p:sp>
-        <p:nvSpPr>
-          <p:cNvPr id="12" name="TextBox 11"/>
-          <p:cNvSpPr txBox="1"/>
-          <p:nvPr/>
-        </p:nvSpPr>
-        <p:spPr>
-          <a:xfrm>
-            <a:off x="1097280" y="4892040"/>
-            <a:ext cx="3246120" cy="548640"/>
-          </a:xfrm>
-          <a:prstGeom prst="rect">
-            <a:avLst/>
-          </a:prstGeom>
-          <a:noFill/>
-        </p:spPr>
-        <p:txBody>
-          <a:bodyPr wrap="square" anchor="t" lIns="0" rIns="0" tIns="0" bIns="0">
-            <a:spAutoFit/>
-          </a:bodyPr>
-          <a:lstStyle/>
-          <a:p>
-            <a:pPr algn="l"/>
-            <a:r>
-              <a:rPr sz="1300" b="0">
-                <a:solidFill>
-                  <a:srgbClr val="93A3B5"/>
-                </a:solidFill>
-                <a:latin typeface="Segoe UI"/>
-              </a:rPr>
-              <a:t>no more halos; refinement only helps</a:t>
-            </a:r>
-          </a:p>
-        </p:txBody>
-      </p:sp>
-      <p:sp>
-        <p:nvSpPr>
-          <p:cNvPr id="13" name="Rounded Rectangle 12"/>
-          <p:cNvSpPr/>
-          <p:nvPr/>
-        </p:nvSpPr>
-        <p:spPr>
-          <a:xfrm>
-            <a:off x="4892040" y="4114800"/>
-            <a:ext cx="3794760" cy="1417320"/>
-          </a:xfrm>
-          <a:prstGeom prst="roundRect">
-            <a:avLst>
-              <a:gd name="adj" fmla="val 6000"/>
-            </a:avLst>
-          </a:prstGeom>
-          <a:solidFill>
-            <a:srgbClr val="131A23"/>
-          </a:solidFill>
-          <a:ln w="12700">
-            <a:solidFill>
-              <a:srgbClr val="2A3542"/>
-            </a:solidFill>
-          </a:ln>
-          <a:effectLst/>
-        </p:spPr>
-        <p:style>
-          <a:lnRef idx="1">
-            <a:schemeClr val="accent1"/>
-          </a:lnRef>
-          <a:fillRef idx="3">
-            <a:schemeClr val="accent1"/>
-          </a:fillRef>
-          <a:effectRef idx="2">
-            <a:schemeClr val="accent1"/>
-          </a:effectRef>
-          <a:fontRef idx="minor">
-            <a:schemeClr val="lt1"/>
-          </a:fontRef>
-        </p:style>
-        <p:txBody>
-          <a:bodyPr rtlCol="0" anchor="ctr"/>
-          <a:lstStyle/>
-          <a:p>
-            <a:pPr algn="ctr"/>
-          </a:p>
-        </p:txBody>
-      </p:sp>
-      <p:sp>
-        <p:nvSpPr>
-          <p:cNvPr id="14" name="TextBox 13"/>
-          <p:cNvSpPr txBox="1"/>
-          <p:nvPr/>
-        </p:nvSpPr>
-        <p:spPr>
-          <a:xfrm>
-            <a:off x="5166360" y="4297680"/>
-            <a:ext cx="3246120" cy="548640"/>
-          </a:xfrm>
-          <a:prstGeom prst="rect">
-            <a:avLst/>
-          </a:prstGeom>
-          <a:noFill/>
-        </p:spPr>
-        <p:txBody>
-          <a:bodyPr wrap="square" anchor="t" lIns="0" rIns="0" tIns="0" bIns="0">
-            <a:spAutoFit/>
-          </a:bodyPr>
-          <a:lstStyle/>
-          <a:p>
-            <a:pPr algn="l"/>
-            <a:r>
-              <a:rPr sz="1600" b="1">
-                <a:solidFill>
-                  <a:srgbClr val="E9EDF3"/>
-                </a:solidFill>
-                <a:latin typeface="Segoe UI"/>
-              </a:rPr>
-              <a:t>Remember hidden people  </a:t>
-            </a:r>
-            <a:r>
-              <a:rPr sz="1600" b="1">
-                <a:solidFill>
-                  <a:srgbClr val="3ED2BC"/>
-                </a:solidFill>
-                <a:latin typeface="Segoe UI"/>
-              </a:rPr>
-              <a:t>✓</a:t>
-            </a:r>
-          </a:p>
-        </p:txBody>
-      </p:sp>
-      <p:sp>
-        <p:nvSpPr>
-          <p:cNvPr id="15" name="TextBox 14"/>
-          <p:cNvSpPr txBox="1"/>
-          <p:nvPr/>
-        </p:nvSpPr>
-        <p:spPr>
-          <a:xfrm>
-            <a:off x="5166360" y="4892040"/>
-            <a:ext cx="3246120" cy="548640"/>
-          </a:xfrm>
-          <a:prstGeom prst="rect">
-            <a:avLst/>
-          </a:prstGeom>
-          <a:noFill/>
-        </p:spPr>
-        <p:txBody>
-          <a:bodyPr wrap="square" anchor="t" lIns="0" rIns="0" tIns="0" bIns="0">
-            <a:spAutoFit/>
-          </a:bodyPr>
-          <a:lstStyle/>
-          <a:p>
-            <a:pPr algn="l"/>
-            <a:r>
-              <a:rPr sz="1300" b="0">
-                <a:solidFill>
-                  <a:srgbClr val="93A3B5"/>
-                </a:solidFill>
-                <a:latin typeface="Segoe UI"/>
-              </a:rPr>
-              <a:t>depth carried through occlusion, no retraining</a:t>
-            </a:r>
-          </a:p>
-        </p:txBody>
-      </p:sp>
-      <p:sp>
-        <p:nvSpPr>
-          <p:cNvPr id="16" name="Rounded Rectangle 15"/>
-          <p:cNvSpPr/>
-          <p:nvPr/>
-        </p:nvSpPr>
-        <p:spPr>
-          <a:xfrm>
-            <a:off x="8823960" y="2423160"/>
-            <a:ext cx="2514600" cy="3108960"/>
-          </a:xfrm>
-          <a:prstGeom prst="roundRect">
-            <a:avLst>
-              <a:gd name="adj" fmla="val 6000"/>
-            </a:avLst>
-          </a:prstGeom>
-          <a:solidFill>
-            <a:srgbClr val="131A23"/>
-          </a:solidFill>
-          <a:ln w="22225">
-            <a:solidFill>
-              <a:srgbClr val="F5B63F"/>
-            </a:solidFill>
-          </a:ln>
-          <a:effectLst/>
-        </p:spPr>
-        <p:style>
-          <a:lnRef idx="1">
-            <a:schemeClr val="accent1"/>
-          </a:lnRef>
-          <a:fillRef idx="3">
-            <a:schemeClr val="accent1"/>
-          </a:fillRef>
-          <a:effectRef idx="2">
-            <a:schemeClr val="accent1"/>
-          </a:effectRef>
-          <a:fontRef idx="minor">
-            <a:schemeClr val="lt1"/>
-          </a:fontRef>
-        </p:style>
-        <p:txBody>
-          <a:bodyPr rtlCol="0" anchor="ctr"/>
-          <a:lstStyle/>
-          <a:p>
-            <a:pPr algn="ctr"/>
-          </a:p>
-        </p:txBody>
-      </p:sp>
-      <p:sp>
-        <p:nvSpPr>
-          <p:cNvPr id="17" name="TextBox 16"/>
-          <p:cNvSpPr txBox="1"/>
-          <p:nvPr/>
-        </p:nvSpPr>
-        <p:spPr>
-          <a:xfrm>
-            <a:off x="9052560" y="2651760"/>
-            <a:ext cx="2103120" cy="274320"/>
-          </a:xfrm>
-          <a:prstGeom prst="rect">
-            <a:avLst/>
-          </a:prstGeom>
-          <a:noFill/>
-        </p:spPr>
-        <p:txBody>
-          <a:bodyPr wrap="square" anchor="t" lIns="0" rIns="0" tIns="0" bIns="0">
-            <a:spAutoFit/>
-          </a:bodyPr>
-          <a:lstStyle/>
-          <a:p>
-            <a:pPr algn="l"/>
-            <a:r>
-              <a:rPr sz="1100" b="1">
-                <a:solidFill>
-                  <a:srgbClr val="F5B63F"/>
-                </a:solidFill>
-                <a:latin typeface="Consolas"/>
-              </a:rPr>
-              <a:t>THE BIG LEVER · IN FLIGHT</a:t>
-            </a:r>
-          </a:p>
-        </p:txBody>
-      </p:sp>
-      <p:sp>
-        <p:nvSpPr>
-          <p:cNvPr id="18" name="TextBox 17"/>
-          <p:cNvSpPr txBox="1"/>
-          <p:nvPr/>
-        </p:nvSpPr>
-        <p:spPr>
-          <a:xfrm>
-            <a:off x="9052560" y="3063240"/>
-            <a:ext cx="2103120" cy="1463040"/>
-          </a:xfrm>
-          <a:prstGeom prst="rect">
-            <a:avLst/>
-          </a:prstGeom>
-          <a:noFill/>
-        </p:spPr>
-        <p:txBody>
-          <a:bodyPr wrap="square" anchor="t" lIns="0" rIns="0" tIns="0" bIns="0">
-            <a:spAutoFit/>
-          </a:bodyPr>
-          <a:lstStyle/>
-          <a:p>
-            <a:pPr algn="l"/>
-            <a:r>
-              <a:rPr sz="1800" b="1">
-                <a:solidFill>
-                  <a:srgbClr val="E9EDF3"/>
-                </a:solidFill>
-                <a:latin typeface="Segoe UI"/>
-              </a:rPr>
-              <a:t>Borrow the </a:t>
-            </a:r>
-            <a:r>
-              <a:rPr sz="1800" b="1">
-                <a:solidFill>
-                  <a:srgbClr val="F5B63F"/>
-                </a:solidFill>
-                <a:latin typeface="Segoe UI"/>
-              </a:rPr>
-              <a:t>whole</a:t>
-            </a:r>
-            <a:r>
-              <a:rPr sz="1800" b="1">
-                <a:solidFill>
-                  <a:srgbClr val="E9EDF3"/>
-                </a:solidFill>
-                <a:latin typeface="Segoe UI"/>
-              </a:rPr>
-              <a:t> pretrained depth model -- not just its backbone.</a:t>
-            </a:r>
-          </a:p>
-        </p:txBody>
-      </p:sp>
-      <p:sp>
-        <p:nvSpPr>
-          <p:cNvPr id="19" name="TextBox 18"/>
-          <p:cNvSpPr txBox="1"/>
-          <p:nvPr/>
-        </p:nvSpPr>
-        <p:spPr>
-          <a:xfrm>
-            <a:off x="9052560" y="4754880"/>
-            <a:ext cx="2103120" cy="731520"/>
-          </a:xfrm>
-          <a:prstGeom prst="rect">
-            <a:avLst/>
-          </a:prstGeom>
-          <a:noFill/>
-        </p:spPr>
-        <p:txBody>
-          <a:bodyPr wrap="square" anchor="t" lIns="0" rIns="0" tIns="0" bIns="0">
-            <a:spAutoFit/>
-          </a:bodyPr>
-          <a:lstStyle/>
-          <a:p>
-            <a:pPr algn="l"/>
-            <a:r>
-              <a:rPr sz="1250" b="0">
-                <a:solidFill>
-                  <a:srgbClr val="93A3B5"/>
-                </a:solidFill>
-                <a:latin typeface="Segoe UI"/>
-              </a:rPr>
-              <a:t>aims straight at the last near-range accuracy gap</a:t>
+              <a:t>RGB  |  depth  |  instances -- every person keeps their colour and their metres.</a:t>
             </a:r>
           </a:p>
         </p:txBody>
@@ -7285,7 +6988,7 @@
         <p:spPr>
           <a:xfrm>
             <a:off x="822960" y="3611880"/>
-            <a:ext cx="3291840" cy="548640"/>
+            <a:ext cx="3291840" cy="640080"/>
           </a:xfrm>
           <a:prstGeom prst="rect">
             <a:avLst/>
@@ -7300,13 +7003,13 @@
           <a:p>
             <a:pPr algn="ctr"/>
             <a:r>
-              <a:rPr sz="1400" b="0">
+              <a:rPr sz="1350" b="0">
                 <a:solidFill>
                   <a:srgbClr val="93A3B5"/>
                 </a:solidFill>
                 <a:latin typeface="Segoe UI"/>
               </a:rPr>
-              <a:t>close the near-range gap</a:t>
+              <a:t>full pretrained depth model -- already running</a:t>
             </a:r>
           </a:p>
         </p:txBody>
@@ -7433,7 +7136,7 @@
                 </a:solidFill>
                 <a:latin typeface="Segoe UI"/>
               </a:rPr>
-              <a:t>Identities that persist</a:t>
+              <a:t>Beyond our lab</a:t>
             </a:r>
           </a:p>
         </p:txBody>
@@ -7447,7 +7150,7 @@
         <p:spPr>
           <a:xfrm>
             <a:off x="4617720" y="3611880"/>
-            <a:ext cx="3291840" cy="548640"/>
+            <a:ext cx="3291840" cy="640080"/>
           </a:xfrm>
           <a:prstGeom prst="rect">
             <a:avLst/>
@@ -7462,13 +7165,13 @@
           <a:p>
             <a:pPr algn="ctr"/>
             <a:r>
-              <a:rPr sz="1400" b="0">
+              <a:rPr sz="1350" b="0">
                 <a:solidFill>
                   <a:srgbClr val="93A3B5"/>
                 </a:solidFill>
                 <a:latin typeface="Segoe UI"/>
               </a:rPr>
-              <a:t>follow people, don't re-find them</a:t>
+              <a:t>robust on footage from anywhere</a:t>
             </a:r>
           </a:p>
         </p:txBody>
@@ -7595,7 +7298,7 @@
                 </a:solidFill>
                 <a:latin typeface="Segoe UI"/>
               </a:rPr>
-              <a:t>Beyond our lab</a:t>
+              <a:t>The write-up</a:t>
             </a:r>
           </a:p>
         </p:txBody>
@@ -7609,7 +7312,7 @@
         <p:spPr>
           <a:xfrm>
             <a:off x="8412480" y="3611880"/>
-            <a:ext cx="3291840" cy="548640"/>
+            <a:ext cx="3291840" cy="640080"/>
           </a:xfrm>
           <a:prstGeom prst="rect">
             <a:avLst/>
@@ -7624,48 +7327,13 @@
           <a:p>
             <a:pPr algn="ctr"/>
             <a:r>
-              <a:rPr sz="1400" b="0">
+              <a:rPr sz="1350" b="0">
                 <a:solidFill>
                   <a:srgbClr val="93A3B5"/>
                 </a:solidFill>
                 <a:latin typeface="Segoe UI"/>
               </a:rPr>
-              <a:t>hold up on foreign footage</a:t>
-            </a:r>
-          </a:p>
-        </p:txBody>
-      </p:sp>
-      <p:sp>
-        <p:nvSpPr>
-          <p:cNvPr id="15" name="TextBox 14"/>
-          <p:cNvSpPr txBox="1"/>
-          <p:nvPr/>
-        </p:nvSpPr>
-        <p:spPr>
-          <a:xfrm>
-            <a:off x="822960" y="4937760"/>
-            <a:ext cx="10545775" cy="365760"/>
-          </a:xfrm>
-          <a:prstGeom prst="rect">
-            <a:avLst/>
-          </a:prstGeom>
-          <a:noFill/>
-        </p:spPr>
-        <p:txBody>
-          <a:bodyPr wrap="square" anchor="t" lIns="0" rIns="0" tIns="0" bIns="0">
-            <a:spAutoFit/>
-          </a:bodyPr>
-          <a:lstStyle/>
-          <a:p>
-            <a:pPr algn="ctr"/>
-            <a:r>
-              <a:rPr sz="1600" b="0">
-                <a:solidFill>
-                  <a:srgbClr val="F5B63F"/>
-                </a:solidFill>
-                <a:latin typeface="Segoe UI"/>
-              </a:rPr>
-              <a:t>… then the write-up.</a:t>
+              <a:t>dataset + method + results</a:t>
             </a:r>
           </a:p>
         </p:txBody>
@@ -7726,7 +7394,7 @@
                 </a:solidFill>
                 <a:latin typeface="Consolas"/>
               </a:rPr>
-              <a:t>WHERE WE ARE</a:t>
+              <a:t>CONCLUSION</a:t>
             </a:r>
           </a:p>
         </p:txBody>
@@ -7761,16 +7429,7 @@
                 </a:solidFill>
                 <a:latin typeface="Segoe UI"/>
               </a:rPr>
-              <a:t>Reproduce → diagnose → </a:t>
-            </a:r>
-            <a:r>
-              <a:rPr sz="3400" b="1">
-                <a:solidFill>
-                  <a:srgbClr val="F5B63F"/>
-                </a:solidFill>
-                <a:latin typeface="Segoe UI"/>
-              </a:rPr>
-              <a:t>extend</a:t>
+              <a:t>The four promises -- delivered.</a:t>
             </a:r>
           </a:p>
         </p:txBody>
@@ -7783,8 +7442,8 @@
         </p:nvSpPr>
         <p:spPr>
           <a:xfrm>
-            <a:off x="822960" y="2286000"/>
-            <a:ext cx="10545775" cy="3108960"/>
+            <a:off x="822960" y="2514600"/>
+            <a:ext cx="5029200" cy="1463040"/>
           </a:xfrm>
           <a:prstGeom prst="roundRect">
             <a:avLst>
@@ -7792,13 +7451,12 @@
             </a:avLst>
           </a:prstGeom>
           <a:solidFill>
-            <a:srgbClr val="182230"/>
+            <a:srgbClr val="131A23"/>
           </a:solidFill>
-          <a:ln w="19050">
+          <a:ln w="22225">
             <a:solidFill>
-              <a:srgbClr val="F5B63F"/>
+              <a:srgbClr val="3E6FD9"/>
             </a:solidFill>
-            <a:prstDash val="dash"/>
           </a:ln>
           <a:effectLst/>
         </p:spPr>
@@ -7817,68 +7475,69 @@
           </a:fontRef>
         </p:style>
         <p:txBody>
-          <a:bodyPr rtlCol="0" anchor="ctr" wrap="square"/>
-          <a:lstStyle/>
-          <a:p>
-            <a:pPr algn="ctr">
-              <a:spcBef>
-                <a:spcPts val="300"/>
-              </a:spcBef>
-            </a:pPr>
-            <a:r>
-              <a:rPr sz="1100" b="1">
-                <a:solidFill>
-                  <a:srgbClr val="F5B63F"/>
-                </a:solidFill>
-                <a:latin typeface="Consolas"/>
-              </a:rPr>
-              <a:t>V5 · VIDEO -- THE PAYOFF</a:t>
-            </a:r>
-          </a:p>
-          <a:p>
-            <a:pPr algn="ctr">
-              <a:spcBef>
-                <a:spcPts val="300"/>
-              </a:spcBef>
-            </a:pPr>
-            <a:r>
-              <a:rPr sz="1250" b="0">
-                <a:solidFill>
-                  <a:srgbClr val="E9EDF3"/>
-                </a:solidFill>
-                <a:latin typeface="Segoe UI"/>
-              </a:rPr>
-              <a:t>One person walks behind another -- and stays the same colour, at the same depth</a:t>
-            </a:r>
-          </a:p>
-          <a:p>
-            <a:pPr algn="ctr">
-              <a:spcBef>
-                <a:spcPts val="300"/>
-              </a:spcBef>
-            </a:pPr>
-            <a:r>
-              <a:rPr sz="1000" b="0">
-                <a:solidFill>
-                  <a:srgbClr val="5C6B7E"/>
-                </a:solidFill>
-                <a:latin typeface="Consolas"/>
-              </a:rPr>
-              <a:t>~1128x380 · make_sequence_videos.py --track-instances</a:t>
-            </a:r>
-          </a:p>
-        </p:txBody>
-      </p:sp>
-      <p:sp>
-        <p:nvSpPr>
-          <p:cNvPr id="5" name="TextBox 4"/>
+          <a:bodyPr rtlCol="0" anchor="ctr"/>
+          <a:lstStyle/>
+          <a:p>
+            <a:pPr algn="ctr"/>
+          </a:p>
+        </p:txBody>
+      </p:sp>
+      <p:sp>
+        <p:nvSpPr>
+          <p:cNvPr id="5" name="Rounded Rectangle 4"/>
+          <p:cNvSpPr/>
+          <p:nvPr/>
+        </p:nvSpPr>
+        <p:spPr>
+          <a:xfrm>
+            <a:off x="1143000" y="2898648"/>
+            <a:ext cx="292608" cy="292608"/>
+          </a:xfrm>
+          <a:prstGeom prst="roundRect">
+            <a:avLst>
+              <a:gd name="adj" fmla="val 6000"/>
+            </a:avLst>
+          </a:prstGeom>
+          <a:solidFill>
+            <a:srgbClr val="3E6FD9"/>
+          </a:solidFill>
+          <a:ln>
+            <a:noFill/>
+          </a:ln>
+          <a:effectLst/>
+        </p:spPr>
+        <p:style>
+          <a:lnRef idx="1">
+            <a:schemeClr val="accent1"/>
+          </a:lnRef>
+          <a:fillRef idx="3">
+            <a:schemeClr val="accent1"/>
+          </a:fillRef>
+          <a:effectRef idx="2">
+            <a:schemeClr val="accent1"/>
+          </a:effectRef>
+          <a:fontRef idx="minor">
+            <a:schemeClr val="lt1"/>
+          </a:fontRef>
+        </p:style>
+        <p:txBody>
+          <a:bodyPr rtlCol="0" anchor="ctr"/>
+          <a:lstStyle/>
+          <a:p>
+            <a:pPr algn="ctr"/>
+          </a:p>
+        </p:txBody>
+      </p:sp>
+      <p:sp>
+        <p:nvSpPr>
+          <p:cNvPr id="6" name="TextBox 5"/>
           <p:cNvSpPr txBox="1"/>
           <p:nvPr/>
         </p:nvSpPr>
         <p:spPr>
           <a:xfrm>
-            <a:off x="822960" y="5577840"/>
-            <a:ext cx="10545775" cy="365760"/>
+            <a:off x="1737360" y="2715768"/>
+            <a:ext cx="3749039" cy="457200"/>
           </a:xfrm>
           <a:prstGeom prst="rect">
             <a:avLst/>
@@ -7891,15 +7550,578 @@
           </a:bodyPr>
           <a:lstStyle/>
           <a:p>
+            <a:pPr algn="l"/>
+            <a:r>
+              <a:rPr sz="1900" b="1">
+                <a:solidFill>
+                  <a:srgbClr val="E9EDF3"/>
+                </a:solidFill>
+                <a:latin typeface="Segoe UI"/>
+              </a:rPr>
+              <a:t>Depth for each person  </a:t>
+            </a:r>
+            <a:r>
+              <a:rPr sz="1900" b="1">
+                <a:solidFill>
+                  <a:srgbClr val="3ED2BC"/>
+                </a:solidFill>
+                <a:latin typeface="Segoe UI"/>
+              </a:rPr>
+              <a:t>✓</a:t>
+            </a:r>
+          </a:p>
+        </p:txBody>
+      </p:sp>
+      <p:sp>
+        <p:nvSpPr>
+          <p:cNvPr id="7" name="TextBox 6"/>
+          <p:cNvSpPr txBox="1"/>
+          <p:nvPr/>
+        </p:nvSpPr>
+        <p:spPr>
+          <a:xfrm>
+            <a:off x="1737360" y="3291840"/>
+            <a:ext cx="3749039" cy="457200"/>
+          </a:xfrm>
+          <a:prstGeom prst="rect">
+            <a:avLst/>
+          </a:prstGeom>
+          <a:noFill/>
+        </p:spPr>
+        <p:txBody>
+          <a:bodyPr wrap="square" anchor="t" lIns="0" rIns="0" tIns="0" bIns="0">
+            <a:spAutoFit/>
+          </a:bodyPr>
+          <a:lstStyle/>
+          <a:p>
+            <a:pPr algn="l"/>
+            <a:r>
+              <a:rPr sz="1300" b="0">
+                <a:solidFill>
+                  <a:srgbClr val="93A3B5"/>
+                </a:solidFill>
+                <a:latin typeface="Segoe UI"/>
+              </a:rPr>
+              <a:t>per-person depth layers, every frame</a:t>
+            </a:r>
+          </a:p>
+        </p:txBody>
+      </p:sp>
+      <p:sp>
+        <p:nvSpPr>
+          <p:cNvPr id="8" name="Rounded Rectangle 7"/>
+          <p:cNvSpPr/>
+          <p:nvPr/>
+        </p:nvSpPr>
+        <p:spPr>
+          <a:xfrm>
+            <a:off x="6217920" y="2514600"/>
+            <a:ext cx="5029200" cy="1463040"/>
+          </a:xfrm>
+          <a:prstGeom prst="roundRect">
+            <a:avLst>
+              <a:gd name="adj" fmla="val 6000"/>
+            </a:avLst>
+          </a:prstGeom>
+          <a:solidFill>
+            <a:srgbClr val="131A23"/>
+          </a:solidFill>
+          <a:ln w="22225">
+            <a:solidFill>
+              <a:srgbClr val="1FA491"/>
+            </a:solidFill>
+          </a:ln>
+          <a:effectLst/>
+        </p:spPr>
+        <p:style>
+          <a:lnRef idx="1">
+            <a:schemeClr val="accent1"/>
+          </a:lnRef>
+          <a:fillRef idx="3">
+            <a:schemeClr val="accent1"/>
+          </a:fillRef>
+          <a:effectRef idx="2">
+            <a:schemeClr val="accent1"/>
+          </a:effectRef>
+          <a:fontRef idx="minor">
+            <a:schemeClr val="lt1"/>
+          </a:fontRef>
+        </p:style>
+        <p:txBody>
+          <a:bodyPr rtlCol="0" anchor="ctr"/>
+          <a:lstStyle/>
+          <a:p>
             <a:pPr algn="ctr"/>
-            <a:r>
-              <a:rPr sz="1600" b="0">
+          </a:p>
+        </p:txBody>
+      </p:sp>
+      <p:sp>
+        <p:nvSpPr>
+          <p:cNvPr id="9" name="Rounded Rectangle 8"/>
+          <p:cNvSpPr/>
+          <p:nvPr/>
+        </p:nvSpPr>
+        <p:spPr>
+          <a:xfrm>
+            <a:off x="6537960" y="2898648"/>
+            <a:ext cx="292608" cy="292608"/>
+          </a:xfrm>
+          <a:prstGeom prst="roundRect">
+            <a:avLst>
+              <a:gd name="adj" fmla="val 6000"/>
+            </a:avLst>
+          </a:prstGeom>
+          <a:solidFill>
+            <a:srgbClr val="1FA491"/>
+          </a:solidFill>
+          <a:ln>
+            <a:noFill/>
+          </a:ln>
+          <a:effectLst/>
+        </p:spPr>
+        <p:style>
+          <a:lnRef idx="1">
+            <a:schemeClr val="accent1"/>
+          </a:lnRef>
+          <a:fillRef idx="3">
+            <a:schemeClr val="accent1"/>
+          </a:fillRef>
+          <a:effectRef idx="2">
+            <a:schemeClr val="accent1"/>
+          </a:effectRef>
+          <a:fontRef idx="minor">
+            <a:schemeClr val="lt1"/>
+          </a:fontRef>
+        </p:style>
+        <p:txBody>
+          <a:bodyPr rtlCol="0" anchor="ctr"/>
+          <a:lstStyle/>
+          <a:p>
+            <a:pPr algn="ctr"/>
+          </a:p>
+        </p:txBody>
+      </p:sp>
+      <p:sp>
+        <p:nvSpPr>
+          <p:cNvPr id="10" name="TextBox 9"/>
+          <p:cNvSpPr txBox="1"/>
+          <p:nvPr/>
+        </p:nvSpPr>
+        <p:spPr>
+          <a:xfrm>
+            <a:off x="7132320" y="2715768"/>
+            <a:ext cx="3749039" cy="457200"/>
+          </a:xfrm>
+          <a:prstGeom prst="rect">
+            <a:avLst/>
+          </a:prstGeom>
+          <a:noFill/>
+        </p:spPr>
+        <p:txBody>
+          <a:bodyPr wrap="square" anchor="t" lIns="0" rIns="0" tIns="0" bIns="0">
+            <a:spAutoFit/>
+          </a:bodyPr>
+          <a:lstStyle/>
+          <a:p>
+            <a:pPr algn="l"/>
+            <a:r>
+              <a:rPr sz="1900" b="1">
+                <a:solidFill>
+                  <a:srgbClr val="E9EDF3"/>
+                </a:solidFill>
+                <a:latin typeface="Segoe UI"/>
+              </a:rPr>
+              <a:t>Correct through overlaps  </a:t>
+            </a:r>
+            <a:r>
+              <a:rPr sz="1900" b="1">
+                <a:solidFill>
+                  <a:srgbClr val="3ED2BC"/>
+                </a:solidFill>
+                <a:latin typeface="Segoe UI"/>
+              </a:rPr>
+              <a:t>✓</a:t>
+            </a:r>
+          </a:p>
+        </p:txBody>
+      </p:sp>
+      <p:sp>
+        <p:nvSpPr>
+          <p:cNvPr id="11" name="TextBox 10"/>
+          <p:cNvSpPr txBox="1"/>
+          <p:nvPr/>
+        </p:nvSpPr>
+        <p:spPr>
+          <a:xfrm>
+            <a:off x="7132320" y="3291840"/>
+            <a:ext cx="3749039" cy="457200"/>
+          </a:xfrm>
+          <a:prstGeom prst="rect">
+            <a:avLst/>
+          </a:prstGeom>
+          <a:noFill/>
+        </p:spPr>
+        <p:txBody>
+          <a:bodyPr wrap="square" anchor="t" lIns="0" rIns="0" tIns="0" bIns="0">
+            <a:spAutoFit/>
+          </a:bodyPr>
+          <a:lstStyle/>
+          <a:p>
+            <a:pPr algn="l"/>
+            <a:r>
+              <a:rPr sz="1300" b="0">
                 <a:solidFill>
                   <a:srgbClr val="93A3B5"/>
                 </a:solidFill>
                 <a:latin typeface="Segoe UI"/>
               </a:rPr>
-              <a:t>The diagnosis became the contribution.</a:t>
+              <a:t>0.055 error where bodies cross</a:t>
+            </a:r>
+          </a:p>
+        </p:txBody>
+      </p:sp>
+      <p:sp>
+        <p:nvSpPr>
+          <p:cNvPr id="12" name="Rounded Rectangle 11"/>
+          <p:cNvSpPr/>
+          <p:nvPr/>
+        </p:nvSpPr>
+        <p:spPr>
+          <a:xfrm>
+            <a:off x="822960" y="4343400"/>
+            <a:ext cx="5029200" cy="1463040"/>
+          </a:xfrm>
+          <a:prstGeom prst="roundRect">
+            <a:avLst>
+              <a:gd name="adj" fmla="val 6000"/>
+            </a:avLst>
+          </a:prstGeom>
+          <a:solidFill>
+            <a:srgbClr val="131A23"/>
+          </a:solidFill>
+          <a:ln w="22225">
+            <a:solidFill>
+              <a:srgbClr val="B07D18"/>
+            </a:solidFill>
+          </a:ln>
+          <a:effectLst/>
+        </p:spPr>
+        <p:style>
+          <a:lnRef idx="1">
+            <a:schemeClr val="accent1"/>
+          </a:lnRef>
+          <a:fillRef idx="3">
+            <a:schemeClr val="accent1"/>
+          </a:fillRef>
+          <a:effectRef idx="2">
+            <a:schemeClr val="accent1"/>
+          </a:effectRef>
+          <a:fontRef idx="minor">
+            <a:schemeClr val="lt1"/>
+          </a:fontRef>
+        </p:style>
+        <p:txBody>
+          <a:bodyPr rtlCol="0" anchor="ctr"/>
+          <a:lstStyle/>
+          <a:p>
+            <a:pPr algn="ctr"/>
+          </a:p>
+        </p:txBody>
+      </p:sp>
+      <p:sp>
+        <p:nvSpPr>
+          <p:cNvPr id="13" name="Rounded Rectangle 12"/>
+          <p:cNvSpPr/>
+          <p:nvPr/>
+        </p:nvSpPr>
+        <p:spPr>
+          <a:xfrm>
+            <a:off x="1143000" y="4727448"/>
+            <a:ext cx="292608" cy="292608"/>
+          </a:xfrm>
+          <a:prstGeom prst="roundRect">
+            <a:avLst>
+              <a:gd name="adj" fmla="val 6000"/>
+            </a:avLst>
+          </a:prstGeom>
+          <a:solidFill>
+            <a:srgbClr val="B07D18"/>
+          </a:solidFill>
+          <a:ln>
+            <a:noFill/>
+          </a:ln>
+          <a:effectLst/>
+        </p:spPr>
+        <p:style>
+          <a:lnRef idx="1">
+            <a:schemeClr val="accent1"/>
+          </a:lnRef>
+          <a:fillRef idx="3">
+            <a:schemeClr val="accent1"/>
+          </a:fillRef>
+          <a:effectRef idx="2">
+            <a:schemeClr val="accent1"/>
+          </a:effectRef>
+          <a:fontRef idx="minor">
+            <a:schemeClr val="lt1"/>
+          </a:fontRef>
+        </p:style>
+        <p:txBody>
+          <a:bodyPr rtlCol="0" anchor="ctr"/>
+          <a:lstStyle/>
+          <a:p>
+            <a:pPr algn="ctr"/>
+          </a:p>
+        </p:txBody>
+      </p:sp>
+      <p:sp>
+        <p:nvSpPr>
+          <p:cNvPr id="14" name="TextBox 13"/>
+          <p:cNvSpPr txBox="1"/>
+          <p:nvPr/>
+        </p:nvSpPr>
+        <p:spPr>
+          <a:xfrm>
+            <a:off x="1737360" y="4544568"/>
+            <a:ext cx="3749039" cy="457200"/>
+          </a:xfrm>
+          <a:prstGeom prst="rect">
+            <a:avLst/>
+          </a:prstGeom>
+          <a:noFill/>
+        </p:spPr>
+        <p:txBody>
+          <a:bodyPr wrap="square" anchor="t" lIns="0" rIns="0" tIns="0" bIns="0">
+            <a:spAutoFit/>
+          </a:bodyPr>
+          <a:lstStyle/>
+          <a:p>
+            <a:pPr algn="l"/>
+            <a:r>
+              <a:rPr sz="1900" b="1">
+                <a:solidFill>
+                  <a:srgbClr val="E9EDF3"/>
+                </a:solidFill>
+                <a:latin typeface="Segoe UI"/>
+              </a:rPr>
+              <a:t>Steady across frames  </a:t>
+            </a:r>
+            <a:r>
+              <a:rPr sz="1900" b="1">
+                <a:solidFill>
+                  <a:srgbClr val="3ED2BC"/>
+                </a:solidFill>
+                <a:latin typeface="Segoe UI"/>
+              </a:rPr>
+              <a:t>✓</a:t>
+            </a:r>
+          </a:p>
+        </p:txBody>
+      </p:sp>
+      <p:sp>
+        <p:nvSpPr>
+          <p:cNvPr id="15" name="TextBox 14"/>
+          <p:cNvSpPr txBox="1"/>
+          <p:nvPr/>
+        </p:nvSpPr>
+        <p:spPr>
+          <a:xfrm>
+            <a:off x="1737360" y="5120640"/>
+            <a:ext cx="3749039" cy="457200"/>
+          </a:xfrm>
+          <a:prstGeom prst="rect">
+            <a:avLst/>
+          </a:prstGeom>
+          <a:noFill/>
+        </p:spPr>
+        <p:txBody>
+          <a:bodyPr wrap="square" anchor="t" lIns="0" rIns="0" tIns="0" bIns="0">
+            <a:spAutoFit/>
+          </a:bodyPr>
+          <a:lstStyle/>
+          <a:p>
+            <a:pPr algn="l"/>
+            <a:r>
+              <a:rPr sz="1300" b="0">
+                <a:solidFill>
+                  <a:srgbClr val="93A3B5"/>
+                </a:solidFill>
+                <a:latin typeface="Segoe UI"/>
+              </a:rPr>
+              <a:t>flicker down · identities locked</a:t>
+            </a:r>
+          </a:p>
+        </p:txBody>
+      </p:sp>
+      <p:sp>
+        <p:nvSpPr>
+          <p:cNvPr id="16" name="Rounded Rectangle 15"/>
+          <p:cNvSpPr/>
+          <p:nvPr/>
+        </p:nvSpPr>
+        <p:spPr>
+          <a:xfrm>
+            <a:off x="6217920" y="4343400"/>
+            <a:ext cx="5029200" cy="1463040"/>
+          </a:xfrm>
+          <a:prstGeom prst="roundRect">
+            <a:avLst>
+              <a:gd name="adj" fmla="val 6000"/>
+            </a:avLst>
+          </a:prstGeom>
+          <a:solidFill>
+            <a:srgbClr val="131A23"/>
+          </a:solidFill>
+          <a:ln w="22225">
+            <a:solidFill>
+              <a:srgbClr val="F2836C"/>
+            </a:solidFill>
+          </a:ln>
+          <a:effectLst/>
+        </p:spPr>
+        <p:style>
+          <a:lnRef idx="1">
+            <a:schemeClr val="accent1"/>
+          </a:lnRef>
+          <a:fillRef idx="3">
+            <a:schemeClr val="accent1"/>
+          </a:fillRef>
+          <a:effectRef idx="2">
+            <a:schemeClr val="accent1"/>
+          </a:effectRef>
+          <a:fontRef idx="minor">
+            <a:schemeClr val="lt1"/>
+          </a:fontRef>
+        </p:style>
+        <p:txBody>
+          <a:bodyPr rtlCol="0" anchor="ctr"/>
+          <a:lstStyle/>
+          <a:p>
+            <a:pPr algn="ctr"/>
+          </a:p>
+        </p:txBody>
+      </p:sp>
+      <p:sp>
+        <p:nvSpPr>
+          <p:cNvPr id="17" name="Rounded Rectangle 16"/>
+          <p:cNvSpPr/>
+          <p:nvPr/>
+        </p:nvSpPr>
+        <p:spPr>
+          <a:xfrm>
+            <a:off x="6537960" y="4727448"/>
+            <a:ext cx="292608" cy="292608"/>
+          </a:xfrm>
+          <a:prstGeom prst="roundRect">
+            <a:avLst>
+              <a:gd name="adj" fmla="val 6000"/>
+            </a:avLst>
+          </a:prstGeom>
+          <a:solidFill>
+            <a:srgbClr val="F2836C"/>
+          </a:solidFill>
+          <a:ln>
+            <a:noFill/>
+          </a:ln>
+          <a:effectLst/>
+        </p:spPr>
+        <p:style>
+          <a:lnRef idx="1">
+            <a:schemeClr val="accent1"/>
+          </a:lnRef>
+          <a:fillRef idx="3">
+            <a:schemeClr val="accent1"/>
+          </a:fillRef>
+          <a:effectRef idx="2">
+            <a:schemeClr val="accent1"/>
+          </a:effectRef>
+          <a:fontRef idx="minor">
+            <a:schemeClr val="lt1"/>
+          </a:fontRef>
+        </p:style>
+        <p:txBody>
+          <a:bodyPr rtlCol="0" anchor="ctr"/>
+          <a:lstStyle/>
+          <a:p>
+            <a:pPr algn="ctr"/>
+          </a:p>
+        </p:txBody>
+      </p:sp>
+      <p:sp>
+        <p:nvSpPr>
+          <p:cNvPr id="18" name="TextBox 17"/>
+          <p:cNvSpPr txBox="1"/>
+          <p:nvPr/>
+        </p:nvSpPr>
+        <p:spPr>
+          <a:xfrm>
+            <a:off x="7132320" y="4544568"/>
+            <a:ext cx="3749039" cy="457200"/>
+          </a:xfrm>
+          <a:prstGeom prst="rect">
+            <a:avLst/>
+          </a:prstGeom>
+          <a:noFill/>
+        </p:spPr>
+        <p:txBody>
+          <a:bodyPr wrap="square" anchor="t" lIns="0" rIns="0" tIns="0" bIns="0">
+            <a:spAutoFit/>
+          </a:bodyPr>
+          <a:lstStyle/>
+          <a:p>
+            <a:pPr algn="l"/>
+            <a:r>
+              <a:rPr sz="1900" b="1">
+                <a:solidFill>
+                  <a:srgbClr val="E9EDF3"/>
+                </a:solidFill>
+                <a:latin typeface="Segoe UI"/>
+              </a:rPr>
+              <a:t>In real metres  </a:t>
+            </a:r>
+            <a:r>
+              <a:rPr sz="1900" b="1">
+                <a:solidFill>
+                  <a:srgbClr val="3ED2BC"/>
+                </a:solidFill>
+                <a:latin typeface="Segoe UI"/>
+              </a:rPr>
+              <a:t>✓</a:t>
+            </a:r>
+          </a:p>
+        </p:txBody>
+      </p:sp>
+      <p:sp>
+        <p:nvSpPr>
+          <p:cNvPr id="19" name="TextBox 18"/>
+          <p:cNvSpPr txBox="1"/>
+          <p:nvPr/>
+        </p:nvSpPr>
+        <p:spPr>
+          <a:xfrm>
+            <a:off x="7132320" y="5120640"/>
+            <a:ext cx="3749039" cy="457200"/>
+          </a:xfrm>
+          <a:prstGeom prst="rect">
+            <a:avLst/>
+          </a:prstGeom>
+          <a:noFill/>
+        </p:spPr>
+        <p:txBody>
+          <a:bodyPr wrap="square" anchor="t" lIns="0" rIns="0" tIns="0" bIns="0">
+            <a:spAutoFit/>
+          </a:bodyPr>
+          <a:lstStyle/>
+          <a:p>
+            <a:pPr algn="l"/>
+            <a:r>
+              <a:rPr sz="1300" b="0">
+                <a:solidFill>
+                  <a:srgbClr val="93A3B5"/>
+                </a:solidFill>
+                <a:latin typeface="Segoe UI"/>
+              </a:rPr>
+              <a:t>0.072 rel. error on 10,400 frames</a:t>
             </a:r>
           </a:p>
         </p:txBody>
@@ -8133,7 +8355,7 @@
                 </a:solidFill>
                 <a:latin typeface="Segoe UI"/>
               </a:rPr>
-              <a:t>Questions -- or a walk through any pothole on the road slide.</a:t>
+              <a:t>Questions -- happy to go deeper on any pass, or the dataset.</a:t>
             </a:r>
           </a:p>
         </p:txBody>
@@ -8387,7 +8609,7 @@
                 <a:gridCol w="1463040"/>
                 <a:gridCol w="5148072"/>
               </a:tblGrid>
-              <a:tr h="407323">
+              <a:tr h="497840">
                 <a:tc>
                   <a:txBody>
                     <a:bodyPr/>
@@ -8477,7 +8699,7 @@
                   </a:tcPr>
                 </a:tc>
               </a:tr>
-              <a:tr h="407323">
+              <a:tr h="497840">
                 <a:tc>
                   <a:txBody>
                     <a:bodyPr/>
@@ -8567,97 +8789,7 @@
                   </a:tcPr>
                 </a:tc>
               </a:tr>
-              <a:tr h="407323">
-                <a:tc>
-                  <a:txBody>
-                    <a:bodyPr/>
-                    <a:lstStyle/>
-                    <a:p>
-                      <a:r>
-                        <a:rPr sz="1100" b="0">
-                          <a:solidFill>
-                            <a:srgbClr val="E9EDF3"/>
-                          </a:solidFill>
-                          <a:latin typeface="Consolas"/>
-                        </a:rPr>
-                        <a:t>I1</a:t>
-                      </a:r>
-                    </a:p>
-                  </a:txBody>
-                  <a:tcPr marL="91440" marT="27432" marB="27432" anchor="ctr">
-                    <a:solidFill>
-                      <a:srgbClr val="131A23"/>
-                    </a:solidFill>
-                  </a:tcPr>
-                </a:tc>
-                <a:tc>
-                  <a:txBody>
-                    <a:bodyPr/>
-                    <a:lstStyle/>
-                    <a:p>
-                      <a:r>
-                        <a:rPr sz="1100" b="0">
-                          <a:solidFill>
-                            <a:srgbClr val="93A3B5"/>
-                          </a:solidFill>
-                          <a:latin typeface="Consolas"/>
-                        </a:rPr>
-                        <a:t>S3 · card</a:t>
-                      </a:r>
-                    </a:p>
-                  </a:txBody>
-                  <a:tcPr marL="91440" marT="27432" marB="27432" anchor="ctr">
-                    <a:solidFill>
-                      <a:srgbClr val="131A23"/>
-                    </a:solidFill>
-                  </a:tcPr>
-                </a:tc>
-                <a:tc>
-                  <a:txBody>
-                    <a:bodyPr/>
-                    <a:lstStyle/>
-                    <a:p>
-                      <a:r>
-                        <a:rPr sz="1100" b="0">
-                          <a:solidFill>
-                            <a:srgbClr val="93A3B5"/>
-                          </a:solidFill>
-                          <a:latin typeface="Consolas"/>
-                        </a:rPr>
-                        <a:t>300x210</a:t>
-                      </a:r>
-                    </a:p>
-                  </a:txBody>
-                  <a:tcPr marL="91440" marT="27432" marB="27432" anchor="ctr">
-                    <a:solidFill>
-                      <a:srgbClr val="131A23"/>
-                    </a:solidFill>
-                  </a:tcPr>
-                </a:tc>
-                <a:tc>
-                  <a:txBody>
-                    <a:bodyPr/>
-                    <a:lstStyle/>
-                    <a:p>
-                      <a:r>
-                        <a:rPr sz="1100" b="0">
-                          <a:solidFill>
-                            <a:srgbClr val="93A3B5"/>
-                          </a:solidFill>
-                          <a:latin typeface="Consolas"/>
-                        </a:rPr>
-                        <a:t>visualize_phase3.py error-panel crop</a:t>
-                      </a:r>
-                    </a:p>
-                  </a:txBody>
-                  <a:tcPr marL="91440" marT="27432" marB="27432" anchor="ctr">
-                    <a:solidFill>
-                      <a:srgbClr val="131A23"/>
-                    </a:solidFill>
-                  </a:tcPr>
-                </a:tc>
-              </a:tr>
-              <a:tr h="407323">
+              <a:tr h="497840">
                 <a:tc>
                   <a:txBody>
                     <a:bodyPr/>
@@ -8747,7 +8879,7 @@
                   </a:tcPr>
                 </a:tc>
               </a:tr>
-              <a:tr h="407323">
+              <a:tr h="497840">
                 <a:tc>
                   <a:txBody>
                     <a:bodyPr/>
@@ -8837,7 +8969,7 @@
                   </a:tcPr>
                 </a:tc>
               </a:tr>
-              <a:tr h="407323">
+              <a:tr h="497840">
                 <a:tc>
                   <a:txBody>
                     <a:bodyPr/>
@@ -8927,7 +9059,7 @@
                   </a:tcPr>
                 </a:tc>
               </a:tr>
-              <a:tr h="407323">
+              <a:tr h="497840">
                 <a:tc>
                   <a:txBody>
                     <a:bodyPr/>
@@ -9017,7 +9149,7 @@
                   </a:tcPr>
                 </a:tc>
               </a:tr>
-              <a:tr h="407323">
+              <a:tr h="497840">
                 <a:tc>
                   <a:txBody>
                     <a:bodyPr/>
@@ -9052,7 +9184,7 @@
                           </a:solidFill>
                           <a:latin typeface="Consolas"/>
                         </a:rPr>
-                        <a:t>S9 · right upper</a:t>
+                        <a:t>S9 · right -- refined vs base</a:t>
                       </a:r>
                     </a:p>
                   </a:txBody>
@@ -9074,7 +9206,7 @@
                           </a:solidFill>
                           <a:latin typeface="Consolas"/>
                         </a:rPr>
-                        <a:t>520x300</a:t>
+                        <a:t>520x430</a:t>
                       </a:r>
                     </a:p>
                   </a:txBody>
@@ -9096,7 +9228,7 @@
                           </a:solidFill>
                           <a:latin typeface="Consolas"/>
                         </a:rPr>
-                        <a:t>rings-vs-capped (infer_video --compare)</a:t>
+                        <a:t>infer_video.py --compare on an overlap clip</a:t>
                       </a:r>
                     </a:p>
                   </a:txBody>
@@ -9107,97 +9239,7 @@
                   </a:tcPr>
                 </a:tc>
               </a:tr>
-              <a:tr h="407323">
-                <a:tc>
-                  <a:txBody>
-                    <a:bodyPr/>
-                    <a:lstStyle/>
-                    <a:p>
-                      <a:r>
-                        <a:rPr sz="1100" b="0">
-                          <a:solidFill>
-                            <a:srgbClr val="E9EDF3"/>
-                          </a:solidFill>
-                          <a:latin typeface="Consolas"/>
-                        </a:rPr>
-                        <a:t>I4</a:t>
-                      </a:r>
-                    </a:p>
-                  </a:txBody>
-                  <a:tcPr marL="91440" marT="27432" marB="27432" anchor="ctr">
-                    <a:solidFill>
-                      <a:srgbClr val="131A23"/>
-                    </a:solidFill>
-                  </a:tcPr>
-                </a:tc>
-                <a:tc>
-                  <a:txBody>
-                    <a:bodyPr/>
-                    <a:lstStyle/>
-                    <a:p>
-                      <a:r>
-                        <a:rPr sz="1100" b="0">
-                          <a:solidFill>
-                            <a:srgbClr val="93A3B5"/>
-                          </a:solidFill>
-                          <a:latin typeface="Consolas"/>
-                        </a:rPr>
-                        <a:t>S9 · right lower</a:t>
-                      </a:r>
-                    </a:p>
-                  </a:txBody>
-                  <a:tcPr marL="91440" marT="27432" marB="27432" anchor="ctr">
-                    <a:solidFill>
-                      <a:srgbClr val="131A23"/>
-                    </a:solidFill>
-                  </a:tcPr>
-                </a:tc>
-                <a:tc>
-                  <a:txBody>
-                    <a:bodyPr/>
-                    <a:lstStyle/>
-                    <a:p>
-                      <a:r>
-                        <a:rPr sz="1100" b="0">
-                          <a:solidFill>
-                            <a:srgbClr val="93A3B5"/>
-                          </a:solidFill>
-                          <a:latin typeface="Consolas"/>
-                        </a:rPr>
-                        <a:t>520x200</a:t>
-                      </a:r>
-                    </a:p>
-                  </a:txBody>
-                  <a:tcPr marL="91440" marT="27432" marB="27432" anchor="ctr">
-                    <a:solidFill>
-                      <a:srgbClr val="131A23"/>
-                    </a:solidFill>
-                  </a:tcPr>
-                </a:tc>
-                <a:tc>
-                  <a:txBody>
-                    <a:bodyPr/>
-                    <a:lstStyle/>
-                    <a:p>
-                      <a:r>
-                        <a:rPr sz="1100" b="0">
-                          <a:solidFill>
-                            <a:srgbClr val="93A3B5"/>
-                          </a:solidFill>
-                          <a:latin typeface="Consolas"/>
-                        </a:rPr>
-                        <a:t>ring-artifact zoom crop</a:t>
-                      </a:r>
-                    </a:p>
-                  </a:txBody>
-                  <a:tcPr marL="91440" marT="27432" marB="27432" anchor="ctr">
-                    <a:solidFill>
-                      <a:srgbClr val="131A23"/>
-                    </a:solidFill>
-                  </a:tcPr>
-                </a:tc>
-              </a:tr>
-              <a:tr h="407323">
+              <a:tr h="497840">
                 <a:tc>
                   <a:txBody>
                     <a:bodyPr/>
@@ -9232,7 +9274,7 @@
                           </a:solidFill>
                           <a:latin typeface="Consolas"/>
                         </a:rPr>
-                        <a:t>S14 · main -- payoff</a:t>
+                        <a:t>S12 · main -- the demo</a:t>
                       </a:r>
                     </a:p>
                   </a:txBody>
@@ -9287,7 +9329,7 @@
                   </a:tcPr>
                 </a:tc>
               </a:tr>
-              <a:tr h="407330">
+              <a:tr h="497840">
                 <a:tc>
                   <a:txBody>
                     <a:bodyPr/>
@@ -14351,7 +14393,7 @@
                 </a:solidFill>
                 <a:latin typeface="Consolas"/>
               </a:rPr>
-              <a:t>PASS 3 · THE TWIST, RESOLVED</a:t>
+              <a:t>PASS 3 · OCCLUSION-AWARE REFINEMENT</a:t>
             </a:r>
           </a:p>
         </p:txBody>
@@ -14386,34 +14428,16 @@
                 </a:solidFill>
                 <a:latin typeface="Segoe UI"/>
               </a:rPr>
-              <a:t>From </a:t>
+              <a:t>Better exactly </a:t>
             </a:r>
             <a:r>
               <a:rPr sz="3400" b="1">
                 <a:solidFill>
-                  <a:srgbClr val="F2836C"/>
+                  <a:srgbClr val="F5B63F"/>
                 </a:solidFill>
                 <a:latin typeface="Segoe UI"/>
               </a:rPr>
-              <a:t>harmful</a:t>
-            </a:r>
-            <a:r>
-              <a:rPr sz="3400" b="1">
-                <a:solidFill>
-                  <a:srgbClr val="E9EDF3"/>
-                </a:solidFill>
-                <a:latin typeface="Segoe UI"/>
-              </a:rPr>
-              <a:t> to </a:t>
-            </a:r>
-            <a:r>
-              <a:rPr sz="3400" b="1">
-                <a:solidFill>
-                  <a:srgbClr val="3ED2BC"/>
-                </a:solidFill>
-                <a:latin typeface="Segoe UI"/>
-              </a:rPr>
-              <a:t>helpful</a:t>
+              <a:t>where people overlap</a:t>
             </a:r>
           </a:p>
         </p:txBody>
@@ -14492,11 +14516,11 @@
             <a:r>
               <a:rPr sz="1250" b="0">
                 <a:solidFill>
-                  <a:srgbClr val="F2836C"/>
+                  <a:srgbClr val="93A3B5"/>
                 </a:solidFill>
                 <a:latin typeface="Consolas"/>
               </a:rPr>
-              <a:t>FIRST VERSION -- refinement backfired</a:t>
+              <a:t>OVERLAP REGIONS · 3,083 frames with real occlusion</a:t>
             </a:r>
           </a:p>
         </p:txBody>
@@ -14509,8 +14533,8 @@
         </p:nvSpPr>
         <p:spPr>
           <a:xfrm>
-            <a:off x="1097280" y="2834640"/>
-            <a:ext cx="5303520" cy="548640"/>
+            <a:off x="1097280" y="2880360"/>
+            <a:ext cx="2651760" cy="274320"/>
           </a:xfrm>
           <a:prstGeom prst="rect">
             <a:avLst/>
@@ -14525,31 +14549,13 @@
           <a:p>
             <a:pPr algn="l"/>
             <a:r>
-              <a:rPr sz="2600" b="1">
+              <a:rPr sz="1350" b="0">
                 <a:solidFill>
                   <a:srgbClr val="E9EDF3"/>
                 </a:solidFill>
-                <a:latin typeface="Consolas"/>
-              </a:rPr>
-              <a:t>0.078</a:t>
-            </a:r>
-            <a:r>
-              <a:rPr sz="2000" b="0">
-                <a:solidFill>
-                  <a:srgbClr val="5C6B7E"/>
-                </a:solidFill>
                 <a:latin typeface="Segoe UI"/>
               </a:rPr>
-              <a:t>  →  </a:t>
-            </a:r>
-            <a:r>
-              <a:rPr sz="2600" b="1">
-                <a:solidFill>
-                  <a:srgbClr val="E4573D"/>
-                </a:solidFill>
-                <a:latin typeface="Consolas"/>
-              </a:rPr>
-              <a:t>0.139</a:t>
+              <a:t>Depth error (lower wins)</a:t>
             </a:r>
           </a:p>
         </p:txBody>
@@ -14562,8 +14568,8 @@
         </p:nvSpPr>
         <p:spPr>
           <a:xfrm>
-            <a:off x="1097280" y="3429000"/>
-            <a:ext cx="5303520" cy="274320"/>
+            <a:off x="1097280" y="3200400"/>
+            <a:ext cx="5120640" cy="502920"/>
           </a:xfrm>
           <a:prstGeom prst="rect">
             <a:avLst/>
@@ -14578,26 +14584,132 @@
           <a:p>
             <a:pPr algn="l"/>
             <a:r>
+              <a:rPr sz="2600" b="1">
+                <a:solidFill>
+                  <a:srgbClr val="93A3B5"/>
+                </a:solidFill>
+                <a:latin typeface="Consolas"/>
+              </a:rPr>
+              <a:t>0.056</a:t>
+            </a:r>
+            <a:r>
+              <a:rPr sz="1800" b="0">
+                <a:solidFill>
+                  <a:srgbClr val="5C6B7E"/>
+                </a:solidFill>
+                <a:latin typeface="Segoe UI"/>
+              </a:rPr>
+              <a:t>  →  </a:t>
+            </a:r>
+            <a:r>
+              <a:rPr sz="2600" b="1">
+                <a:solidFill>
+                  <a:srgbClr val="3ED2BC"/>
+                </a:solidFill>
+                <a:latin typeface="Consolas"/>
+              </a:rPr>
+              <a:t>0.055 ✓</a:t>
+            </a:r>
+            <a:r>
               <a:rPr sz="1250" b="0">
                 <a:solidFill>
-                  <a:srgbClr val="F2836C"/>
+                  <a:srgbClr val="93A3B5"/>
                 </a:solidFill>
                 <a:latin typeface="Segoe UI"/>
               </a:rPr>
-              <a:t>whole scene drifted (+78%), and overlaps got worse too</a:t>
-            </a:r>
-          </a:p>
-        </p:txBody>
-      </p:sp>
-      <p:sp>
-        <p:nvSpPr>
-          <p:cNvPr id="8" name="Rounded Rectangle 7"/>
+              <a:t>   base → refined</a:t>
+            </a:r>
+          </a:p>
+        </p:txBody>
+      </p:sp>
+      <p:sp>
+        <p:nvSpPr>
+          <p:cNvPr id="8" name="TextBox 7"/>
+          <p:cNvSpPr txBox="1"/>
+          <p:nvPr/>
+        </p:nvSpPr>
+        <p:spPr>
+          <a:xfrm>
+            <a:off x="1097280" y="3886200"/>
+            <a:ext cx="5120640" cy="274320"/>
+          </a:xfrm>
+          <a:prstGeom prst="rect">
+            <a:avLst/>
+          </a:prstGeom>
+          <a:noFill/>
+        </p:spPr>
+        <p:txBody>
+          <a:bodyPr wrap="square" anchor="t" lIns="0" rIns="0" tIns="0" bIns="0">
+            <a:spAutoFit/>
+          </a:bodyPr>
+          <a:lstStyle/>
+          <a:p>
+            <a:pPr algn="l"/>
+            <a:r>
+              <a:rPr sz="1350" b="0">
+                <a:solidFill>
+                  <a:srgbClr val="E9EDF3"/>
+                </a:solidFill>
+                <a:latin typeface="Segoe UI"/>
+              </a:rPr>
+              <a:t>Accuracy in overlap regions</a:t>
+            </a:r>
+          </a:p>
+        </p:txBody>
+      </p:sp>
+      <p:sp>
+        <p:nvSpPr>
+          <p:cNvPr id="9" name="TextBox 8"/>
+          <p:cNvSpPr txBox="1"/>
+          <p:nvPr/>
+        </p:nvSpPr>
+        <p:spPr>
+          <a:xfrm>
+            <a:off x="1097280" y="4206240"/>
+            <a:ext cx="5120640" cy="457200"/>
+          </a:xfrm>
+          <a:prstGeom prst="rect">
+            <a:avLst/>
+          </a:prstGeom>
+          <a:noFill/>
+        </p:spPr>
+        <p:txBody>
+          <a:bodyPr wrap="square" anchor="t" lIns="0" rIns="0" tIns="0" bIns="0">
+            <a:spAutoFit/>
+          </a:bodyPr>
+          <a:lstStyle/>
+          <a:p>
+            <a:pPr algn="l"/>
+            <a:r>
+              <a:rPr sz="2600" b="1">
+                <a:solidFill>
+                  <a:srgbClr val="3ED2BC"/>
+                </a:solidFill>
+                <a:latin typeface="Consolas"/>
+              </a:rPr>
+              <a:t>98.6%</a:t>
+            </a:r>
+            <a:r>
+              <a:rPr sz="1250" b="0">
+                <a:solidFill>
+                  <a:srgbClr val="93A3B5"/>
+                </a:solidFill>
+                <a:latin typeface="Segoe UI"/>
+              </a:rPr>
+              <a:t>  of overlap pixels within the tight band</a:t>
+            </a:r>
+          </a:p>
+        </p:txBody>
+      </p:sp>
+      <p:sp>
+        <p:nvSpPr>
+          <p:cNvPr id="10" name="Rounded Rectangle 9"/>
           <p:cNvSpPr/>
           <p:nvPr/>
         </p:nvSpPr>
         <p:spPr>
           <a:xfrm>
-            <a:off x="1097280" y="3886200"/>
+            <a:off x="1097280" y="4892040"/>
             <a:ext cx="5120640" cy="18288"/>
           </a:xfrm>
           <a:prstGeom prst="roundRect">
@@ -14637,13 +14749,13 @@
       </p:sp>
       <p:sp>
         <p:nvSpPr>
-          <p:cNvPr id="9" name="TextBox 8"/>
+          <p:cNvPr id="11" name="TextBox 10"/>
           <p:cNvSpPr txBox="1"/>
           <p:nvPr/>
         </p:nvSpPr>
         <p:spPr>
           <a:xfrm>
-            <a:off x="1097280" y="3977639"/>
+            <a:off x="1097280" y="5029200"/>
             <a:ext cx="5303520" cy="274320"/>
           </a:xfrm>
           <a:prstGeom prst="rect">
@@ -14659,27 +14771,36 @@
           <a:p>
             <a:pPr algn="l"/>
             <a:r>
-              <a:rPr sz="1250" b="0">
-                <a:solidFill>
-                  <a:srgbClr val="3ED2BC"/>
-                </a:solidFill>
-                <a:latin typeface="Consolas"/>
-              </a:rPr>
-              <a:t>AFTER THE FIX -- freeze the scene · cap each edit</a:t>
-            </a:r>
-          </a:p>
-        </p:txBody>
-      </p:sp>
-      <p:sp>
-        <p:nvSpPr>
-          <p:cNvPr id="10" name="TextBox 9"/>
+              <a:rPr sz="1350" b="1">
+                <a:solidFill>
+                  <a:srgbClr val="F5B63F"/>
+                </a:solidFill>
+                <a:latin typeface="Segoe UI"/>
+              </a:rPr>
+              <a:t>Safe by design:  </a:t>
+            </a:r>
+            <a:r>
+              <a:rPr sz="1350" b="0">
+                <a:solidFill>
+                  <a:srgbClr val="E9EDF3"/>
+                </a:solidFill>
+                <a:latin typeface="Segoe UI"/>
+              </a:rPr>
+              <a:t>scene model frozen · corrections capped ±15%</a:t>
+            </a:r>
+          </a:p>
+        </p:txBody>
+      </p:sp>
+      <p:sp>
+        <p:nvSpPr>
+          <p:cNvPr id="12" name="TextBox 11"/>
           <p:cNvSpPr txBox="1"/>
           <p:nvPr/>
         </p:nvSpPr>
         <p:spPr>
           <a:xfrm>
-            <a:off x="1097280" y="4343400"/>
-            <a:ext cx="2560320" cy="274320"/>
+            <a:off x="1097280" y="5394960"/>
+            <a:ext cx="5303520" cy="365760"/>
           </a:xfrm>
           <a:prstGeom prst="rect">
             <a:avLst/>
@@ -14694,194 +14815,27 @@
           <a:p>
             <a:pPr algn="l"/>
             <a:r>
-              <a:rPr sz="1300" b="0">
+              <a:rPr sz="1200" b="0">
                 <a:solidFill>
                   <a:srgbClr val="93A3B5"/>
                 </a:solidFill>
                 <a:latin typeface="Segoe UI"/>
               </a:rPr>
-              <a:t>Whole scene</a:t>
-            </a:r>
-          </a:p>
-        </p:txBody>
-      </p:sp>
-      <p:sp>
-        <p:nvSpPr>
-          <p:cNvPr id="11" name="TextBox 10"/>
-          <p:cNvSpPr txBox="1"/>
-          <p:nvPr/>
-        </p:nvSpPr>
-        <p:spPr>
-          <a:xfrm>
-            <a:off x="1097280" y="4617720"/>
-            <a:ext cx="2560320" cy="457200"/>
-          </a:xfrm>
-          <a:prstGeom prst="rect">
-            <a:avLst/>
-          </a:prstGeom>
-          <a:noFill/>
-        </p:spPr>
-        <p:txBody>
-          <a:bodyPr wrap="square" anchor="t" lIns="0" rIns="0" tIns="0" bIns="0">
-            <a:spAutoFit/>
-          </a:bodyPr>
-          <a:lstStyle/>
-          <a:p>
-            <a:pPr algn="l"/>
-            <a:r>
-              <a:rPr sz="2400" b="1">
-                <a:solidFill>
-                  <a:srgbClr val="3ED2BC"/>
-                </a:solidFill>
-                <a:latin typeface="Consolas"/>
-              </a:rPr>
-              <a:t>0.078 </a:t>
-            </a:r>
-            <a:r>
-              <a:rPr sz="1400" b="0">
-                <a:solidFill>
-                  <a:srgbClr val="3ED2BC"/>
-                </a:solidFill>
-                <a:latin typeface="Segoe UI"/>
-              </a:rPr>
-              <a:t>pinned ✓</a:t>
-            </a:r>
-          </a:p>
-        </p:txBody>
-      </p:sp>
-      <p:sp>
-        <p:nvSpPr>
-          <p:cNvPr id="12" name="TextBox 11"/>
-          <p:cNvSpPr txBox="1"/>
-          <p:nvPr/>
-        </p:nvSpPr>
-        <p:spPr>
-          <a:xfrm>
-            <a:off x="3749040" y="4343400"/>
-            <a:ext cx="2743200" cy="274320"/>
-          </a:xfrm>
-          <a:prstGeom prst="rect">
-            <a:avLst/>
-          </a:prstGeom>
-          <a:noFill/>
-        </p:spPr>
-        <p:txBody>
-          <a:bodyPr wrap="square" anchor="t" lIns="0" rIns="0" tIns="0" bIns="0">
-            <a:spAutoFit/>
-          </a:bodyPr>
-          <a:lstStyle/>
-          <a:p>
-            <a:pPr algn="l"/>
-            <a:r>
-              <a:rPr sz="1300" b="0">
-                <a:solidFill>
-                  <a:srgbClr val="93A3B5"/>
-                </a:solidFill>
-                <a:latin typeface="Segoe UI"/>
-              </a:rPr>
-              <a:t>Where people OVERLAP</a:t>
-            </a:r>
-          </a:p>
-        </p:txBody>
-      </p:sp>
-      <p:sp>
-        <p:nvSpPr>
-          <p:cNvPr id="13" name="TextBox 12"/>
-          <p:cNvSpPr txBox="1"/>
-          <p:nvPr/>
-        </p:nvSpPr>
-        <p:spPr>
-          <a:xfrm>
-            <a:off x="3749040" y="4617720"/>
-            <a:ext cx="2743200" cy="457200"/>
-          </a:xfrm>
-          <a:prstGeom prst="rect">
-            <a:avLst/>
-          </a:prstGeom>
-          <a:noFill/>
-        </p:spPr>
-        <p:txBody>
-          <a:bodyPr wrap="square" anchor="t" lIns="0" rIns="0" tIns="0" bIns="0">
-            <a:spAutoFit/>
-          </a:bodyPr>
-          <a:lstStyle/>
-          <a:p>
-            <a:pPr algn="l"/>
-            <a:r>
-              <a:rPr sz="2200" b="1">
-                <a:solidFill>
-                  <a:srgbClr val="93A3B5"/>
-                </a:solidFill>
-                <a:latin typeface="Consolas"/>
-              </a:rPr>
-              <a:t>0.056</a:t>
-            </a:r>
-            <a:r>
-              <a:rPr sz="1600" b="0">
-                <a:solidFill>
-                  <a:srgbClr val="5C6B7E"/>
-                </a:solidFill>
-                <a:latin typeface="Segoe UI"/>
-              </a:rPr>
-              <a:t> → </a:t>
-            </a:r>
-            <a:r>
-              <a:rPr sz="2200" b="1">
-                <a:solidFill>
-                  <a:srgbClr val="3ED2BC"/>
-                </a:solidFill>
-                <a:latin typeface="Consolas"/>
-              </a:rPr>
-              <a:t>0.055 ✓</a:t>
-            </a:r>
-          </a:p>
-        </p:txBody>
-      </p:sp>
-      <p:sp>
-        <p:nvSpPr>
-          <p:cNvPr id="14" name="TextBox 13"/>
-          <p:cNvSpPr txBox="1"/>
-          <p:nvPr/>
-        </p:nvSpPr>
-        <p:spPr>
-          <a:xfrm>
-            <a:off x="1097280" y="5532120"/>
-            <a:ext cx="5303520" cy="274320"/>
-          </a:xfrm>
-          <a:prstGeom prst="rect">
-            <a:avLst/>
-          </a:prstGeom>
-          <a:noFill/>
-        </p:spPr>
-        <p:txBody>
-          <a:bodyPr wrap="square" anchor="t" lIns="0" rIns="0" tIns="0" bIns="0">
-            <a:spAutoFit/>
-          </a:bodyPr>
-          <a:lstStyle/>
-          <a:p>
-            <a:pPr algn="l"/>
-            <a:r>
-              <a:rPr sz="1150" b="0">
-                <a:solidFill>
-                  <a:srgbClr val="93A3B5"/>
-                </a:solidFill>
-                <a:latin typeface="Consolas"/>
-              </a:rPr>
-              <a:t>full test set · 10,400 frames · 3,083 with real overlap</a:t>
-            </a:r>
-          </a:p>
-        </p:txBody>
-      </p:sp>
-      <p:sp>
-        <p:nvSpPr>
-          <p:cNvPr id="15" name="Rounded Rectangle 14"/>
+              <a:t>refinement can only act on people -- the rest of the scene is untouched, guaranteed</a:t>
+            </a:r>
+          </a:p>
+        </p:txBody>
+      </p:sp>
+      <p:sp>
+        <p:nvSpPr>
+          <p:cNvPr id="13" name="Rounded Rectangle 12"/>
           <p:cNvSpPr/>
           <p:nvPr/>
         </p:nvSpPr>
         <p:spPr>
           <a:xfrm>
             <a:off x="6858000" y="2286000"/>
-            <a:ext cx="4480560" cy="2148840"/>
+            <a:ext cx="4480560" cy="3657600"/>
           </a:xfrm>
           <a:prstGeom prst="roundRect">
             <a:avLst>
@@ -14945,7 +14899,7 @@
                 </a:solidFill>
                 <a:latin typeface="Segoe UI"/>
               </a:rPr>
-              <a:t>Depth halos ringing every person → clean, capped corrections</a:t>
+              <a:t>Refined vs base, side by side, on a real overlap -- crisp person boundaries in depth</a:t>
             </a:r>
           </a:p>
           <a:p>
@@ -14961,101 +14915,7 @@
                 </a:solidFill>
                 <a:latin typeface="Consolas"/>
               </a:rPr>
-              <a:t>~520x300 · infer_video.py --compare</a:t>
-            </a:r>
-          </a:p>
-        </p:txBody>
-      </p:sp>
-      <p:sp>
-        <p:nvSpPr>
-          <p:cNvPr id="16" name="Rounded Rectangle 15"/>
-          <p:cNvSpPr/>
-          <p:nvPr/>
-        </p:nvSpPr>
-        <p:spPr>
-          <a:xfrm>
-            <a:off x="6858000" y="4572000"/>
-            <a:ext cx="4480560" cy="1371600"/>
-          </a:xfrm>
-          <a:prstGeom prst="roundRect">
-            <a:avLst>
-              <a:gd name="adj" fmla="val 6000"/>
-            </a:avLst>
-          </a:prstGeom>
-          <a:solidFill>
-            <a:srgbClr val="182230"/>
-          </a:solidFill>
-          <a:ln w="19050">
-            <a:solidFill>
-              <a:srgbClr val="F5B63F"/>
-            </a:solidFill>
-            <a:prstDash val="dash"/>
-          </a:ln>
-          <a:effectLst/>
-        </p:spPr>
-        <p:style>
-          <a:lnRef idx="1">
-            <a:schemeClr val="accent1"/>
-          </a:lnRef>
-          <a:fillRef idx="3">
-            <a:schemeClr val="accent1"/>
-          </a:fillRef>
-          <a:effectRef idx="2">
-            <a:schemeClr val="accent1"/>
-          </a:effectRef>
-          <a:fontRef idx="minor">
-            <a:schemeClr val="lt1"/>
-          </a:fontRef>
-        </p:style>
-        <p:txBody>
-          <a:bodyPr rtlCol="0" anchor="ctr" wrap="square"/>
-          <a:lstStyle/>
-          <a:p>
-            <a:pPr algn="ctr">
-              <a:spcBef>
-                <a:spcPts val="300"/>
-              </a:spcBef>
-            </a:pPr>
-            <a:r>
-              <a:rPr sz="1100" b="1">
-                <a:solidFill>
-                  <a:srgbClr val="F5B63F"/>
-                </a:solidFill>
-                <a:latin typeface="Consolas"/>
-              </a:rPr>
-              <a:t>I4 · ZOOM CROP</a:t>
-            </a:r>
-          </a:p>
-          <a:p>
-            <a:pPr algn="ctr">
-              <a:spcBef>
-                <a:spcPts val="300"/>
-              </a:spcBef>
-            </a:pPr>
-            <a:r>
-              <a:rPr sz="1250" b="0">
-                <a:solidFill>
-                  <a:srgbClr val="E9EDF3"/>
-                </a:solidFill>
-                <a:latin typeface="Segoe UI"/>
-              </a:rPr>
-              <a:t>The old ring artifact, close up -- now bounded away</a:t>
-            </a:r>
-          </a:p>
-          <a:p>
-            <a:pPr algn="ctr">
-              <a:spcBef>
-                <a:spcPts val="300"/>
-              </a:spcBef>
-            </a:pPr>
-            <a:r>
-              <a:rPr sz="1000" b="0">
-                <a:solidFill>
-                  <a:srgbClr val="5C6B7E"/>
-                </a:solidFill>
-                <a:latin typeface="Consolas"/>
-              </a:rPr>
-              <a:t>~520x200</a:t>
+              <a:t>~520x430 · infer_video.py --compare</a:t>
             </a:r>
           </a:p>
         </p:txBody>

--- a/docs/presentation/instancedepth-journey.pptx
+++ b/docs/presentation/instancedepth-journey.pptx
@@ -587,7 +587,7 @@
           <a:lstStyle/>
           <a:p>
             <a:r>
-              <a:t>~30s -- Everything on one card, all measured on the full 10,400-frame test set. Scene depth: error 0.072, 94.1% accuracy, and steadier than the per-frame baseline. People: found, followed, and kept -- one identity per person for the whole video, held through occlusions. Overlaps: 0.055 error right where bodies cross, 98.6% accuracy there. This is the slide to leave on screen during questions.</a:t>
+              <a:t>~35s -- The full system against the per-frame baseline, same 10,400-frame held-out test set, five measurements. Read it top to bottom: depth got 7% more accurate; accuracy-within-band went up; and the two TEMPORAL rows -- temporal error and flicker -- both dropped, meaning the video is measurably steadier, not just nicer to look at. Bottom row: overlap regions, the hardest pixels, also improved. One system, every number moved the right way. Leave this on screen during questions.</a:t>
             </a:r>
           </a:p>
         </p:txBody>
@@ -657,7 +657,7 @@
           <a:lstStyle/>
           <a:p>
             <a:r>
-              <a:t>~35s -- What in this project is OURS, beyond the paper we started from. 1: the dataset itself -- fully annotated by us from nothing but RGB and raw depth. 2: the temporal memory and the loss that trains it -- the paper is single-frame; we made it video-native. 3: identities that persist -- the paper re-finds people every frame; we follow them, even through occlusions. 4: refinement that is safe by construction -- frozen scene, capped corrections.</a:t>
+              <a:t>~35s -- What in this project is OURS, beyond the paper we started from. 1: the dataset itself -- fully annotated by us from nothing but RGB and raw depth. 2: the paper is single-frame; we made depth video-native -- a temporal memory carried across frames, trained by a loss that rewards steadiness without punishing real motion. 3: we brought the Video-Mask2Former idea in without its cost -- the per-frame model's own query embeddings carry each person across the video, zero video training. 4: occlusion-aware pair reasoning -- for every overlapping pair, who is in front and by how much, 98.6% accuracy right where bodies cross.</a:t>
             </a:r>
           </a:p>
         </p:txBody>
@@ -797,7 +797,7 @@
           <a:lstStyle/>
           <a:p>
             <a:r>
-              <a:t>~25s -- What's next, in order. 1 (already running): swap in the full pretrained depth model -- not just its backbone -- to push accuracy further, especially close-up. 2: robustness on footage from other cameras and places. 3: the write-up.</a:t>
+              <a:t>~25s -- What's next, in order. 1: push the temporal idea further -- today the memory looks one step back; training on whole clips (the full Video-Mask2Former regime) extends how far consistency reaches. 2: robustness on footage from other cameras and places, so the same steadiness holds anywhere. 3: release our dataset as a benchmark, with the write-up -- there is no public instance-depth video benchmark like it.</a:t>
             </a:r>
           </a:p>
         </p:txBody>
@@ -867,7 +867,7 @@
           <a:lstStyle/>
           <a:p>
             <a:r>
-              <a:t>~20s -- Close the loop with slide 4: we opened with four promises; here they are again, each with its receipt. Depth for each person -- delivered as per-person layers. Correct through overlaps -- 0.055 where bodies cross. Steady across frames -- flicker down, identities locked. Real metres -- 0.072 relative error on 10,400 frames. The promises held.</a:t>
+              <a:t>~20s -- Close the loop with slide 4: we opened with four promises; here they are again, each with its receipt. Depth for each person -- delivered as per-person layers. Correct through overlaps -- 0.055 where bodies cross, 98.6% accuracy there. Steady across frames -- both temporal metrics improved; the video is measurably calmer. Real metres -- 0.072 relative error on 10,400 frames. The promises held.</a:t>
             </a:r>
           </a:p>
         </p:txBody>
@@ -1077,7 +1077,7 @@
           <a:lstStyle/>
           <a:p>
             <a:r>
-              <a:t>~35s -- The problem in one image. Left: today's best models fuse overlapping people into one blob at one depth. Right (V2): a real clip of a foundation model failing on a group. 'Everything great about modern depth estimation stops at the edge of a crowd.'</a:t>
+              <a:t>~35s -- The problem: depth models live one frame at a time. Left: the same still scene, three consecutive frames, three different answers -- every frame is re-estimated from scratch, so depth shimmers and nothing persists. And inside each frame, overlapping people fuse into one mass. Right (V2): a real clip of a foundation model on a group -- watch the depth flicker and the people merge.</a:t>
             </a:r>
           </a:p>
         </p:txBody>
@@ -1147,7 +1147,7 @@
           <a:lstStyle/>
           <a:p>
             <a:r>
-              <a:t>~35s -- Three reasons this is genuinely hard. 1: the pixels you need are hidden. 2: a half-hidden person inherits the depth of whoever covers them. 3: video -- every frame answers slightly differently, so depth shimmers. 'The evidence is missing, borrowed, or unstable.'</a:t>
+              <a:t>~35s -- Three things make it genuinely hard. 1: crowds -- overlapping people fuse into one mass, and the hidden parts have no pixels at all. 2: single-image models have no notion of time, so consecutive frames disagree and the video shimmers. 3: consistency has to hold EVERYWHERE at once -- per pixel, per person, per frame; fixing one usually breaks another. Temporal consistency is the hardest of the three because there is nothing in a single frame to anchor it.</a:t>
             </a:r>
           </a:p>
         </p:txBody>
@@ -1427,7 +1427,7 @@
           <a:lstStyle/>
           <a:p>
             <a:r>
-              <a:t>~50s -- Pass 1 results, and the payoff of the temporal fix. Left: scenes come out sharp. Right, the real numbers on the full 10,400-frame test set: once we froze the scene model and added only the memory module, EVERY number improved at once -- more accurate AND steadier. This is the module that used to do nothing; now it earns its place.</a:t>
+              <a:t>~50s -- Pass 1 results. Left: scenes come out sharp. Right, the real numbers on the full 10,400-frame test set: adding the temporal memory module improved EVERY number at once -- the depth got more accurate AND steadier across frames. Accuracy and temporal consistency usually trade off against each other; here they moved together.</a:t>
             </a:r>
           </a:p>
         </p:txBody>
@@ -1567,7 +1567,7 @@
           <a:lstStyle/>
           <a:p>
             <a:r>
-              <a:t>~45s -- Pass 3 results. Where two people overlap is exactly where depth is hardest -- and exactly where our refinement helps: overlap-region error drops 0.056 to 0.055, with 98.6% of overlap pixels within the tight accuracy band. Just as important is what it can NEVER do: by design the scene model is frozen and each per-person correction is capped at ±15%, so refinement is guaranteed to leave the rest of the scene untouched. Show V4: refined vs base, side by side, on a real overlap.</a:t>
+              <a:t>~45s -- Pass 3 results. Where two people overlap is exactly where depth is hardest -- and exactly where our refinement delivers: overlap-region error drops 0.056 to 0.055, with 98.6% of overlap pixels inside the tight accuracy band, while whole-scene accuracy stays at its best (0.078). The refinement reasons about each occluding PAIR -- who is in front, by how much -- and sharpens the person boundaries in the depth map. Show V4: refined vs base, side by side, on a real overlap.</a:t>
             </a:r>
           </a:p>
         </p:txBody>
@@ -5067,7 +5067,7 @@
         <p:spPr>
           <a:xfrm>
             <a:off x="822960" y="1051560"/>
-            <a:ext cx="10058400" cy="1097280"/>
+            <a:ext cx="10972800" cy="1097280"/>
           </a:xfrm>
           <a:prstGeom prst="rect">
             <a:avLst/>
@@ -5088,21 +5088,91 @@
                 </a:solidFill>
                 <a:latin typeface="Segoe UI"/>
               </a:rPr>
-              <a:t>The numbers, all on one card</a:t>
-            </a:r>
-          </a:p>
-        </p:txBody>
-      </p:sp>
-      <p:sp>
-        <p:nvSpPr>
-          <p:cNvPr id="4" name="Rounded Rectangle 3"/>
+              <a:t>Per-frame baseline → full system</a:t>
+            </a:r>
+          </a:p>
+        </p:txBody>
+      </p:sp>
+      <p:sp>
+        <p:nvSpPr>
+          <p:cNvPr id="4" name="TextBox 3"/>
+          <p:cNvSpPr txBox="1"/>
+          <p:nvPr/>
+        </p:nvSpPr>
+        <p:spPr>
+          <a:xfrm>
+            <a:off x="5577840" y="2148840"/>
+            <a:ext cx="1920240" cy="320040"/>
+          </a:xfrm>
+          <a:prstGeom prst="rect">
+            <a:avLst/>
+          </a:prstGeom>
+          <a:noFill/>
+        </p:spPr>
+        <p:txBody>
+          <a:bodyPr wrap="square" anchor="t" lIns="0" rIns="0" tIns="0" bIns="0">
+            <a:spAutoFit/>
+          </a:bodyPr>
+          <a:lstStyle/>
+          <a:p>
+            <a:pPr algn="ctr"/>
+            <a:r>
+              <a:rPr sz="1200" b="1">
+                <a:solidFill>
+                  <a:srgbClr val="7DA3F2"/>
+                </a:solidFill>
+                <a:latin typeface="Consolas"/>
+              </a:rPr>
+              <a:t>BASELINE</a:t>
+            </a:r>
+          </a:p>
+        </p:txBody>
+      </p:sp>
+      <p:sp>
+        <p:nvSpPr>
+          <p:cNvPr id="5" name="TextBox 4"/>
+          <p:cNvSpPr txBox="1"/>
+          <p:nvPr/>
+        </p:nvSpPr>
+        <p:spPr>
+          <a:xfrm>
+            <a:off x="7863840" y="2148840"/>
+            <a:ext cx="1920240" cy="320040"/>
+          </a:xfrm>
+          <a:prstGeom prst="rect">
+            <a:avLst/>
+          </a:prstGeom>
+          <a:noFill/>
+        </p:spPr>
+        <p:txBody>
+          <a:bodyPr wrap="square" anchor="t" lIns="0" rIns="0" tIns="0" bIns="0">
+            <a:spAutoFit/>
+          </a:bodyPr>
+          <a:lstStyle/>
+          <a:p>
+            <a:pPr algn="ctr"/>
+            <a:r>
+              <a:rPr sz="1200" b="1">
+                <a:solidFill>
+                  <a:srgbClr val="F5B63F"/>
+                </a:solidFill>
+                <a:latin typeface="Consolas"/>
+              </a:rPr>
+              <a:t>FULL SYSTEM</a:t>
+            </a:r>
+          </a:p>
+        </p:txBody>
+      </p:sp>
+      <p:sp>
+        <p:nvSpPr>
+          <p:cNvPr id="6" name="Rounded Rectangle 5"/>
           <p:cNvSpPr/>
           <p:nvPr/>
         </p:nvSpPr>
         <p:spPr>
           <a:xfrm>
-            <a:off x="822960" y="2286000"/>
-            <a:ext cx="3429000" cy="3566160"/>
+            <a:off x="822960" y="2560320"/>
+            <a:ext cx="10515600" cy="585216"/>
           </a:xfrm>
           <a:prstGeom prst="roundRect">
             <a:avLst>
@@ -5112,9 +5182,9 @@
           <a:solidFill>
             <a:srgbClr val="131A23"/>
           </a:solidFill>
-          <a:ln w="25400">
+          <a:ln w="12700">
             <a:solidFill>
-              <a:srgbClr val="3E6FD9"/>
+              <a:srgbClr val="2A3542"/>
             </a:solidFill>
           </a:ln>
           <a:effectLst/>
@@ -5143,14 +5213,14 @@
       </p:sp>
       <p:sp>
         <p:nvSpPr>
-          <p:cNvPr id="5" name="TextBox 4"/>
+          <p:cNvPr id="7" name="TextBox 6"/>
           <p:cNvSpPr txBox="1"/>
           <p:nvPr/>
         </p:nvSpPr>
         <p:spPr>
           <a:xfrm>
-            <a:off x="822960" y="2514600"/>
-            <a:ext cx="3429000" cy="320040"/>
+            <a:off x="1097280" y="2560320"/>
+            <a:ext cx="4206240" cy="585216"/>
           </a:xfrm>
           <a:prstGeom prst="rect">
             <a:avLst/>
@@ -5158,34 +5228,43 @@
           <a:noFill/>
         </p:spPr>
         <p:txBody>
-          <a:bodyPr wrap="square" anchor="t" lIns="0" rIns="0" tIns="0" bIns="0">
+          <a:bodyPr wrap="square" anchor="ctr" lIns="0" rIns="0" tIns="0" bIns="0">
             <a:spAutoFit/>
           </a:bodyPr>
           <a:lstStyle/>
           <a:p>
-            <a:pPr algn="ctr"/>
-            <a:r>
-              <a:rPr sz="1300" b="1">
-                <a:solidFill>
-                  <a:srgbClr val="7DA3F2"/>
-                </a:solidFill>
-                <a:latin typeface="Consolas"/>
-              </a:rPr>
-              <a:t>SCENE DEPTH</a:t>
-            </a:r>
-          </a:p>
-        </p:txBody>
-      </p:sp>
-      <p:sp>
-        <p:nvSpPr>
-          <p:cNvPr id="6" name="TextBox 5"/>
+            <a:pPr algn="l"/>
+            <a:r>
+              <a:rPr sz="1550" b="1">
+                <a:solidFill>
+                  <a:srgbClr val="E9EDF3"/>
+                </a:solidFill>
+                <a:latin typeface="Segoe UI"/>
+              </a:rPr>
+              <a:t>Depth error (rel)</a:t>
+            </a:r>
+            <a:r>
+              <a:rPr sz="1150" b="0">
+                <a:solidFill>
+                  <a:srgbClr val="F5B63F"/>
+                </a:solidFill>
+                <a:latin typeface="Segoe UI"/>
+              </a:rPr>
+              <a:t/>
+            </a:r>
+          </a:p>
+        </p:txBody>
+      </p:sp>
+      <p:sp>
+        <p:nvSpPr>
+          <p:cNvPr id="8" name="TextBox 7"/>
           <p:cNvSpPr txBox="1"/>
           <p:nvPr/>
         </p:nvSpPr>
         <p:spPr>
           <a:xfrm>
-            <a:off x="822960" y="3017520"/>
-            <a:ext cx="3429000" cy="457200"/>
+            <a:off x="5577840" y="2560320"/>
+            <a:ext cx="1920240" cy="585216"/>
           </a:xfrm>
           <a:prstGeom prst="rect">
             <a:avLst/>
@@ -5193,34 +5272,34 @@
           <a:noFill/>
         </p:spPr>
         <p:txBody>
-          <a:bodyPr wrap="square" anchor="t" lIns="0" rIns="0" tIns="0" bIns="0">
+          <a:bodyPr wrap="square" anchor="ctr" lIns="0" rIns="0" tIns="0" bIns="0">
             <a:spAutoFit/>
           </a:bodyPr>
           <a:lstStyle/>
           <a:p>
             <a:pPr algn="ctr"/>
             <a:r>
-              <a:rPr sz="2600" b="1">
-                <a:solidFill>
-                  <a:srgbClr val="E9EDF3"/>
+              <a:rPr sz="1700" b="0">
+                <a:solidFill>
+                  <a:srgbClr val="93A3B5"/>
                 </a:solidFill>
                 <a:latin typeface="Consolas"/>
               </a:rPr>
-              <a:t>0.072</a:t>
-            </a:r>
-          </a:p>
-        </p:txBody>
-      </p:sp>
-      <p:sp>
-        <p:nvSpPr>
-          <p:cNvPr id="7" name="TextBox 6"/>
+              <a:t>0.078</a:t>
+            </a:r>
+          </a:p>
+        </p:txBody>
+      </p:sp>
+      <p:sp>
+        <p:nvSpPr>
+          <p:cNvPr id="9" name="TextBox 8"/>
           <p:cNvSpPr txBox="1"/>
           <p:nvPr/>
         </p:nvSpPr>
         <p:spPr>
           <a:xfrm>
-            <a:off x="822960" y="3474720"/>
-            <a:ext cx="3429000" cy="320040"/>
+            <a:off x="7360920" y="2560320"/>
+            <a:ext cx="640080" cy="585216"/>
           </a:xfrm>
           <a:prstGeom prst="rect">
             <a:avLst/>
@@ -5228,34 +5307,34 @@
           <a:noFill/>
         </p:spPr>
         <p:txBody>
-          <a:bodyPr wrap="square" anchor="t" lIns="0" rIns="0" tIns="0" bIns="0">
+          <a:bodyPr wrap="square" anchor="ctr" lIns="0" rIns="0" tIns="0" bIns="0">
             <a:spAutoFit/>
           </a:bodyPr>
           <a:lstStyle/>
           <a:p>
             <a:pPr algn="ctr"/>
             <a:r>
-              <a:rPr sz="1250" b="0">
-                <a:solidFill>
-                  <a:srgbClr val="93A3B5"/>
+              <a:rPr sz="1500" b="0">
+                <a:solidFill>
+                  <a:srgbClr val="5C6B7E"/>
                 </a:solidFill>
                 <a:latin typeface="Segoe UI"/>
               </a:rPr>
-              <a:t>depth error (rel)</a:t>
-            </a:r>
-          </a:p>
-        </p:txBody>
-      </p:sp>
-      <p:sp>
-        <p:nvSpPr>
-          <p:cNvPr id="8" name="TextBox 7"/>
+              <a:t>→</a:t>
+            </a:r>
+          </a:p>
+        </p:txBody>
+      </p:sp>
+      <p:sp>
+        <p:nvSpPr>
+          <p:cNvPr id="10" name="TextBox 9"/>
           <p:cNvSpPr txBox="1"/>
           <p:nvPr/>
         </p:nvSpPr>
         <p:spPr>
           <a:xfrm>
-            <a:off x="822960" y="3931920"/>
-            <a:ext cx="3429000" cy="457200"/>
+            <a:off x="7863840" y="2560320"/>
+            <a:ext cx="1920240" cy="585216"/>
           </a:xfrm>
           <a:prstGeom prst="rect">
             <a:avLst/>
@@ -5263,34 +5342,34 @@
           <a:noFill/>
         </p:spPr>
         <p:txBody>
-          <a:bodyPr wrap="square" anchor="t" lIns="0" rIns="0" tIns="0" bIns="0">
+          <a:bodyPr wrap="square" anchor="ctr" lIns="0" rIns="0" tIns="0" bIns="0">
             <a:spAutoFit/>
           </a:bodyPr>
           <a:lstStyle/>
           <a:p>
             <a:pPr algn="ctr"/>
             <a:r>
-              <a:rPr sz="2600" b="1">
+              <a:rPr sz="1700" b="1">
                 <a:solidFill>
                   <a:srgbClr val="E9EDF3"/>
                 </a:solidFill>
                 <a:latin typeface="Consolas"/>
               </a:rPr>
-              <a:t>94.1%</a:t>
-            </a:r>
-          </a:p>
-        </p:txBody>
-      </p:sp>
-      <p:sp>
-        <p:nvSpPr>
-          <p:cNvPr id="9" name="TextBox 8"/>
+              <a:t>0.072</a:t>
+            </a:r>
+          </a:p>
+        </p:txBody>
+      </p:sp>
+      <p:sp>
+        <p:nvSpPr>
+          <p:cNvPr id="11" name="TextBox 10"/>
           <p:cNvSpPr txBox="1"/>
           <p:nvPr/>
         </p:nvSpPr>
         <p:spPr>
           <a:xfrm>
-            <a:off x="822960" y="4389120"/>
-            <a:ext cx="3429000" cy="320040"/>
+            <a:off x="9829800" y="2560320"/>
+            <a:ext cx="1417320" cy="585216"/>
           </a:xfrm>
           <a:prstGeom prst="rect">
             <a:avLst/>
@@ -5298,90 +5377,20 @@
           <a:noFill/>
         </p:spPr>
         <p:txBody>
-          <a:bodyPr wrap="square" anchor="t" lIns="0" rIns="0" tIns="0" bIns="0">
+          <a:bodyPr wrap="square" anchor="ctr" lIns="0" rIns="0" tIns="0" bIns="0">
             <a:spAutoFit/>
           </a:bodyPr>
           <a:lstStyle/>
           <a:p>
             <a:pPr algn="ctr"/>
             <a:r>
-              <a:rPr sz="1250" b="0">
-                <a:solidFill>
-                  <a:srgbClr val="93A3B5"/>
-                </a:solidFill>
-                <a:latin typeface="Segoe UI"/>
-              </a:rPr>
-              <a:t>accuracy</a:t>
-            </a:r>
-          </a:p>
-        </p:txBody>
-      </p:sp>
-      <p:sp>
-        <p:nvSpPr>
-          <p:cNvPr id="10" name="TextBox 9"/>
-          <p:cNvSpPr txBox="1"/>
-          <p:nvPr/>
-        </p:nvSpPr>
-        <p:spPr>
-          <a:xfrm>
-            <a:off x="822960" y="4846320"/>
-            <a:ext cx="3429000" cy="457200"/>
-          </a:xfrm>
-          <a:prstGeom prst="rect">
-            <a:avLst/>
-          </a:prstGeom>
-          <a:noFill/>
-        </p:spPr>
-        <p:txBody>
-          <a:bodyPr wrap="square" anchor="t" lIns="0" rIns="0" tIns="0" bIns="0">
-            <a:spAutoFit/>
-          </a:bodyPr>
-          <a:lstStyle/>
-          <a:p>
-            <a:pPr algn="ctr"/>
-            <a:r>
-              <a:rPr sz="2600" b="1">
-                <a:solidFill>
-                  <a:srgbClr val="E9EDF3"/>
+              <a:rPr sz="1350" b="1">
+                <a:solidFill>
+                  <a:srgbClr val="3ED2BC"/>
                 </a:solidFill>
                 <a:latin typeface="Consolas"/>
               </a:rPr>
-              <a:t>-8%</a:t>
-            </a:r>
-          </a:p>
-        </p:txBody>
-      </p:sp>
-      <p:sp>
-        <p:nvSpPr>
-          <p:cNvPr id="11" name="TextBox 10"/>
-          <p:cNvSpPr txBox="1"/>
-          <p:nvPr/>
-        </p:nvSpPr>
-        <p:spPr>
-          <a:xfrm>
-            <a:off x="822960" y="5303520"/>
-            <a:ext cx="3429000" cy="320040"/>
-          </a:xfrm>
-          <a:prstGeom prst="rect">
-            <a:avLst/>
-          </a:prstGeom>
-          <a:noFill/>
-        </p:spPr>
-        <p:txBody>
-          <a:bodyPr wrap="square" anchor="t" lIns="0" rIns="0" tIns="0" bIns="0">
-            <a:spAutoFit/>
-          </a:bodyPr>
-          <a:lstStyle/>
-          <a:p>
-            <a:pPr algn="ctr"/>
-            <a:r>
-              <a:rPr sz="1250" b="0">
-                <a:solidFill>
-                  <a:srgbClr val="93A3B5"/>
-                </a:solidFill>
-                <a:latin typeface="Segoe UI"/>
-              </a:rPr>
-              <a:t>flicker vs per-frame</a:t>
+              <a:t>-7% ✓</a:t>
             </a:r>
           </a:p>
         </p:txBody>
@@ -5394,8 +5403,8 @@
         </p:nvSpPr>
         <p:spPr>
           <a:xfrm>
-            <a:off x="4507992" y="2286000"/>
-            <a:ext cx="3429000" cy="3566160"/>
+            <a:off x="822960" y="3255263"/>
+            <a:ext cx="10515600" cy="585216"/>
           </a:xfrm>
           <a:prstGeom prst="roundRect">
             <a:avLst>
@@ -5405,9 +5414,9 @@
           <a:solidFill>
             <a:srgbClr val="131A23"/>
           </a:solidFill>
-          <a:ln w="25400">
+          <a:ln w="12700">
             <a:solidFill>
-              <a:srgbClr val="1FA491"/>
+              <a:srgbClr val="2A3542"/>
             </a:solidFill>
           </a:ln>
           <a:effectLst/>
@@ -5442,8 +5451,8 @@
         </p:nvSpPr>
         <p:spPr>
           <a:xfrm>
-            <a:off x="4507992" y="2514600"/>
-            <a:ext cx="3429000" cy="320040"/>
+            <a:off x="1097280" y="3255263"/>
+            <a:ext cx="4206240" cy="585216"/>
           </a:xfrm>
           <a:prstGeom prst="rect">
             <a:avLst/>
@@ -5451,20 +5460,29 @@
           <a:noFill/>
         </p:spPr>
         <p:txBody>
-          <a:bodyPr wrap="square" anchor="t" lIns="0" rIns="0" tIns="0" bIns="0">
+          <a:bodyPr wrap="square" anchor="ctr" lIns="0" rIns="0" tIns="0" bIns="0">
             <a:spAutoFit/>
           </a:bodyPr>
           <a:lstStyle/>
           <a:p>
-            <a:pPr algn="ctr"/>
-            <a:r>
-              <a:rPr sz="1300" b="1">
-                <a:solidFill>
-                  <a:srgbClr val="3ED2BC"/>
-                </a:solidFill>
-                <a:latin typeface="Consolas"/>
-              </a:rPr>
-              <a:t>PEOPLE &amp; IDENTITY</a:t>
+            <a:pPr algn="l"/>
+            <a:r>
+              <a:rPr sz="1550" b="1">
+                <a:solidFill>
+                  <a:srgbClr val="E9EDF3"/>
+                </a:solidFill>
+                <a:latin typeface="Segoe UI"/>
+              </a:rPr>
+              <a:t>Accuracy (within band)</a:t>
+            </a:r>
+            <a:r>
+              <a:rPr sz="1150" b="0">
+                <a:solidFill>
+                  <a:srgbClr val="F5B63F"/>
+                </a:solidFill>
+                <a:latin typeface="Segoe UI"/>
+              </a:rPr>
+              <a:t/>
             </a:r>
           </a:p>
         </p:txBody>
@@ -5477,8 +5495,8 @@
         </p:nvSpPr>
         <p:spPr>
           <a:xfrm>
-            <a:off x="4507992" y="3017520"/>
-            <a:ext cx="3429000" cy="457200"/>
+            <a:off x="5577840" y="3255263"/>
+            <a:ext cx="1920240" cy="585216"/>
           </a:xfrm>
           <a:prstGeom prst="rect">
             <a:avLst/>
@@ -5486,20 +5504,20 @@
           <a:noFill/>
         </p:spPr>
         <p:txBody>
-          <a:bodyPr wrap="square" anchor="t" lIns="0" rIns="0" tIns="0" bIns="0">
+          <a:bodyPr wrap="square" anchor="ctr" lIns="0" rIns="0" tIns="0" bIns="0">
             <a:spAutoFit/>
           </a:bodyPr>
           <a:lstStyle/>
           <a:p>
             <a:pPr algn="ctr"/>
             <a:r>
-              <a:rPr sz="2600" b="1">
-                <a:solidFill>
-                  <a:srgbClr val="E9EDF3"/>
+              <a:rPr sz="1700" b="0">
+                <a:solidFill>
+                  <a:srgbClr val="93A3B5"/>
                 </a:solidFill>
                 <a:latin typeface="Consolas"/>
               </a:rPr>
-              <a:t>1 : 1</a:t>
+              <a:t>93.8%</a:t>
             </a:r>
           </a:p>
         </p:txBody>
@@ -5512,8 +5530,8 @@
         </p:nvSpPr>
         <p:spPr>
           <a:xfrm>
-            <a:off x="4507992" y="3474720"/>
-            <a:ext cx="3429000" cy="320040"/>
+            <a:off x="7360920" y="3255263"/>
+            <a:ext cx="640080" cy="585216"/>
           </a:xfrm>
           <a:prstGeom prst="rect">
             <a:avLst/>
@@ -5521,20 +5539,20 @@
           <a:noFill/>
         </p:spPr>
         <p:txBody>
-          <a:bodyPr wrap="square" anchor="t" lIns="0" rIns="0" tIns="0" bIns="0">
+          <a:bodyPr wrap="square" anchor="ctr" lIns="0" rIns="0" tIns="0" bIns="0">
             <a:spAutoFit/>
           </a:bodyPr>
           <a:lstStyle/>
           <a:p>
             <a:pPr algn="ctr"/>
             <a:r>
-              <a:rPr sz="1250" b="0">
-                <a:solidFill>
-                  <a:srgbClr val="93A3B5"/>
+              <a:rPr sz="1500" b="0">
+                <a:solidFill>
+                  <a:srgbClr val="5C6B7E"/>
                 </a:solidFill>
                 <a:latin typeface="Segoe UI"/>
               </a:rPr>
-              <a:t>one colour per person</a:t>
+              <a:t>→</a:t>
             </a:r>
           </a:p>
         </p:txBody>
@@ -5547,8 +5565,8 @@
         </p:nvSpPr>
         <p:spPr>
           <a:xfrm>
-            <a:off x="4507992" y="3931920"/>
-            <a:ext cx="3429000" cy="457200"/>
+            <a:off x="7863840" y="3255263"/>
+            <a:ext cx="1920240" cy="585216"/>
           </a:xfrm>
           <a:prstGeom prst="rect">
             <a:avLst/>
@@ -5556,20 +5574,20 @@
           <a:noFill/>
         </p:spPr>
         <p:txBody>
-          <a:bodyPr wrap="square" anchor="t" lIns="0" rIns="0" tIns="0" bIns="0">
+          <a:bodyPr wrap="square" anchor="ctr" lIns="0" rIns="0" tIns="0" bIns="0">
             <a:spAutoFit/>
           </a:bodyPr>
           <a:lstStyle/>
           <a:p>
             <a:pPr algn="ctr"/>
             <a:r>
-              <a:rPr sz="2600" b="1">
+              <a:rPr sz="1700" b="1">
                 <a:solidFill>
                   <a:srgbClr val="E9EDF3"/>
                 </a:solidFill>
                 <a:latin typeface="Consolas"/>
               </a:rPr>
-              <a:t>full video</a:t>
+              <a:t>94.1%</a:t>
             </a:r>
           </a:p>
         </p:txBody>
@@ -5582,8 +5600,8 @@
         </p:nvSpPr>
         <p:spPr>
           <a:xfrm>
-            <a:off x="4507992" y="4389120"/>
-            <a:ext cx="3429000" cy="320040"/>
+            <a:off x="9829800" y="3255263"/>
+            <a:ext cx="1417320" cy="585216"/>
           </a:xfrm>
           <a:prstGeom prst="rect">
             <a:avLst/>
@@ -5591,104 +5609,34 @@
           <a:noFill/>
         </p:spPr>
         <p:txBody>
-          <a:bodyPr wrap="square" anchor="t" lIns="0" rIns="0" tIns="0" bIns="0">
+          <a:bodyPr wrap="square" anchor="ctr" lIns="0" rIns="0" tIns="0" bIns="0">
             <a:spAutoFit/>
           </a:bodyPr>
           <a:lstStyle/>
           <a:p>
             <a:pPr algn="ctr"/>
             <a:r>
-              <a:rPr sz="1250" b="0">
-                <a:solidFill>
-                  <a:srgbClr val="93A3B5"/>
-                </a:solidFill>
-                <a:latin typeface="Segoe UI"/>
-              </a:rPr>
-              <a:t>identity held</a:t>
-            </a:r>
-          </a:p>
-        </p:txBody>
-      </p:sp>
-      <p:sp>
-        <p:nvSpPr>
-          <p:cNvPr id="18" name="TextBox 17"/>
-          <p:cNvSpPr txBox="1"/>
-          <p:nvPr/>
-        </p:nvSpPr>
-        <p:spPr>
-          <a:xfrm>
-            <a:off x="4507992" y="4846320"/>
-            <a:ext cx="3429000" cy="457200"/>
-          </a:xfrm>
-          <a:prstGeom prst="rect">
-            <a:avLst/>
-          </a:prstGeom>
-          <a:noFill/>
-        </p:spPr>
-        <p:txBody>
-          <a:bodyPr wrap="square" anchor="t" lIns="0" rIns="0" tIns="0" bIns="0">
-            <a:spAutoFit/>
-          </a:bodyPr>
-          <a:lstStyle/>
-          <a:p>
-            <a:pPr algn="ctr"/>
-            <a:r>
-              <a:rPr sz="2600" b="1">
-                <a:solidFill>
-                  <a:srgbClr val="E9EDF3"/>
+              <a:rPr sz="1350" b="1">
+                <a:solidFill>
+                  <a:srgbClr val="3ED2BC"/>
                 </a:solidFill>
                 <a:latin typeface="Consolas"/>
               </a:rPr>
-              <a:t>through</a:t>
-            </a:r>
-          </a:p>
-        </p:txBody>
-      </p:sp>
-      <p:sp>
-        <p:nvSpPr>
-          <p:cNvPr id="19" name="TextBox 18"/>
-          <p:cNvSpPr txBox="1"/>
-          <p:nvPr/>
-        </p:nvSpPr>
-        <p:spPr>
-          <a:xfrm>
-            <a:off x="4507992" y="5303520"/>
-            <a:ext cx="3429000" cy="320040"/>
-          </a:xfrm>
-          <a:prstGeom prst="rect">
-            <a:avLst/>
-          </a:prstGeom>
-          <a:noFill/>
-        </p:spPr>
-        <p:txBody>
-          <a:bodyPr wrap="square" anchor="t" lIns="0" rIns="0" tIns="0" bIns="0">
-            <a:spAutoFit/>
-          </a:bodyPr>
-          <a:lstStyle/>
-          <a:p>
-            <a:pPr algn="ctr"/>
-            <a:r>
-              <a:rPr sz="1250" b="0">
-                <a:solidFill>
-                  <a:srgbClr val="93A3B5"/>
-                </a:solidFill>
-                <a:latin typeface="Segoe UI"/>
-              </a:rPr>
-              <a:t>occlusions</a:t>
-            </a:r>
-          </a:p>
-        </p:txBody>
-      </p:sp>
-      <p:sp>
-        <p:nvSpPr>
-          <p:cNvPr id="20" name="Rounded Rectangle 19"/>
+              <a:t>+0.3 pt ✓</a:t>
+            </a:r>
+          </a:p>
+        </p:txBody>
+      </p:sp>
+      <p:sp>
+        <p:nvSpPr>
+          <p:cNvPr id="18" name="Rounded Rectangle 17"/>
           <p:cNvSpPr/>
           <p:nvPr/>
         </p:nvSpPr>
         <p:spPr>
           <a:xfrm>
-            <a:off x="8193024" y="2286000"/>
-            <a:ext cx="3429000" cy="3566160"/>
+            <a:off x="822960" y="3950208"/>
+            <a:ext cx="10515600" cy="585216"/>
           </a:xfrm>
           <a:prstGeom prst="roundRect">
             <a:avLst>
@@ -5698,7 +5646,7 @@
           <a:solidFill>
             <a:srgbClr val="131A23"/>
           </a:solidFill>
-          <a:ln w="25400">
+          <a:ln w="22225">
             <a:solidFill>
               <a:srgbClr val="B07D18"/>
             </a:solidFill>
@@ -5729,14 +5677,662 @@
       </p:sp>
       <p:sp>
         <p:nvSpPr>
+          <p:cNvPr id="19" name="TextBox 18"/>
+          <p:cNvSpPr txBox="1"/>
+          <p:nvPr/>
+        </p:nvSpPr>
+        <p:spPr>
+          <a:xfrm>
+            <a:off x="1097280" y="3950208"/>
+            <a:ext cx="4206240" cy="585216"/>
+          </a:xfrm>
+          <a:prstGeom prst="rect">
+            <a:avLst/>
+          </a:prstGeom>
+          <a:noFill/>
+        </p:spPr>
+        <p:txBody>
+          <a:bodyPr wrap="square" anchor="ctr" lIns="0" rIns="0" tIns="0" bIns="0">
+            <a:spAutoFit/>
+          </a:bodyPr>
+          <a:lstStyle/>
+          <a:p>
+            <a:pPr algn="l"/>
+            <a:r>
+              <a:rPr sz="1550" b="1">
+                <a:solidFill>
+                  <a:srgbClr val="E9EDF3"/>
+                </a:solidFill>
+                <a:latin typeface="Segoe UI"/>
+              </a:rPr>
+              <a:t>Temporal error (TAE)</a:t>
+            </a:r>
+            <a:r>
+              <a:rPr sz="1150" b="0">
+                <a:solidFill>
+                  <a:srgbClr val="F5B63F"/>
+                </a:solidFill>
+                <a:latin typeface="Segoe UI"/>
+              </a:rPr>
+              <a:t>   · temporal</a:t>
+            </a:r>
+          </a:p>
+        </p:txBody>
+      </p:sp>
+      <p:sp>
+        <p:nvSpPr>
+          <p:cNvPr id="20" name="TextBox 19"/>
+          <p:cNvSpPr txBox="1"/>
+          <p:nvPr/>
+        </p:nvSpPr>
+        <p:spPr>
+          <a:xfrm>
+            <a:off x="5577840" y="3950208"/>
+            <a:ext cx="1920240" cy="585216"/>
+          </a:xfrm>
+          <a:prstGeom prst="rect">
+            <a:avLst/>
+          </a:prstGeom>
+          <a:noFill/>
+        </p:spPr>
+        <p:txBody>
+          <a:bodyPr wrap="square" anchor="ctr" lIns="0" rIns="0" tIns="0" bIns="0">
+            <a:spAutoFit/>
+          </a:bodyPr>
+          <a:lstStyle/>
+          <a:p>
+            <a:pPr algn="ctr"/>
+            <a:r>
+              <a:rPr sz="1700" b="0">
+                <a:solidFill>
+                  <a:srgbClr val="93A3B5"/>
+                </a:solidFill>
+                <a:latin typeface="Consolas"/>
+              </a:rPr>
+              <a:t>0.0558</a:t>
+            </a:r>
+          </a:p>
+        </p:txBody>
+      </p:sp>
+      <p:sp>
+        <p:nvSpPr>
           <p:cNvPr id="21" name="TextBox 20"/>
           <p:cNvSpPr txBox="1"/>
           <p:nvPr/>
         </p:nvSpPr>
         <p:spPr>
           <a:xfrm>
-            <a:off x="8193024" y="2514600"/>
-            <a:ext cx="3429000" cy="320040"/>
+            <a:off x="7360920" y="3950208"/>
+            <a:ext cx="640080" cy="585216"/>
+          </a:xfrm>
+          <a:prstGeom prst="rect">
+            <a:avLst/>
+          </a:prstGeom>
+          <a:noFill/>
+        </p:spPr>
+        <p:txBody>
+          <a:bodyPr wrap="square" anchor="ctr" lIns="0" rIns="0" tIns="0" bIns="0">
+            <a:spAutoFit/>
+          </a:bodyPr>
+          <a:lstStyle/>
+          <a:p>
+            <a:pPr algn="ctr"/>
+            <a:r>
+              <a:rPr sz="1500" b="0">
+                <a:solidFill>
+                  <a:srgbClr val="5C6B7E"/>
+                </a:solidFill>
+                <a:latin typeface="Segoe UI"/>
+              </a:rPr>
+              <a:t>→</a:t>
+            </a:r>
+          </a:p>
+        </p:txBody>
+      </p:sp>
+      <p:sp>
+        <p:nvSpPr>
+          <p:cNvPr id="22" name="TextBox 21"/>
+          <p:cNvSpPr txBox="1"/>
+          <p:nvPr/>
+        </p:nvSpPr>
+        <p:spPr>
+          <a:xfrm>
+            <a:off x="7863840" y="3950208"/>
+            <a:ext cx="1920240" cy="585216"/>
+          </a:xfrm>
+          <a:prstGeom prst="rect">
+            <a:avLst/>
+          </a:prstGeom>
+          <a:noFill/>
+        </p:spPr>
+        <p:txBody>
+          <a:bodyPr wrap="square" anchor="ctr" lIns="0" rIns="0" tIns="0" bIns="0">
+            <a:spAutoFit/>
+          </a:bodyPr>
+          <a:lstStyle/>
+          <a:p>
+            <a:pPr algn="ctr"/>
+            <a:r>
+              <a:rPr sz="1700" b="1">
+                <a:solidFill>
+                  <a:srgbClr val="E9EDF3"/>
+                </a:solidFill>
+                <a:latin typeface="Consolas"/>
+              </a:rPr>
+              <a:t>0.0547</a:t>
+            </a:r>
+          </a:p>
+        </p:txBody>
+      </p:sp>
+      <p:sp>
+        <p:nvSpPr>
+          <p:cNvPr id="23" name="TextBox 22"/>
+          <p:cNvSpPr txBox="1"/>
+          <p:nvPr/>
+        </p:nvSpPr>
+        <p:spPr>
+          <a:xfrm>
+            <a:off x="9829800" y="3950208"/>
+            <a:ext cx="1417320" cy="585216"/>
+          </a:xfrm>
+          <a:prstGeom prst="rect">
+            <a:avLst/>
+          </a:prstGeom>
+          <a:noFill/>
+        </p:spPr>
+        <p:txBody>
+          <a:bodyPr wrap="square" anchor="ctr" lIns="0" rIns="0" tIns="0" bIns="0">
+            <a:spAutoFit/>
+          </a:bodyPr>
+          <a:lstStyle/>
+          <a:p>
+            <a:pPr algn="ctr"/>
+            <a:r>
+              <a:rPr sz="1350" b="1">
+                <a:solidFill>
+                  <a:srgbClr val="3ED2BC"/>
+                </a:solidFill>
+                <a:latin typeface="Consolas"/>
+              </a:rPr>
+              <a:t>-2% ✓</a:t>
+            </a:r>
+          </a:p>
+        </p:txBody>
+      </p:sp>
+      <p:sp>
+        <p:nvSpPr>
+          <p:cNvPr id="24" name="Rounded Rectangle 23"/>
+          <p:cNvSpPr/>
+          <p:nvPr/>
+        </p:nvSpPr>
+        <p:spPr>
+          <a:xfrm>
+            <a:off x="822960" y="4645152"/>
+            <a:ext cx="10515600" cy="585216"/>
+          </a:xfrm>
+          <a:prstGeom prst="roundRect">
+            <a:avLst>
+              <a:gd name="adj" fmla="val 6000"/>
+            </a:avLst>
+          </a:prstGeom>
+          <a:solidFill>
+            <a:srgbClr val="131A23"/>
+          </a:solidFill>
+          <a:ln w="22225">
+            <a:solidFill>
+              <a:srgbClr val="B07D18"/>
+            </a:solidFill>
+          </a:ln>
+          <a:effectLst/>
+        </p:spPr>
+        <p:style>
+          <a:lnRef idx="1">
+            <a:schemeClr val="accent1"/>
+          </a:lnRef>
+          <a:fillRef idx="3">
+            <a:schemeClr val="accent1"/>
+          </a:fillRef>
+          <a:effectRef idx="2">
+            <a:schemeClr val="accent1"/>
+          </a:effectRef>
+          <a:fontRef idx="minor">
+            <a:schemeClr val="lt1"/>
+          </a:fontRef>
+        </p:style>
+        <p:txBody>
+          <a:bodyPr rtlCol="0" anchor="ctr"/>
+          <a:lstStyle/>
+          <a:p>
+            <a:pPr algn="ctr"/>
+          </a:p>
+        </p:txBody>
+      </p:sp>
+      <p:sp>
+        <p:nvSpPr>
+          <p:cNvPr id="25" name="TextBox 24"/>
+          <p:cNvSpPr txBox="1"/>
+          <p:nvPr/>
+        </p:nvSpPr>
+        <p:spPr>
+          <a:xfrm>
+            <a:off x="1097280" y="4645152"/>
+            <a:ext cx="4206240" cy="585216"/>
+          </a:xfrm>
+          <a:prstGeom prst="rect">
+            <a:avLst/>
+          </a:prstGeom>
+          <a:noFill/>
+        </p:spPr>
+        <p:txBody>
+          <a:bodyPr wrap="square" anchor="ctr" lIns="0" rIns="0" tIns="0" bIns="0">
+            <a:spAutoFit/>
+          </a:bodyPr>
+          <a:lstStyle/>
+          <a:p>
+            <a:pPr algn="l"/>
+            <a:r>
+              <a:rPr sz="1550" b="1">
+                <a:solidFill>
+                  <a:srgbClr val="E9EDF3"/>
+                </a:solidFill>
+                <a:latin typeface="Segoe UI"/>
+              </a:rPr>
+              <a:t>Flicker (pred vs scene)</a:t>
+            </a:r>
+            <a:r>
+              <a:rPr sz="1150" b="0">
+                <a:solidFill>
+                  <a:srgbClr val="F5B63F"/>
+                </a:solidFill>
+                <a:latin typeface="Segoe UI"/>
+              </a:rPr>
+              <a:t>   · temporal</a:t>
+            </a:r>
+          </a:p>
+        </p:txBody>
+      </p:sp>
+      <p:sp>
+        <p:nvSpPr>
+          <p:cNvPr id="26" name="TextBox 25"/>
+          <p:cNvSpPr txBox="1"/>
+          <p:nvPr/>
+        </p:nvSpPr>
+        <p:spPr>
+          <a:xfrm>
+            <a:off x="5577840" y="4645152"/>
+            <a:ext cx="1920240" cy="585216"/>
+          </a:xfrm>
+          <a:prstGeom prst="rect">
+            <a:avLst/>
+          </a:prstGeom>
+          <a:noFill/>
+        </p:spPr>
+        <p:txBody>
+          <a:bodyPr wrap="square" anchor="ctr" lIns="0" rIns="0" tIns="0" bIns="0">
+            <a:spAutoFit/>
+          </a:bodyPr>
+          <a:lstStyle/>
+          <a:p>
+            <a:pPr algn="ctr"/>
+            <a:r>
+              <a:rPr sz="1700" b="0">
+                <a:solidFill>
+                  <a:srgbClr val="93A3B5"/>
+                </a:solidFill>
+                <a:latin typeface="Consolas"/>
+              </a:rPr>
+              <a:t>0.94</a:t>
+            </a:r>
+          </a:p>
+        </p:txBody>
+      </p:sp>
+      <p:sp>
+        <p:nvSpPr>
+          <p:cNvPr id="27" name="TextBox 26"/>
+          <p:cNvSpPr txBox="1"/>
+          <p:nvPr/>
+        </p:nvSpPr>
+        <p:spPr>
+          <a:xfrm>
+            <a:off x="7360920" y="4645152"/>
+            <a:ext cx="640080" cy="585216"/>
+          </a:xfrm>
+          <a:prstGeom prst="rect">
+            <a:avLst/>
+          </a:prstGeom>
+          <a:noFill/>
+        </p:spPr>
+        <p:txBody>
+          <a:bodyPr wrap="square" anchor="ctr" lIns="0" rIns="0" tIns="0" bIns="0">
+            <a:spAutoFit/>
+          </a:bodyPr>
+          <a:lstStyle/>
+          <a:p>
+            <a:pPr algn="ctr"/>
+            <a:r>
+              <a:rPr sz="1500" b="0">
+                <a:solidFill>
+                  <a:srgbClr val="5C6B7E"/>
+                </a:solidFill>
+                <a:latin typeface="Segoe UI"/>
+              </a:rPr>
+              <a:t>→</a:t>
+            </a:r>
+          </a:p>
+        </p:txBody>
+      </p:sp>
+      <p:sp>
+        <p:nvSpPr>
+          <p:cNvPr id="28" name="TextBox 27"/>
+          <p:cNvSpPr txBox="1"/>
+          <p:nvPr/>
+        </p:nvSpPr>
+        <p:spPr>
+          <a:xfrm>
+            <a:off x="7863840" y="4645152"/>
+            <a:ext cx="1920240" cy="585216"/>
+          </a:xfrm>
+          <a:prstGeom prst="rect">
+            <a:avLst/>
+          </a:prstGeom>
+          <a:noFill/>
+        </p:spPr>
+        <p:txBody>
+          <a:bodyPr wrap="square" anchor="ctr" lIns="0" rIns="0" tIns="0" bIns="0">
+            <a:spAutoFit/>
+          </a:bodyPr>
+          <a:lstStyle/>
+          <a:p>
+            <a:pPr algn="ctr"/>
+            <a:r>
+              <a:rPr sz="1700" b="1">
+                <a:solidFill>
+                  <a:srgbClr val="E9EDF3"/>
+                </a:solidFill>
+                <a:latin typeface="Consolas"/>
+              </a:rPr>
+              <a:t>0.92</a:t>
+            </a:r>
+          </a:p>
+        </p:txBody>
+      </p:sp>
+      <p:sp>
+        <p:nvSpPr>
+          <p:cNvPr id="29" name="TextBox 28"/>
+          <p:cNvSpPr txBox="1"/>
+          <p:nvPr/>
+        </p:nvSpPr>
+        <p:spPr>
+          <a:xfrm>
+            <a:off x="9829800" y="4645152"/>
+            <a:ext cx="1417320" cy="585216"/>
+          </a:xfrm>
+          <a:prstGeom prst="rect">
+            <a:avLst/>
+          </a:prstGeom>
+          <a:noFill/>
+        </p:spPr>
+        <p:txBody>
+          <a:bodyPr wrap="square" anchor="ctr" lIns="0" rIns="0" tIns="0" bIns="0">
+            <a:spAutoFit/>
+          </a:bodyPr>
+          <a:lstStyle/>
+          <a:p>
+            <a:pPr algn="ctr"/>
+            <a:r>
+              <a:rPr sz="1350" b="1">
+                <a:solidFill>
+                  <a:srgbClr val="3ED2BC"/>
+                </a:solidFill>
+                <a:latin typeface="Consolas"/>
+              </a:rPr>
+              <a:t>-3% ✓</a:t>
+            </a:r>
+          </a:p>
+        </p:txBody>
+      </p:sp>
+      <p:sp>
+        <p:nvSpPr>
+          <p:cNvPr id="30" name="Rounded Rectangle 29"/>
+          <p:cNvSpPr/>
+          <p:nvPr/>
+        </p:nvSpPr>
+        <p:spPr>
+          <a:xfrm>
+            <a:off x="822960" y="5340096"/>
+            <a:ext cx="10515600" cy="585216"/>
+          </a:xfrm>
+          <a:prstGeom prst="roundRect">
+            <a:avLst>
+              <a:gd name="adj" fmla="val 6000"/>
+            </a:avLst>
+          </a:prstGeom>
+          <a:solidFill>
+            <a:srgbClr val="131A23"/>
+          </a:solidFill>
+          <a:ln w="12700">
+            <a:solidFill>
+              <a:srgbClr val="2A3542"/>
+            </a:solidFill>
+          </a:ln>
+          <a:effectLst/>
+        </p:spPr>
+        <p:style>
+          <a:lnRef idx="1">
+            <a:schemeClr val="accent1"/>
+          </a:lnRef>
+          <a:fillRef idx="3">
+            <a:schemeClr val="accent1"/>
+          </a:fillRef>
+          <a:effectRef idx="2">
+            <a:schemeClr val="accent1"/>
+          </a:effectRef>
+          <a:fontRef idx="minor">
+            <a:schemeClr val="lt1"/>
+          </a:fontRef>
+        </p:style>
+        <p:txBody>
+          <a:bodyPr rtlCol="0" anchor="ctr"/>
+          <a:lstStyle/>
+          <a:p>
+            <a:pPr algn="ctr"/>
+          </a:p>
+        </p:txBody>
+      </p:sp>
+      <p:sp>
+        <p:nvSpPr>
+          <p:cNvPr id="31" name="TextBox 30"/>
+          <p:cNvSpPr txBox="1"/>
+          <p:nvPr/>
+        </p:nvSpPr>
+        <p:spPr>
+          <a:xfrm>
+            <a:off x="1097280" y="5340096"/>
+            <a:ext cx="4206240" cy="585216"/>
+          </a:xfrm>
+          <a:prstGeom prst="rect">
+            <a:avLst/>
+          </a:prstGeom>
+          <a:noFill/>
+        </p:spPr>
+        <p:txBody>
+          <a:bodyPr wrap="square" anchor="ctr" lIns="0" rIns="0" tIns="0" bIns="0">
+            <a:spAutoFit/>
+          </a:bodyPr>
+          <a:lstStyle/>
+          <a:p>
+            <a:pPr algn="l"/>
+            <a:r>
+              <a:rPr sz="1550" b="1">
+                <a:solidFill>
+                  <a:srgbClr val="E9EDF3"/>
+                </a:solidFill>
+                <a:latin typeface="Segoe UI"/>
+              </a:rPr>
+              <a:t>Overlap-region error</a:t>
+            </a:r>
+            <a:r>
+              <a:rPr sz="1150" b="0">
+                <a:solidFill>
+                  <a:srgbClr val="F5B63F"/>
+                </a:solidFill>
+                <a:latin typeface="Segoe UI"/>
+              </a:rPr>
+              <a:t/>
+            </a:r>
+          </a:p>
+        </p:txBody>
+      </p:sp>
+      <p:sp>
+        <p:nvSpPr>
+          <p:cNvPr id="32" name="TextBox 31"/>
+          <p:cNvSpPr txBox="1"/>
+          <p:nvPr/>
+        </p:nvSpPr>
+        <p:spPr>
+          <a:xfrm>
+            <a:off x="5577840" y="5340096"/>
+            <a:ext cx="1920240" cy="585216"/>
+          </a:xfrm>
+          <a:prstGeom prst="rect">
+            <a:avLst/>
+          </a:prstGeom>
+          <a:noFill/>
+        </p:spPr>
+        <p:txBody>
+          <a:bodyPr wrap="square" anchor="ctr" lIns="0" rIns="0" tIns="0" bIns="0">
+            <a:spAutoFit/>
+          </a:bodyPr>
+          <a:lstStyle/>
+          <a:p>
+            <a:pPr algn="ctr"/>
+            <a:r>
+              <a:rPr sz="1700" b="0">
+                <a:solidFill>
+                  <a:srgbClr val="93A3B5"/>
+                </a:solidFill>
+                <a:latin typeface="Consolas"/>
+              </a:rPr>
+              <a:t>0.056</a:t>
+            </a:r>
+          </a:p>
+        </p:txBody>
+      </p:sp>
+      <p:sp>
+        <p:nvSpPr>
+          <p:cNvPr id="33" name="TextBox 32"/>
+          <p:cNvSpPr txBox="1"/>
+          <p:nvPr/>
+        </p:nvSpPr>
+        <p:spPr>
+          <a:xfrm>
+            <a:off x="7360920" y="5340096"/>
+            <a:ext cx="640080" cy="585216"/>
+          </a:xfrm>
+          <a:prstGeom prst="rect">
+            <a:avLst/>
+          </a:prstGeom>
+          <a:noFill/>
+        </p:spPr>
+        <p:txBody>
+          <a:bodyPr wrap="square" anchor="ctr" lIns="0" rIns="0" tIns="0" bIns="0">
+            <a:spAutoFit/>
+          </a:bodyPr>
+          <a:lstStyle/>
+          <a:p>
+            <a:pPr algn="ctr"/>
+            <a:r>
+              <a:rPr sz="1500" b="0">
+                <a:solidFill>
+                  <a:srgbClr val="5C6B7E"/>
+                </a:solidFill>
+                <a:latin typeface="Segoe UI"/>
+              </a:rPr>
+              <a:t>→</a:t>
+            </a:r>
+          </a:p>
+        </p:txBody>
+      </p:sp>
+      <p:sp>
+        <p:nvSpPr>
+          <p:cNvPr id="34" name="TextBox 33"/>
+          <p:cNvSpPr txBox="1"/>
+          <p:nvPr/>
+        </p:nvSpPr>
+        <p:spPr>
+          <a:xfrm>
+            <a:off x="7863840" y="5340096"/>
+            <a:ext cx="1920240" cy="585216"/>
+          </a:xfrm>
+          <a:prstGeom prst="rect">
+            <a:avLst/>
+          </a:prstGeom>
+          <a:noFill/>
+        </p:spPr>
+        <p:txBody>
+          <a:bodyPr wrap="square" anchor="ctr" lIns="0" rIns="0" tIns="0" bIns="0">
+            <a:spAutoFit/>
+          </a:bodyPr>
+          <a:lstStyle/>
+          <a:p>
+            <a:pPr algn="ctr"/>
+            <a:r>
+              <a:rPr sz="1700" b="1">
+                <a:solidFill>
+                  <a:srgbClr val="E9EDF3"/>
+                </a:solidFill>
+                <a:latin typeface="Consolas"/>
+              </a:rPr>
+              <a:t>0.055</a:t>
+            </a:r>
+          </a:p>
+        </p:txBody>
+      </p:sp>
+      <p:sp>
+        <p:nvSpPr>
+          <p:cNvPr id="35" name="TextBox 34"/>
+          <p:cNvSpPr txBox="1"/>
+          <p:nvPr/>
+        </p:nvSpPr>
+        <p:spPr>
+          <a:xfrm>
+            <a:off x="9829800" y="5340096"/>
+            <a:ext cx="1417320" cy="585216"/>
+          </a:xfrm>
+          <a:prstGeom prst="rect">
+            <a:avLst/>
+          </a:prstGeom>
+          <a:noFill/>
+        </p:spPr>
+        <p:txBody>
+          <a:bodyPr wrap="square" anchor="ctr" lIns="0" rIns="0" tIns="0" bIns="0">
+            <a:spAutoFit/>
+          </a:bodyPr>
+          <a:lstStyle/>
+          <a:p>
+            <a:pPr algn="ctr"/>
+            <a:r>
+              <a:rPr sz="1350" b="1">
+                <a:solidFill>
+                  <a:srgbClr val="3ED2BC"/>
+                </a:solidFill>
+                <a:latin typeface="Consolas"/>
+              </a:rPr>
+              <a:t>-1.4% ✓</a:t>
+            </a:r>
+          </a:p>
+        </p:txBody>
+      </p:sp>
+      <p:sp>
+        <p:nvSpPr>
+          <p:cNvPr id="36" name="TextBox 35"/>
+          <p:cNvSpPr txBox="1"/>
+          <p:nvPr/>
+        </p:nvSpPr>
+        <p:spPr>
+          <a:xfrm>
+            <a:off x="822960" y="6291072"/>
+            <a:ext cx="10545775" cy="365760"/>
           </a:xfrm>
           <a:prstGeom prst="rect">
             <a:avLst/>
@@ -5749,77 +6345,7 @@
           </a:bodyPr>
           <a:lstStyle/>
           <a:p>
-            <a:pPr algn="ctr"/>
-            <a:r>
-              <a:rPr sz="1300" b="1">
-                <a:solidFill>
-                  <a:srgbClr val="F5B63F"/>
-                </a:solidFill>
-                <a:latin typeface="Consolas"/>
-              </a:rPr>
-              <a:t>OVERLAP REGIONS</a:t>
-            </a:r>
-          </a:p>
-        </p:txBody>
-      </p:sp>
-      <p:sp>
-        <p:nvSpPr>
-          <p:cNvPr id="22" name="TextBox 21"/>
-          <p:cNvSpPr txBox="1"/>
-          <p:nvPr/>
-        </p:nvSpPr>
-        <p:spPr>
-          <a:xfrm>
-            <a:off x="8193024" y="3017520"/>
-            <a:ext cx="3429000" cy="457200"/>
-          </a:xfrm>
-          <a:prstGeom prst="rect">
-            <a:avLst/>
-          </a:prstGeom>
-          <a:noFill/>
-        </p:spPr>
-        <p:txBody>
-          <a:bodyPr wrap="square" anchor="t" lIns="0" rIns="0" tIns="0" bIns="0">
-            <a:spAutoFit/>
-          </a:bodyPr>
-          <a:lstStyle/>
-          <a:p>
-            <a:pPr algn="ctr"/>
-            <a:r>
-              <a:rPr sz="2600" b="1">
-                <a:solidFill>
-                  <a:srgbClr val="E9EDF3"/>
-                </a:solidFill>
-                <a:latin typeface="Consolas"/>
-              </a:rPr>
-              <a:t>0.055</a:t>
-            </a:r>
-          </a:p>
-        </p:txBody>
-      </p:sp>
-      <p:sp>
-        <p:nvSpPr>
-          <p:cNvPr id="23" name="TextBox 22"/>
-          <p:cNvSpPr txBox="1"/>
-          <p:nvPr/>
-        </p:nvSpPr>
-        <p:spPr>
-          <a:xfrm>
-            <a:off x="8193024" y="3474720"/>
-            <a:ext cx="3429000" cy="320040"/>
-          </a:xfrm>
-          <a:prstGeom prst="rect">
-            <a:avLst/>
-          </a:prstGeom>
-          <a:noFill/>
-        </p:spPr>
-        <p:txBody>
-          <a:bodyPr wrap="square" anchor="t" lIns="0" rIns="0" tIns="0" bIns="0">
-            <a:spAutoFit/>
-          </a:bodyPr>
-          <a:lstStyle/>
-          <a:p>
-            <a:pPr algn="ctr"/>
+            <a:pPr algn="l"/>
             <a:r>
               <a:rPr sz="1250" b="0">
                 <a:solidFill>
@@ -5827,182 +6353,7 @@
                 </a:solidFill>
                 <a:latin typeface="Segoe UI"/>
               </a:rPr>
-              <a:t>depth error (rel)</a:t>
-            </a:r>
-          </a:p>
-        </p:txBody>
-      </p:sp>
-      <p:sp>
-        <p:nvSpPr>
-          <p:cNvPr id="24" name="TextBox 23"/>
-          <p:cNvSpPr txBox="1"/>
-          <p:nvPr/>
-        </p:nvSpPr>
-        <p:spPr>
-          <a:xfrm>
-            <a:off x="8193024" y="3931920"/>
-            <a:ext cx="3429000" cy="457200"/>
-          </a:xfrm>
-          <a:prstGeom prst="rect">
-            <a:avLst/>
-          </a:prstGeom>
-          <a:noFill/>
-        </p:spPr>
-        <p:txBody>
-          <a:bodyPr wrap="square" anchor="t" lIns="0" rIns="0" tIns="0" bIns="0">
-            <a:spAutoFit/>
-          </a:bodyPr>
-          <a:lstStyle/>
-          <a:p>
-            <a:pPr algn="ctr"/>
-            <a:r>
-              <a:rPr sz="2600" b="1">
-                <a:solidFill>
-                  <a:srgbClr val="E9EDF3"/>
-                </a:solidFill>
-                <a:latin typeface="Consolas"/>
-              </a:rPr>
-              <a:t>98.6%</a:t>
-            </a:r>
-          </a:p>
-        </p:txBody>
-      </p:sp>
-      <p:sp>
-        <p:nvSpPr>
-          <p:cNvPr id="25" name="TextBox 24"/>
-          <p:cNvSpPr txBox="1"/>
-          <p:nvPr/>
-        </p:nvSpPr>
-        <p:spPr>
-          <a:xfrm>
-            <a:off x="8193024" y="4389120"/>
-            <a:ext cx="3429000" cy="320040"/>
-          </a:xfrm>
-          <a:prstGeom prst="rect">
-            <a:avLst/>
-          </a:prstGeom>
-          <a:noFill/>
-        </p:spPr>
-        <p:txBody>
-          <a:bodyPr wrap="square" anchor="t" lIns="0" rIns="0" tIns="0" bIns="0">
-            <a:spAutoFit/>
-          </a:bodyPr>
-          <a:lstStyle/>
-          <a:p>
-            <a:pPr algn="ctr"/>
-            <a:r>
-              <a:rPr sz="1250" b="0">
-                <a:solidFill>
-                  <a:srgbClr val="93A3B5"/>
-                </a:solidFill>
-                <a:latin typeface="Segoe UI"/>
-              </a:rPr>
-              <a:t>accuracy</a:t>
-            </a:r>
-          </a:p>
-        </p:txBody>
-      </p:sp>
-      <p:sp>
-        <p:nvSpPr>
-          <p:cNvPr id="26" name="TextBox 25"/>
-          <p:cNvSpPr txBox="1"/>
-          <p:nvPr/>
-        </p:nvSpPr>
-        <p:spPr>
-          <a:xfrm>
-            <a:off x="8193024" y="4846320"/>
-            <a:ext cx="3429000" cy="457200"/>
-          </a:xfrm>
-          <a:prstGeom prst="rect">
-            <a:avLst/>
-          </a:prstGeom>
-          <a:noFill/>
-        </p:spPr>
-        <p:txBody>
-          <a:bodyPr wrap="square" anchor="t" lIns="0" rIns="0" tIns="0" bIns="0">
-            <a:spAutoFit/>
-          </a:bodyPr>
-          <a:lstStyle/>
-          <a:p>
-            <a:pPr algn="ctr"/>
-            <a:r>
-              <a:rPr sz="2600" b="1">
-                <a:solidFill>
-                  <a:srgbClr val="E9EDF3"/>
-                </a:solidFill>
-                <a:latin typeface="Consolas"/>
-              </a:rPr>
-              <a:t>±15%</a:t>
-            </a:r>
-          </a:p>
-        </p:txBody>
-      </p:sp>
-      <p:sp>
-        <p:nvSpPr>
-          <p:cNvPr id="27" name="TextBox 26"/>
-          <p:cNvSpPr txBox="1"/>
-          <p:nvPr/>
-        </p:nvSpPr>
-        <p:spPr>
-          <a:xfrm>
-            <a:off x="8193024" y="5303520"/>
-            <a:ext cx="3429000" cy="320040"/>
-          </a:xfrm>
-          <a:prstGeom prst="rect">
-            <a:avLst/>
-          </a:prstGeom>
-          <a:noFill/>
-        </p:spPr>
-        <p:txBody>
-          <a:bodyPr wrap="square" anchor="t" lIns="0" rIns="0" tIns="0" bIns="0">
-            <a:spAutoFit/>
-          </a:bodyPr>
-          <a:lstStyle/>
-          <a:p>
-            <a:pPr algn="ctr"/>
-            <a:r>
-              <a:rPr sz="1250" b="0">
-                <a:solidFill>
-                  <a:srgbClr val="93A3B5"/>
-                </a:solidFill>
-                <a:latin typeface="Segoe UI"/>
-              </a:rPr>
-              <a:t>corrections, capped</a:t>
-            </a:r>
-          </a:p>
-        </p:txBody>
-      </p:sp>
-      <p:sp>
-        <p:nvSpPr>
-          <p:cNvPr id="28" name="TextBox 27"/>
-          <p:cNvSpPr txBox="1"/>
-          <p:nvPr/>
-        </p:nvSpPr>
-        <p:spPr>
-          <a:xfrm>
-            <a:off x="822960" y="6291072"/>
-            <a:ext cx="10545775" cy="365760"/>
-          </a:xfrm>
-          <a:prstGeom prst="rect">
-            <a:avLst/>
-          </a:prstGeom>
-          <a:noFill/>
-        </p:spPr>
-        <p:txBody>
-          <a:bodyPr wrap="square" anchor="t" lIns="0" rIns="0" tIns="0" bIns="0">
-            <a:spAutoFit/>
-          </a:bodyPr>
-          <a:lstStyle/>
-          <a:p>
-            <a:pPr algn="l"/>
-            <a:r>
-              <a:rPr sz="1250" b="0">
-                <a:solidFill>
-                  <a:srgbClr val="93A3B5"/>
-                </a:solidFill>
-                <a:latin typeface="Segoe UI"/>
-              </a:rPr>
-              <a:t>Full held-out test set · 10,400 frames · 3,083 with real person-on-person overlap.</a:t>
+              <a:t>Same held-out test set for every row · 10,400 frames · 3,083 with real person-on-person overlap.</a:t>
             </a:r>
           </a:p>
         </p:txBody>
@@ -6299,7 +6650,7 @@
                 </a:solidFill>
                 <a:latin typeface="Segoe UI"/>
               </a:rPr>
-              <a:t>Video-native depth</a:t>
+              <a:t>Depth with a memory</a:t>
             </a:r>
           </a:p>
         </p:txBody>
@@ -6334,7 +6685,7 @@
                 </a:solidFill>
                 <a:latin typeface="Segoe UI"/>
               </a:rPr>
-              <a:t>temporal memory + a flicker-aware loss -- the paper is single-frame</a:t>
+              <a:t>recurrent temporal state + a loss that rewards steadiness, not stillness -- video-native, not frame-by-frame</a:t>
             </a:r>
           </a:p>
         </p:txBody>
@@ -6417,7 +6768,7 @@
                 </a:solidFill>
                 <a:latin typeface="Segoe UI"/>
               </a:rPr>
-              <a:t>Identities that persist</a:t>
+              <a:t>Video-Mask2Former, without the cost</a:t>
             </a:r>
           </a:p>
         </p:txBody>
@@ -6452,7 +6803,7 @@
                 </a:solidFill>
                 <a:latin typeface="Segoe UI"/>
               </a:rPr>
-              <a:t>one person, one identity, held through occlusions -- not re-found each frame</a:t>
+              <a:t>its query-identity idea, realised with zero video training -- the queries themselves carry each person across frames</a:t>
             </a:r>
           </a:p>
         </p:txBody>
@@ -6535,7 +6886,7 @@
                 </a:solidFill>
                 <a:latin typeface="Segoe UI"/>
               </a:rPr>
-              <a:t>Refinement, safe by construction</a:t>
+              <a:t>Occlusion-aware pair reasoning</a:t>
             </a:r>
           </a:p>
         </p:txBody>
@@ -6570,7 +6921,7 @@
                 </a:solidFill>
                 <a:latin typeface="Segoe UI"/>
               </a:rPr>
-              <a:t>frozen scene + capped corrections: it can help, it cannot harm</a:t>
+              <a:t>who is in front, and by how much, for every overlapping pair -- 98.6% accuracy where bodies cross</a:t>
             </a:r>
           </a:p>
         </p:txBody>
@@ -6974,7 +7325,7 @@
                 </a:solidFill>
                 <a:latin typeface="Segoe UI"/>
               </a:rPr>
-              <a:t>Stronger prior</a:t>
+              <a:t>Longer memory</a:t>
             </a:r>
           </a:p>
         </p:txBody>
@@ -7009,7 +7360,7 @@
                 </a:solidFill>
                 <a:latin typeface="Segoe UI"/>
               </a:rPr>
-              <a:t>full pretrained depth model -- already running</a:t>
+              <a:t>clip-level training -- consistency that reaches further back</a:t>
             </a:r>
           </a:p>
         </p:txBody>
@@ -7136,7 +7487,7 @@
                 </a:solidFill>
                 <a:latin typeface="Segoe UI"/>
               </a:rPr>
-              <a:t>Beyond our lab</a:t>
+              <a:t>Any camera, anywhere</a:t>
             </a:r>
           </a:p>
         </p:txBody>
@@ -7171,7 +7522,7 @@
                 </a:solidFill>
                 <a:latin typeface="Segoe UI"/>
               </a:rPr>
-              <a:t>robust on footage from anywhere</a:t>
+              <a:t>the same steadiness on foreign footage</a:t>
             </a:r>
           </a:p>
         </p:txBody>
@@ -7298,7 +7649,7 @@
                 </a:solidFill>
                 <a:latin typeface="Segoe UI"/>
               </a:rPr>
-              <a:t>The write-up</a:t>
+              <a:t>Release the benchmark</a:t>
             </a:r>
           </a:p>
         </p:txBody>
@@ -7333,7 +7684,7 @@
                 </a:solidFill>
                 <a:latin typeface="Segoe UI"/>
               </a:rPr>
-              <a:t>dataset + method + results</a:t>
+              <a:t>our dataset, public -- plus the write-up</a:t>
             </a:r>
           </a:p>
         </p:txBody>
@@ -7948,7 +8299,7 @@
                 </a:solidFill>
                 <a:latin typeface="Segoe UI"/>
               </a:rPr>
-              <a:t>flicker down · identities locked</a:t>
+              <a:t>temporal error and flicker both down</a:t>
             </a:r>
           </a:p>
         </p:txBody>
@@ -9528,7 +9879,7 @@
         <p:spPr>
           <a:xfrm>
             <a:off x="822960" y="1051560"/>
-            <a:ext cx="10058400" cy="1097280"/>
+            <a:ext cx="10515600" cy="1097280"/>
           </a:xfrm>
           <a:prstGeom prst="rect">
             <a:avLst/>
@@ -9549,7 +9900,7 @@
                 </a:solidFill>
                 <a:latin typeface="Segoe UI"/>
               </a:rPr>
-              <a:t>Cameras flatten crowds.</a:t>
+              <a:t>Depth models live one frame at a time.</a:t>
             </a:r>
           </a:p>
         </p:txBody>
@@ -9611,7 +9962,7 @@
         <p:spPr>
           <a:xfrm>
             <a:off x="1097280" y="2468880"/>
-            <a:ext cx="4572000" cy="365760"/>
+            <a:ext cx="4846320" cy="365760"/>
           </a:xfrm>
           <a:prstGeom prst="rect">
             <a:avLst/>
@@ -9632,7 +9983,7 @@
                 </a:solidFill>
                 <a:latin typeface="Consolas"/>
               </a:rPr>
-              <a:t>WHAT THE MODEL SEES</a:t>
+              <a:t>SAME SCENE · THREE CONSECUTIVE FRAMES</a:t>
             </a:r>
           </a:p>
         </p:txBody>
@@ -9645,8 +9996,8 @@
         </p:nvSpPr>
         <p:spPr>
           <a:xfrm>
-            <a:off x="2194560" y="2926080"/>
-            <a:ext cx="914400" cy="2011680"/>
+            <a:off x="1097280" y="2880360"/>
+            <a:ext cx="1463040" cy="1920240"/>
           </a:xfrm>
           <a:prstGeom prst="roundRect">
             <a:avLst>
@@ -9654,7 +10005,90 @@
             </a:avLst>
           </a:prstGeom>
           <a:solidFill>
-            <a:srgbClr val="41547A"/>
+            <a:srgbClr val="0B0F14"/>
+          </a:solidFill>
+          <a:ln w="12700">
+            <a:solidFill>
+              <a:srgbClr val="2A3542"/>
+            </a:solidFill>
+          </a:ln>
+          <a:effectLst/>
+        </p:spPr>
+        <p:style>
+          <a:lnRef idx="1">
+            <a:schemeClr val="accent1"/>
+          </a:lnRef>
+          <a:fillRef idx="3">
+            <a:schemeClr val="accent1"/>
+          </a:fillRef>
+          <a:effectRef idx="2">
+            <a:schemeClr val="accent1"/>
+          </a:effectRef>
+          <a:fontRef idx="minor">
+            <a:schemeClr val="lt1"/>
+          </a:fontRef>
+        </p:style>
+        <p:txBody>
+          <a:bodyPr rtlCol="0" anchor="ctr"/>
+          <a:lstStyle/>
+          <a:p>
+            <a:pPr algn="ctr"/>
+          </a:p>
+        </p:txBody>
+      </p:sp>
+      <p:sp>
+        <p:nvSpPr>
+          <p:cNvPr id="7" name="TextBox 6"/>
+          <p:cNvSpPr txBox="1"/>
+          <p:nvPr/>
+        </p:nvSpPr>
+        <p:spPr>
+          <a:xfrm>
+            <a:off x="1097280" y="2926080"/>
+            <a:ext cx="1463040" cy="274320"/>
+          </a:xfrm>
+          <a:prstGeom prst="rect">
+            <a:avLst/>
+          </a:prstGeom>
+          <a:noFill/>
+        </p:spPr>
+        <p:txBody>
+          <a:bodyPr wrap="square" anchor="t" lIns="0" rIns="0" tIns="0" bIns="0">
+            <a:spAutoFit/>
+          </a:bodyPr>
+          <a:lstStyle/>
+          <a:p>
+            <a:pPr algn="ctr"/>
+            <a:r>
+              <a:rPr sz="1050" b="0">
+                <a:solidFill>
+                  <a:srgbClr val="5C6B7E"/>
+                </a:solidFill>
+                <a:latin typeface="Consolas"/>
+              </a:rPr>
+              <a:t>t=0</a:t>
+            </a:r>
+          </a:p>
+        </p:txBody>
+      </p:sp>
+      <p:sp>
+        <p:nvSpPr>
+          <p:cNvPr id="8" name="Rounded Rectangle 7"/>
+          <p:cNvSpPr/>
+          <p:nvPr/>
+        </p:nvSpPr>
+        <p:spPr>
+          <a:xfrm>
+            <a:off x="1325880" y="3611880"/>
+            <a:ext cx="457200" cy="1051560"/>
+          </a:xfrm>
+          <a:prstGeom prst="roundRect">
+            <a:avLst>
+              <a:gd name="adj" fmla="val 6000"/>
+            </a:avLst>
+          </a:prstGeom>
+          <a:solidFill>
+            <a:srgbClr val="3E6FD9"/>
           </a:solidFill>
           <a:ln>
             <a:noFill/>
@@ -9685,14 +10119,14 @@
       </p:sp>
       <p:sp>
         <p:nvSpPr>
-          <p:cNvPr id="7" name="Rounded Rectangle 6"/>
+          <p:cNvPr id="9" name="Rounded Rectangle 8"/>
           <p:cNvSpPr/>
           <p:nvPr/>
         </p:nvSpPr>
         <p:spPr>
           <a:xfrm>
-            <a:off x="2834640" y="2651760"/>
-            <a:ext cx="1005840" cy="2286000"/>
+            <a:off x="1874519" y="3429000"/>
+            <a:ext cx="502920" cy="1234440"/>
           </a:xfrm>
           <a:prstGeom prst="roundRect">
             <a:avLst>
@@ -9700,7 +10134,7 @@
             </a:avLst>
           </a:prstGeom>
           <a:solidFill>
-            <a:srgbClr val="41547A"/>
+            <a:srgbClr val="2F8FB0"/>
           </a:solidFill>
           <a:ln>
             <a:noFill/>
@@ -9731,14 +10165,14 @@
       </p:sp>
       <p:sp>
         <p:nvSpPr>
-          <p:cNvPr id="8" name="Rounded Rectangle 7"/>
+          <p:cNvPr id="10" name="Rounded Rectangle 9"/>
           <p:cNvSpPr/>
           <p:nvPr/>
         </p:nvSpPr>
         <p:spPr>
           <a:xfrm>
-            <a:off x="3566160" y="3108960"/>
-            <a:ext cx="868680" cy="1828800"/>
+            <a:off x="2788920" y="2880360"/>
+            <a:ext cx="1463040" cy="1920240"/>
           </a:xfrm>
           <a:prstGeom prst="roundRect">
             <a:avLst>
@@ -9746,7 +10180,90 @@
             </a:avLst>
           </a:prstGeom>
           <a:solidFill>
-            <a:srgbClr val="41547A"/>
+            <a:srgbClr val="0B0F14"/>
+          </a:solidFill>
+          <a:ln w="12700">
+            <a:solidFill>
+              <a:srgbClr val="2A3542"/>
+            </a:solidFill>
+          </a:ln>
+          <a:effectLst/>
+        </p:spPr>
+        <p:style>
+          <a:lnRef idx="1">
+            <a:schemeClr val="accent1"/>
+          </a:lnRef>
+          <a:fillRef idx="3">
+            <a:schemeClr val="accent1"/>
+          </a:fillRef>
+          <a:effectRef idx="2">
+            <a:schemeClr val="accent1"/>
+          </a:effectRef>
+          <a:fontRef idx="minor">
+            <a:schemeClr val="lt1"/>
+          </a:fontRef>
+        </p:style>
+        <p:txBody>
+          <a:bodyPr rtlCol="0" anchor="ctr"/>
+          <a:lstStyle/>
+          <a:p>
+            <a:pPr algn="ctr"/>
+          </a:p>
+        </p:txBody>
+      </p:sp>
+      <p:sp>
+        <p:nvSpPr>
+          <p:cNvPr id="11" name="TextBox 10"/>
+          <p:cNvSpPr txBox="1"/>
+          <p:nvPr/>
+        </p:nvSpPr>
+        <p:spPr>
+          <a:xfrm>
+            <a:off x="2788920" y="2926080"/>
+            <a:ext cx="1463040" cy="274320"/>
+          </a:xfrm>
+          <a:prstGeom prst="rect">
+            <a:avLst/>
+          </a:prstGeom>
+          <a:noFill/>
+        </p:spPr>
+        <p:txBody>
+          <a:bodyPr wrap="square" anchor="t" lIns="0" rIns="0" tIns="0" bIns="0">
+            <a:spAutoFit/>
+          </a:bodyPr>
+          <a:lstStyle/>
+          <a:p>
+            <a:pPr algn="ctr"/>
+            <a:r>
+              <a:rPr sz="1050" b="0">
+                <a:solidFill>
+                  <a:srgbClr val="5C6B7E"/>
+                </a:solidFill>
+                <a:latin typeface="Consolas"/>
+              </a:rPr>
+              <a:t>t=1</a:t>
+            </a:r>
+          </a:p>
+        </p:txBody>
+      </p:sp>
+      <p:sp>
+        <p:nvSpPr>
+          <p:cNvPr id="12" name="Rounded Rectangle 11"/>
+          <p:cNvSpPr/>
+          <p:nvPr/>
+        </p:nvSpPr>
+        <p:spPr>
+          <a:xfrm>
+            <a:off x="3017520" y="3611880"/>
+            <a:ext cx="457200" cy="1051560"/>
+          </a:xfrm>
+          <a:prstGeom prst="roundRect">
+            <a:avLst>
+              <a:gd name="adj" fmla="val 6000"/>
+            </a:avLst>
+          </a:prstGeom>
+          <a:solidFill>
+            <a:srgbClr val="2F8FB0"/>
           </a:solidFill>
           <a:ln>
             <a:noFill/>
@@ -9777,14 +10294,108 @@
       </p:sp>
       <p:sp>
         <p:nvSpPr>
-          <p:cNvPr id="9" name="TextBox 8"/>
+          <p:cNvPr id="13" name="Rounded Rectangle 12"/>
+          <p:cNvSpPr/>
+          <p:nvPr/>
+        </p:nvSpPr>
+        <p:spPr>
+          <a:xfrm>
+            <a:off x="3566160" y="3429000"/>
+            <a:ext cx="502920" cy="1234440"/>
+          </a:xfrm>
+          <a:prstGeom prst="roundRect">
+            <a:avLst>
+              <a:gd name="adj" fmla="val 6000"/>
+            </a:avLst>
+          </a:prstGeom>
+          <a:solidFill>
+            <a:srgbClr val="525FC8"/>
+          </a:solidFill>
+          <a:ln>
+            <a:noFill/>
+          </a:ln>
+          <a:effectLst/>
+        </p:spPr>
+        <p:style>
+          <a:lnRef idx="1">
+            <a:schemeClr val="accent1"/>
+          </a:lnRef>
+          <a:fillRef idx="3">
+            <a:schemeClr val="accent1"/>
+          </a:fillRef>
+          <a:effectRef idx="2">
+            <a:schemeClr val="accent1"/>
+          </a:effectRef>
+          <a:fontRef idx="minor">
+            <a:schemeClr val="lt1"/>
+          </a:fontRef>
+        </p:style>
+        <p:txBody>
+          <a:bodyPr rtlCol="0" anchor="ctr"/>
+          <a:lstStyle/>
+          <a:p>
+            <a:pPr algn="ctr"/>
+          </a:p>
+        </p:txBody>
+      </p:sp>
+      <p:sp>
+        <p:nvSpPr>
+          <p:cNvPr id="14" name="Rounded Rectangle 13"/>
+          <p:cNvSpPr/>
+          <p:nvPr/>
+        </p:nvSpPr>
+        <p:spPr>
+          <a:xfrm>
+            <a:off x="4480560" y="2880360"/>
+            <a:ext cx="1463040" cy="1920240"/>
+          </a:xfrm>
+          <a:prstGeom prst="roundRect">
+            <a:avLst>
+              <a:gd name="adj" fmla="val 6000"/>
+            </a:avLst>
+          </a:prstGeom>
+          <a:solidFill>
+            <a:srgbClr val="0B0F14"/>
+          </a:solidFill>
+          <a:ln w="12700">
+            <a:solidFill>
+              <a:srgbClr val="2A3542"/>
+            </a:solidFill>
+          </a:ln>
+          <a:effectLst/>
+        </p:spPr>
+        <p:style>
+          <a:lnRef idx="1">
+            <a:schemeClr val="accent1"/>
+          </a:lnRef>
+          <a:fillRef idx="3">
+            <a:schemeClr val="accent1"/>
+          </a:fillRef>
+          <a:effectRef idx="2">
+            <a:schemeClr val="accent1"/>
+          </a:effectRef>
+          <a:fontRef idx="minor">
+            <a:schemeClr val="lt1"/>
+          </a:fontRef>
+        </p:style>
+        <p:txBody>
+          <a:bodyPr rtlCol="0" anchor="ctr"/>
+          <a:lstStyle/>
+          <a:p>
+            <a:pPr algn="ctr"/>
+          </a:p>
+        </p:txBody>
+      </p:sp>
+      <p:sp>
+        <p:nvSpPr>
+          <p:cNvPr id="15" name="TextBox 14"/>
           <p:cNvSpPr txBox="1"/>
           <p:nvPr/>
         </p:nvSpPr>
         <p:spPr>
           <a:xfrm>
-            <a:off x="1097280" y="5212080"/>
-            <a:ext cx="4846320" cy="457200"/>
+            <a:off x="4480560" y="2926080"/>
+            <a:ext cx="1463040" cy="274320"/>
           </a:xfrm>
           <a:prstGeom prst="rect">
             <a:avLst/>
@@ -9799,20 +10410,148 @@
           <a:p>
             <a:pPr algn="ctr"/>
             <a:r>
-              <a:rPr sz="1500" b="0">
+              <a:rPr sz="1050" b="0">
+                <a:solidFill>
+                  <a:srgbClr val="5C6B7E"/>
+                </a:solidFill>
+                <a:latin typeface="Consolas"/>
+              </a:rPr>
+              <a:t>t=2</a:t>
+            </a:r>
+          </a:p>
+        </p:txBody>
+      </p:sp>
+      <p:sp>
+        <p:nvSpPr>
+          <p:cNvPr id="16" name="Rounded Rectangle 15"/>
+          <p:cNvSpPr/>
+          <p:nvPr/>
+        </p:nvSpPr>
+        <p:spPr>
+          <a:xfrm>
+            <a:off x="4709160" y="3611880"/>
+            <a:ext cx="457200" cy="1051560"/>
+          </a:xfrm>
+          <a:prstGeom prst="roundRect">
+            <a:avLst>
+              <a:gd name="adj" fmla="val 6000"/>
+            </a:avLst>
+          </a:prstGeom>
+          <a:solidFill>
+            <a:srgbClr val="525FC8"/>
+          </a:solidFill>
+          <a:ln>
+            <a:noFill/>
+          </a:ln>
+          <a:effectLst/>
+        </p:spPr>
+        <p:style>
+          <a:lnRef idx="1">
+            <a:schemeClr val="accent1"/>
+          </a:lnRef>
+          <a:fillRef idx="3">
+            <a:schemeClr val="accent1"/>
+          </a:fillRef>
+          <a:effectRef idx="2">
+            <a:schemeClr val="accent1"/>
+          </a:effectRef>
+          <a:fontRef idx="minor">
+            <a:schemeClr val="lt1"/>
+          </a:fontRef>
+        </p:style>
+        <p:txBody>
+          <a:bodyPr rtlCol="0" anchor="ctr"/>
+          <a:lstStyle/>
+          <a:p>
+            <a:pPr algn="ctr"/>
+          </a:p>
+        </p:txBody>
+      </p:sp>
+      <p:sp>
+        <p:nvSpPr>
+          <p:cNvPr id="17" name="Rounded Rectangle 16"/>
+          <p:cNvSpPr/>
+          <p:nvPr/>
+        </p:nvSpPr>
+        <p:spPr>
+          <a:xfrm>
+            <a:off x="5257800" y="3429000"/>
+            <a:ext cx="502920" cy="1234440"/>
+          </a:xfrm>
+          <a:prstGeom prst="roundRect">
+            <a:avLst>
+              <a:gd name="adj" fmla="val 6000"/>
+            </a:avLst>
+          </a:prstGeom>
+          <a:solidFill>
+            <a:srgbClr val="3E6FD9"/>
+          </a:solidFill>
+          <a:ln>
+            <a:noFill/>
+          </a:ln>
+          <a:effectLst/>
+        </p:spPr>
+        <p:style>
+          <a:lnRef idx="1">
+            <a:schemeClr val="accent1"/>
+          </a:lnRef>
+          <a:fillRef idx="3">
+            <a:schemeClr val="accent1"/>
+          </a:fillRef>
+          <a:effectRef idx="2">
+            <a:schemeClr val="accent1"/>
+          </a:effectRef>
+          <a:fontRef idx="minor">
+            <a:schemeClr val="lt1"/>
+          </a:fontRef>
+        </p:style>
+        <p:txBody>
+          <a:bodyPr rtlCol="0" anchor="ctr"/>
+          <a:lstStyle/>
+          <a:p>
+            <a:pPr algn="ctr"/>
+          </a:p>
+        </p:txBody>
+      </p:sp>
+      <p:sp>
+        <p:nvSpPr>
+          <p:cNvPr id="18" name="TextBox 17"/>
+          <p:cNvSpPr txBox="1"/>
+          <p:nvPr/>
+        </p:nvSpPr>
+        <p:spPr>
+          <a:xfrm>
+            <a:off x="1097280" y="5120640"/>
+            <a:ext cx="4846320" cy="548640"/>
+          </a:xfrm>
+          <a:prstGeom prst="rect">
+            <a:avLst/>
+          </a:prstGeom>
+          <a:noFill/>
+        </p:spPr>
+        <p:txBody>
+          <a:bodyPr wrap="square" anchor="t" lIns="0" rIns="0" tIns="0" bIns="0">
+            <a:spAutoFit/>
+          </a:bodyPr>
+          <a:lstStyle/>
+          <a:p>
+            <a:pPr algn="ctr"/>
+            <a:r>
+              <a:rPr sz="1400" b="0">
                 <a:solidFill>
                   <a:srgbClr val="93A3B5"/>
                 </a:solidFill>
                 <a:latin typeface="Segoe UI"/>
               </a:rPr>
-              <a:t>three people · one fused mass · one depth</a:t>
-            </a:r>
-          </a:p>
-        </p:txBody>
-      </p:sp>
-      <p:sp>
-        <p:nvSpPr>
-          <p:cNvPr id="10" name="Rounded Rectangle 9"/>
+              <a:t>no memory: every frame answers again -- depth flickers,
+people merge where they overlap</a:t>
+            </a:r>
+          </a:p>
+        </p:txBody>
+      </p:sp>
+      <p:sp>
+        <p:nvSpPr>
+          <p:cNvPr id="19" name="Rounded Rectangle 18"/>
           <p:cNvSpPr/>
           <p:nvPr/>
         </p:nvSpPr>
@@ -9883,7 +10622,7 @@
                 </a:solidFill>
                 <a:latin typeface="Segoe UI"/>
               </a:rPr>
-              <a:t>Foundation-model depth failing on a real group clip -- people merging as they pass</a:t>
+              <a:t>Foundation-model depth on a real group clip -- flickering frame to frame, people merging</a:t>
             </a:r>
           </a:p>
           <a:p>
@@ -9995,7 +10734,7 @@
                 </a:solidFill>
                 <a:latin typeface="Segoe UI"/>
               </a:rPr>
-              <a:t>Occlusion destroys the evidence.</a:t>
+              <a:t>Three things make it hard.</a:t>
             </a:r>
           </a:p>
         </p:txBody>
@@ -10124,7 +10863,7 @@
                 </a:solidFill>
                 <a:latin typeface="Segoe UI"/>
               </a:rPr>
-              <a:t>Hidden parts have no pixels.</a:t>
+              <a:t>People overlap.</a:t>
             </a:r>
           </a:p>
         </p:txBody>
@@ -10159,7 +10898,7 @@
                 </a:solidFill>
                 <a:latin typeface="Segoe UI"/>
               </a:rPr>
-              <a:t>the person behind simply isn't imaged</a:t>
+              <a:t>crowds fuse into one mass; hidden parts have no pixels</a:t>
             </a:r>
           </a:p>
         </p:txBody>
@@ -10229,7 +10968,7 @@
             </a:avLst>
           </a:prstGeom>
           <a:solidFill>
-            <a:srgbClr val="3E6FD9"/>
+            <a:srgbClr val="B07D18"/>
           </a:solidFill>
           <a:ln>
             <a:noFill/>
@@ -10288,7 +11027,7 @@
                 </a:solidFill>
                 <a:latin typeface="Segoe UI"/>
               </a:rPr>
-              <a:t>The wrong depth gets borrowed.</a:t>
+              <a:t>Frames disagree.</a:t>
             </a:r>
           </a:p>
         </p:txBody>
@@ -10323,7 +11062,7 @@
                 </a:solidFill>
                 <a:latin typeface="Segoe UI"/>
               </a:rPr>
-              <a:t>the hidden body inherits the occluder's depth</a:t>
+              <a:t>no memory across time -- depth shimmers, video looks unstable</a:t>
             </a:r>
           </a:p>
         </p:txBody>
@@ -10393,7 +11132,7 @@
             </a:avLst>
           </a:prstGeom>
           <a:solidFill>
-            <a:srgbClr val="B07D18"/>
+            <a:srgbClr val="3E6FD9"/>
           </a:solidFill>
           <a:ln>
             <a:noFill/>
@@ -10452,7 +11191,7 @@
                 </a:solidFill>
                 <a:latin typeface="Segoe UI"/>
               </a:rPr>
-              <a:t>The answer shimmers frame to frame.</a:t>
+              <a:t>Consistency is three-way.</a:t>
             </a:r>
           </a:p>
         </p:txBody>
@@ -10487,7 +11226,7 @@
                 </a:solidFill>
                 <a:latin typeface="Segoe UI"/>
               </a:rPr>
-              <a:t>each frame decides slightly differently</a:t>
+              <a:t>per pixel, per person, AND per frame -- all at once</a:t>
             </a:r>
           </a:p>
         </p:txBody>
@@ -13925,7 +14664,7 @@
                 </a:solidFill>
                 <a:latin typeface="Segoe UI"/>
               </a:rPr>
-              <a:t>Blue = scene model alone · amber = + the memory module (scene model frozen).</a:t>
+              <a:t>Blue = per-frame model · amber = + temporal memory. Full held-out test set.</a:t>
             </a:r>
           </a:p>
         </p:txBody>
@@ -14246,7 +14985,7 @@
                 </a:solidFill>
                 <a:latin typeface="Segoe UI"/>
               </a:rPr>
-              <a:t>Same clip, identities locked: one person, one colour, start to finish</a:t>
+              <a:t>Same clip with tracking: each person keeps a single colour throughout</a:t>
             </a:r>
           </a:p>
           <a:p>
@@ -14777,7 +15516,7 @@
                 </a:solidFill>
                 <a:latin typeface="Segoe UI"/>
               </a:rPr>
-              <a:t>Safe by design:  </a:t>
+              <a:t>Whole scene:  </a:t>
             </a:r>
             <a:r>
               <a:rPr sz="1350" b="0">
@@ -14786,7 +15525,7 @@
                 </a:solidFill>
                 <a:latin typeface="Segoe UI"/>
               </a:rPr>
-              <a:t>scene model frozen · corrections capped ±15%</a:t>
+              <a:t>0.078 rel. error -- precision added where it counts,</a:t>
             </a:r>
           </a:p>
         </p:txBody>
@@ -14821,7 +15560,7 @@
                 </a:solidFill>
                 <a:latin typeface="Segoe UI"/>
               </a:rPr>
-              <a:t>refinement can only act on people -- the rest of the scene is untouched, guaranteed</a:t>
+              <a:t>with crisp person boundaries in the depth map and the rest of the scene at full quality</a:t>
             </a:r>
           </a:p>
         </p:txBody>

--- a/docs/presentation/instancedepth-journey.pptx
+++ b/docs/presentation/instancedepth-journey.pptx
@@ -587,7 +587,7 @@
           <a:lstStyle/>
           <a:p>
             <a:r>
-              <a:t>~35s -- The full system against the per-frame baseline, same 10,400-frame held-out test set, five measurements. Read it top to bottom: depth got 7% more accurate; accuracy-within-band went up; and the two TEMPORAL rows -- temporal error and flicker -- both dropped, meaning the video is measurably steadier, not just nicer to look at. Bottom row: overlap regions, the hardest pixels, also improved. One system, every number moved the right way. Leave this on screen during questions.</a:t>
+              <a:t>~35s -- Numbers were per pass; this slide is about BREADTH. Four very different situations from the held-out set -- a crowded group, two people crossing, someone close to the camera, a wide sparse scene -- and the same system handles all of them: clean per-person depth, no special casing per scene. Talk over the tiles, don't read them. If a scene type your audience cares about is missing, swap a tile.</a:t>
             </a:r>
           </a:p>
         </p:txBody>
@@ -657,7 +657,7 @@
           <a:lstStyle/>
           <a:p>
             <a:r>
-              <a:t>~35s -- What in this project is OURS, beyond the paper we started from. 1: the dataset itself -- fully annotated by us from nothing but RGB and raw depth. 2: the paper is single-frame; we made depth video-native -- a temporal memory carried across frames, trained by a loss that rewards steadiness without punishing real motion. 3: we brought the Video-Mask2Former idea in without its cost -- the per-frame model's own query embeddings carry each person across the video, zero video training. 4: occlusion-aware pair reasoning -- for every overlapping pair, who is in front and by how much, 98.6% accuracy right where bodies cross.</a:t>
+              <a:t>~35s -- What in this project is OURS, beyond the paper we started from. 1: the dataset itself -- fully annotated by us from nothing but RGB and raw depth. 2: the paper is single-frame; we made depth video-native -- a temporal memory carried across frames, trained by a loss that rewards steadiness without punishing real motion. 3: training that seeks motion -- instead of sampling clips at random, we sample them where the scene actually moves, so the temporal module learns from the frames where time matters. 4: occlusion-aware pair reasoning -- for every overlapping pair, who is in front and by how much, 98.6% accuracy right where bodies cross.</a:t>
             </a:r>
           </a:p>
         </p:txBody>
@@ -797,7 +797,7 @@
           <a:lstStyle/>
           <a:p>
             <a:r>
-              <a:t>~25s -- What's next, in order. 1: push the temporal idea further -- today the memory looks one step back; training on whole clips (the full Video-Mask2Former regime) extends how far consistency reaches. 2: robustness on footage from other cameras and places, so the same steadiness holds anywhere. 3: release our dataset as a benchmark, with the write-up -- there is no public instance-depth video benchmark like it.</a:t>
+              <a:t>~25s -- What's next, in order. 1: put the occlusion refinement to the test on OTHER occlusion-heavy datasets -- crowded public benchmarks we didn't train on -- and measure whether the overlap gains transfer. 2: robustness on footage from other cameras and places, so the same steadiness holds anywhere. 3: release our dataset as a benchmark, with the write-up -- there is no public instance-depth video benchmark like it.</a:t>
             </a:r>
           </a:p>
         </p:txBody>
@@ -5088,91 +5088,21 @@
                 </a:solidFill>
                 <a:latin typeface="Segoe UI"/>
               </a:rPr>
-              <a:t>Per-frame baseline → full system</a:t>
-            </a:r>
-          </a:p>
-        </p:txBody>
-      </p:sp>
-      <p:sp>
-        <p:nvSpPr>
-          <p:cNvPr id="4" name="TextBox 3"/>
-          <p:cNvSpPr txBox="1"/>
-          <p:nvPr/>
-        </p:nvSpPr>
-        <p:spPr>
-          <a:xfrm>
-            <a:off x="5577840" y="2148840"/>
-            <a:ext cx="1920240" cy="320040"/>
-          </a:xfrm>
-          <a:prstGeom prst="rect">
-            <a:avLst/>
-          </a:prstGeom>
-          <a:noFill/>
-        </p:spPr>
-        <p:txBody>
-          <a:bodyPr wrap="square" anchor="t" lIns="0" rIns="0" tIns="0" bIns="0">
-            <a:spAutoFit/>
-          </a:bodyPr>
-          <a:lstStyle/>
-          <a:p>
-            <a:pPr algn="ctr"/>
-            <a:r>
-              <a:rPr sz="1200" b="1">
-                <a:solidFill>
-                  <a:srgbClr val="7DA3F2"/>
-                </a:solidFill>
-                <a:latin typeface="Consolas"/>
-              </a:rPr>
-              <a:t>BASELINE</a:t>
-            </a:r>
-          </a:p>
-        </p:txBody>
-      </p:sp>
-      <p:sp>
-        <p:nvSpPr>
-          <p:cNvPr id="5" name="TextBox 4"/>
-          <p:cNvSpPr txBox="1"/>
-          <p:nvPr/>
-        </p:nvSpPr>
-        <p:spPr>
-          <a:xfrm>
-            <a:off x="7863840" y="2148840"/>
-            <a:ext cx="1920240" cy="320040"/>
-          </a:xfrm>
-          <a:prstGeom prst="rect">
-            <a:avLst/>
-          </a:prstGeom>
-          <a:noFill/>
-        </p:spPr>
-        <p:txBody>
-          <a:bodyPr wrap="square" anchor="t" lIns="0" rIns="0" tIns="0" bIns="0">
-            <a:spAutoFit/>
-          </a:bodyPr>
-          <a:lstStyle/>
-          <a:p>
-            <a:pPr algn="ctr"/>
-            <a:r>
-              <a:rPr sz="1200" b="1">
-                <a:solidFill>
-                  <a:srgbClr val="F5B63F"/>
-                </a:solidFill>
-                <a:latin typeface="Consolas"/>
-              </a:rPr>
-              <a:t>FULL SYSTEM</a:t>
-            </a:r>
-          </a:p>
-        </p:txBody>
-      </p:sp>
-      <p:sp>
-        <p:nvSpPr>
-          <p:cNvPr id="6" name="Rounded Rectangle 5"/>
+              <a:t>One system, every kind of scene</a:t>
+            </a:r>
+          </a:p>
+        </p:txBody>
+      </p:sp>
+      <p:sp>
+        <p:nvSpPr>
+          <p:cNvPr id="4" name="Rounded Rectangle 3"/>
           <p:cNvSpPr/>
           <p:nvPr/>
         </p:nvSpPr>
         <p:spPr>
           <a:xfrm>
-            <a:off x="822960" y="2560320"/>
-            <a:ext cx="10515600" cy="585216"/>
+            <a:off x="822960" y="2286000"/>
+            <a:ext cx="2542032" cy="3017520"/>
           </a:xfrm>
           <a:prstGeom prst="roundRect">
             <a:avLst>
@@ -5180,12 +5110,13 @@
             </a:avLst>
           </a:prstGeom>
           <a:solidFill>
-            <a:srgbClr val="131A23"/>
+            <a:srgbClr val="182230"/>
           </a:solidFill>
-          <a:ln w="12700">
+          <a:ln w="19050">
             <a:solidFill>
-              <a:srgbClr val="2A3542"/>
+              <a:srgbClr val="1FA491"/>
             </a:solidFill>
+            <a:prstDash val="dash"/>
           </a:ln>
           <a:effectLst/>
         </p:spPr>
@@ -5204,23 +5135,68 @@
           </a:fontRef>
         </p:style>
         <p:txBody>
-          <a:bodyPr rtlCol="0" anchor="ctr"/>
-          <a:lstStyle/>
-          <a:p>
-            <a:pPr algn="ctr"/>
-          </a:p>
-        </p:txBody>
-      </p:sp>
-      <p:sp>
-        <p:nvSpPr>
-          <p:cNvPr id="7" name="TextBox 6"/>
+          <a:bodyPr rtlCol="0" anchor="ctr" wrap="square"/>
+          <a:lstStyle/>
+          <a:p>
+            <a:pPr algn="ctr">
+              <a:spcBef>
+                <a:spcPts val="300"/>
+              </a:spcBef>
+            </a:pPr>
+            <a:r>
+              <a:rPr sz="1100" b="1">
+                <a:solidFill>
+                  <a:srgbClr val="F5B63F"/>
+                </a:solidFill>
+                <a:latin typeface="Consolas"/>
+              </a:rPr>
+              <a:t>I6a</a:t>
+            </a:r>
+          </a:p>
+          <a:p>
+            <a:pPr algn="ctr">
+              <a:spcBef>
+                <a:spcPts val="300"/>
+              </a:spcBef>
+            </a:pPr>
+            <a:r>
+              <a:rPr sz="1250" b="0">
+                <a:solidFill>
+                  <a:srgbClr val="E9EDF3"/>
+                </a:solidFill>
+                <a:latin typeface="Segoe UI"/>
+              </a:rPr>
+              <a:t>Crowded group</a:t>
+            </a:r>
+          </a:p>
+          <a:p>
+            <a:pPr algn="ctr">
+              <a:spcBef>
+                <a:spcPts val="300"/>
+              </a:spcBef>
+            </a:pPr>
+            <a:r>
+              <a:rPr sz="1000" b="0">
+                <a:solidFill>
+                  <a:srgbClr val="5C6B7E"/>
+                </a:solidFill>
+                <a:latin typeface="Consolas"/>
+              </a:rPr>
+              <a:t>RGB over depth · ~260x300</a:t>
+            </a:r>
+          </a:p>
+        </p:txBody>
+      </p:sp>
+      <p:sp>
+        <p:nvSpPr>
+          <p:cNvPr id="5" name="TextBox 4"/>
           <p:cNvSpPr txBox="1"/>
           <p:nvPr/>
         </p:nvSpPr>
         <p:spPr>
           <a:xfrm>
-            <a:off x="1097280" y="2560320"/>
-            <a:ext cx="4206240" cy="585216"/>
+            <a:off x="822960" y="5394960"/>
+            <a:ext cx="2542032" cy="320040"/>
           </a:xfrm>
           <a:prstGeom prst="rect">
             <a:avLst/>
@@ -5228,43 +5204,34 @@
           <a:noFill/>
         </p:spPr>
         <p:txBody>
-          <a:bodyPr wrap="square" anchor="ctr" lIns="0" rIns="0" tIns="0" bIns="0">
+          <a:bodyPr wrap="square" anchor="t" lIns="0" rIns="0" tIns="0" bIns="0">
             <a:spAutoFit/>
           </a:bodyPr>
           <a:lstStyle/>
           <a:p>
-            <a:pPr algn="l"/>
-            <a:r>
-              <a:rPr sz="1550" b="1">
+            <a:pPr algn="ctr"/>
+            <a:r>
+              <a:rPr sz="1450" b="1">
                 <a:solidFill>
                   <a:srgbClr val="E9EDF3"/>
                 </a:solidFill>
                 <a:latin typeface="Segoe UI"/>
               </a:rPr>
-              <a:t>Depth error (rel)</a:t>
-            </a:r>
-            <a:r>
-              <a:rPr sz="1150" b="0">
-                <a:solidFill>
-                  <a:srgbClr val="F5B63F"/>
-                </a:solidFill>
-                <a:latin typeface="Segoe UI"/>
-              </a:rPr>
-              <a:t/>
-            </a:r>
-          </a:p>
-        </p:txBody>
-      </p:sp>
-      <p:sp>
-        <p:nvSpPr>
-          <p:cNvPr id="8" name="TextBox 7"/>
+              <a:t>Crowded group</a:t>
+            </a:r>
+          </a:p>
+        </p:txBody>
+      </p:sp>
+      <p:sp>
+        <p:nvSpPr>
+          <p:cNvPr id="6" name="TextBox 5"/>
           <p:cNvSpPr txBox="1"/>
           <p:nvPr/>
         </p:nvSpPr>
         <p:spPr>
           <a:xfrm>
-            <a:off x="5577840" y="2560320"/>
-            <a:ext cx="1920240" cy="585216"/>
+            <a:off x="822960" y="5715000"/>
+            <a:ext cx="2542032" cy="320040"/>
           </a:xfrm>
           <a:prstGeom prst="rect">
             <a:avLst/>
@@ -5272,139 +5239,34 @@
           <a:noFill/>
         </p:spPr>
         <p:txBody>
-          <a:bodyPr wrap="square" anchor="ctr" lIns="0" rIns="0" tIns="0" bIns="0">
+          <a:bodyPr wrap="square" anchor="t" lIns="0" rIns="0" tIns="0" bIns="0">
             <a:spAutoFit/>
           </a:bodyPr>
           <a:lstStyle/>
           <a:p>
             <a:pPr algn="ctr"/>
             <a:r>
-              <a:rPr sz="1700" b="0">
+              <a:rPr sz="1150" b="0">
                 <a:solidFill>
                   <a:srgbClr val="93A3B5"/>
                 </a:solidFill>
-                <a:latin typeface="Consolas"/>
-              </a:rPr>
-              <a:t>0.078</a:t>
-            </a:r>
-          </a:p>
-        </p:txBody>
-      </p:sp>
-      <p:sp>
-        <p:nvSpPr>
-          <p:cNvPr id="9" name="TextBox 8"/>
-          <p:cNvSpPr txBox="1"/>
-          <p:nvPr/>
-        </p:nvSpPr>
-        <p:spPr>
-          <a:xfrm>
-            <a:off x="7360920" y="2560320"/>
-            <a:ext cx="640080" cy="585216"/>
-          </a:xfrm>
-          <a:prstGeom prst="rect">
-            <a:avLst/>
-          </a:prstGeom>
-          <a:noFill/>
-        </p:spPr>
-        <p:txBody>
-          <a:bodyPr wrap="square" anchor="ctr" lIns="0" rIns="0" tIns="0" bIns="0">
-            <a:spAutoFit/>
-          </a:bodyPr>
-          <a:lstStyle/>
-          <a:p>
-            <a:pPr algn="ctr"/>
-            <a:r>
-              <a:rPr sz="1500" b="0">
-                <a:solidFill>
-                  <a:srgbClr val="5C6B7E"/>
-                </a:solidFill>
                 <a:latin typeface="Segoe UI"/>
               </a:rPr>
-              <a:t>→</a:t>
-            </a:r>
-          </a:p>
-        </p:txBody>
-      </p:sp>
-      <p:sp>
-        <p:nvSpPr>
-          <p:cNvPr id="10" name="TextBox 9"/>
-          <p:cNvSpPr txBox="1"/>
-          <p:nvPr/>
-        </p:nvSpPr>
-        <p:spPr>
-          <a:xfrm>
-            <a:off x="7863840" y="2560320"/>
-            <a:ext cx="1920240" cy="585216"/>
-          </a:xfrm>
-          <a:prstGeom prst="rect">
-            <a:avLst/>
-          </a:prstGeom>
-          <a:noFill/>
-        </p:spPr>
-        <p:txBody>
-          <a:bodyPr wrap="square" anchor="ctr" lIns="0" rIns="0" tIns="0" bIns="0">
-            <a:spAutoFit/>
-          </a:bodyPr>
-          <a:lstStyle/>
-          <a:p>
-            <a:pPr algn="ctr"/>
-            <a:r>
-              <a:rPr sz="1700" b="1">
-                <a:solidFill>
-                  <a:srgbClr val="E9EDF3"/>
-                </a:solidFill>
-                <a:latin typeface="Consolas"/>
-              </a:rPr>
-              <a:t>0.072</a:t>
-            </a:r>
-          </a:p>
-        </p:txBody>
-      </p:sp>
-      <p:sp>
-        <p:nvSpPr>
-          <p:cNvPr id="11" name="TextBox 10"/>
-          <p:cNvSpPr txBox="1"/>
-          <p:nvPr/>
-        </p:nvSpPr>
-        <p:spPr>
-          <a:xfrm>
-            <a:off x="9829800" y="2560320"/>
-            <a:ext cx="1417320" cy="585216"/>
-          </a:xfrm>
-          <a:prstGeom prst="rect">
-            <a:avLst/>
-          </a:prstGeom>
-          <a:noFill/>
-        </p:spPr>
-        <p:txBody>
-          <a:bodyPr wrap="square" anchor="ctr" lIns="0" rIns="0" tIns="0" bIns="0">
-            <a:spAutoFit/>
-          </a:bodyPr>
-          <a:lstStyle/>
-          <a:p>
-            <a:pPr algn="ctr"/>
-            <a:r>
-              <a:rPr sz="1350" b="1">
-                <a:solidFill>
-                  <a:srgbClr val="3ED2BC"/>
-                </a:solidFill>
-                <a:latin typeface="Consolas"/>
-              </a:rPr>
-              <a:t>-7% ✓</a:t>
-            </a:r>
-          </a:p>
-        </p:txBody>
-      </p:sp>
-      <p:sp>
-        <p:nvSpPr>
-          <p:cNvPr id="12" name="Rounded Rectangle 11"/>
+              <a:t>5+ people, heavy overlap</a:t>
+            </a:r>
+          </a:p>
+        </p:txBody>
+      </p:sp>
+      <p:sp>
+        <p:nvSpPr>
+          <p:cNvPr id="7" name="Rounded Rectangle 6"/>
           <p:cNvSpPr/>
           <p:nvPr/>
         </p:nvSpPr>
         <p:spPr>
           <a:xfrm>
-            <a:off x="822960" y="3255263"/>
-            <a:ext cx="10515600" cy="585216"/>
+            <a:off x="3493008" y="2286000"/>
+            <a:ext cx="2542032" cy="3017520"/>
           </a:xfrm>
           <a:prstGeom prst="roundRect">
             <a:avLst>
@@ -5412,12 +5274,13 @@
             </a:avLst>
           </a:prstGeom>
           <a:solidFill>
-            <a:srgbClr val="131A23"/>
+            <a:srgbClr val="182230"/>
           </a:solidFill>
-          <a:ln w="12700">
+          <a:ln w="19050">
             <a:solidFill>
-              <a:srgbClr val="2A3542"/>
+              <a:srgbClr val="3E6FD9"/>
             </a:solidFill>
+            <a:prstDash val="dash"/>
           </a:ln>
           <a:effectLst/>
         </p:spPr>
@@ -5436,23 +5299,68 @@
           </a:fontRef>
         </p:style>
         <p:txBody>
-          <a:bodyPr rtlCol="0" anchor="ctr"/>
-          <a:lstStyle/>
-          <a:p>
-            <a:pPr algn="ctr"/>
-          </a:p>
-        </p:txBody>
-      </p:sp>
-      <p:sp>
-        <p:nvSpPr>
-          <p:cNvPr id="13" name="TextBox 12"/>
+          <a:bodyPr rtlCol="0" anchor="ctr" wrap="square"/>
+          <a:lstStyle/>
+          <a:p>
+            <a:pPr algn="ctr">
+              <a:spcBef>
+                <a:spcPts val="300"/>
+              </a:spcBef>
+            </a:pPr>
+            <a:r>
+              <a:rPr sz="1100" b="1">
+                <a:solidFill>
+                  <a:srgbClr val="F5B63F"/>
+                </a:solidFill>
+                <a:latin typeface="Consolas"/>
+              </a:rPr>
+              <a:t>I6b</a:t>
+            </a:r>
+          </a:p>
+          <a:p>
+            <a:pPr algn="ctr">
+              <a:spcBef>
+                <a:spcPts val="300"/>
+              </a:spcBef>
+            </a:pPr>
+            <a:r>
+              <a:rPr sz="1250" b="0">
+                <a:solidFill>
+                  <a:srgbClr val="E9EDF3"/>
+                </a:solidFill>
+                <a:latin typeface="Segoe UI"/>
+              </a:rPr>
+              <a:t>People crossing</a:t>
+            </a:r>
+          </a:p>
+          <a:p>
+            <a:pPr algn="ctr">
+              <a:spcBef>
+                <a:spcPts val="300"/>
+              </a:spcBef>
+            </a:pPr>
+            <a:r>
+              <a:rPr sz="1000" b="0">
+                <a:solidFill>
+                  <a:srgbClr val="5C6B7E"/>
+                </a:solidFill>
+                <a:latin typeface="Consolas"/>
+              </a:rPr>
+              <a:t>RGB over depth · ~260x300</a:t>
+            </a:r>
+          </a:p>
+        </p:txBody>
+      </p:sp>
+      <p:sp>
+        <p:nvSpPr>
+          <p:cNvPr id="8" name="TextBox 7"/>
           <p:cNvSpPr txBox="1"/>
           <p:nvPr/>
         </p:nvSpPr>
         <p:spPr>
           <a:xfrm>
-            <a:off x="1097280" y="3255263"/>
-            <a:ext cx="4206240" cy="585216"/>
+            <a:off x="3493008" y="5394960"/>
+            <a:ext cx="2542032" cy="320040"/>
           </a:xfrm>
           <a:prstGeom prst="rect">
             <a:avLst/>
@@ -5460,43 +5368,34 @@
           <a:noFill/>
         </p:spPr>
         <p:txBody>
-          <a:bodyPr wrap="square" anchor="ctr" lIns="0" rIns="0" tIns="0" bIns="0">
+          <a:bodyPr wrap="square" anchor="t" lIns="0" rIns="0" tIns="0" bIns="0">
             <a:spAutoFit/>
           </a:bodyPr>
           <a:lstStyle/>
           <a:p>
-            <a:pPr algn="l"/>
-            <a:r>
-              <a:rPr sz="1550" b="1">
+            <a:pPr algn="ctr"/>
+            <a:r>
+              <a:rPr sz="1450" b="1">
                 <a:solidFill>
                   <a:srgbClr val="E9EDF3"/>
                 </a:solidFill>
                 <a:latin typeface="Segoe UI"/>
               </a:rPr>
-              <a:t>Accuracy (within band)</a:t>
-            </a:r>
-            <a:r>
-              <a:rPr sz="1150" b="0">
-                <a:solidFill>
-                  <a:srgbClr val="F5B63F"/>
-                </a:solidFill>
-                <a:latin typeface="Segoe UI"/>
-              </a:rPr>
-              <a:t/>
-            </a:r>
-          </a:p>
-        </p:txBody>
-      </p:sp>
-      <p:sp>
-        <p:nvSpPr>
-          <p:cNvPr id="14" name="TextBox 13"/>
+              <a:t>People crossing</a:t>
+            </a:r>
+          </a:p>
+        </p:txBody>
+      </p:sp>
+      <p:sp>
+        <p:nvSpPr>
+          <p:cNvPr id="9" name="TextBox 8"/>
           <p:cNvSpPr txBox="1"/>
           <p:nvPr/>
         </p:nvSpPr>
         <p:spPr>
           <a:xfrm>
-            <a:off x="5577840" y="3255263"/>
-            <a:ext cx="1920240" cy="585216"/>
+            <a:off x="3493008" y="5715000"/>
+            <a:ext cx="2542032" cy="320040"/>
           </a:xfrm>
           <a:prstGeom prst="rect">
             <a:avLst/>
@@ -5504,139 +5403,34 @@
           <a:noFill/>
         </p:spPr>
         <p:txBody>
-          <a:bodyPr wrap="square" anchor="ctr" lIns="0" rIns="0" tIns="0" bIns="0">
+          <a:bodyPr wrap="square" anchor="t" lIns="0" rIns="0" tIns="0" bIns="0">
             <a:spAutoFit/>
           </a:bodyPr>
           <a:lstStyle/>
           <a:p>
             <a:pPr algn="ctr"/>
             <a:r>
-              <a:rPr sz="1700" b="0">
+              <a:rPr sz="1150" b="0">
                 <a:solidFill>
                   <a:srgbClr val="93A3B5"/>
                 </a:solidFill>
-                <a:latin typeface="Consolas"/>
-              </a:rPr>
-              <a:t>93.8%</a:t>
-            </a:r>
-          </a:p>
-        </p:txBody>
-      </p:sp>
-      <p:sp>
-        <p:nvSpPr>
-          <p:cNvPr id="15" name="TextBox 14"/>
-          <p:cNvSpPr txBox="1"/>
-          <p:nvPr/>
-        </p:nvSpPr>
-        <p:spPr>
-          <a:xfrm>
-            <a:off x="7360920" y="3255263"/>
-            <a:ext cx="640080" cy="585216"/>
-          </a:xfrm>
-          <a:prstGeom prst="rect">
-            <a:avLst/>
-          </a:prstGeom>
-          <a:noFill/>
-        </p:spPr>
-        <p:txBody>
-          <a:bodyPr wrap="square" anchor="ctr" lIns="0" rIns="0" tIns="0" bIns="0">
-            <a:spAutoFit/>
-          </a:bodyPr>
-          <a:lstStyle/>
-          <a:p>
-            <a:pPr algn="ctr"/>
-            <a:r>
-              <a:rPr sz="1500" b="0">
-                <a:solidFill>
-                  <a:srgbClr val="5C6B7E"/>
-                </a:solidFill>
                 <a:latin typeface="Segoe UI"/>
               </a:rPr>
-              <a:t>→</a:t>
-            </a:r>
-          </a:p>
-        </p:txBody>
-      </p:sp>
-      <p:sp>
-        <p:nvSpPr>
-          <p:cNvPr id="16" name="TextBox 15"/>
-          <p:cNvSpPr txBox="1"/>
-          <p:nvPr/>
-        </p:nvSpPr>
-        <p:spPr>
-          <a:xfrm>
-            <a:off x="7863840" y="3255263"/>
-            <a:ext cx="1920240" cy="585216"/>
-          </a:xfrm>
-          <a:prstGeom prst="rect">
-            <a:avLst/>
-          </a:prstGeom>
-          <a:noFill/>
-        </p:spPr>
-        <p:txBody>
-          <a:bodyPr wrap="square" anchor="ctr" lIns="0" rIns="0" tIns="0" bIns="0">
-            <a:spAutoFit/>
-          </a:bodyPr>
-          <a:lstStyle/>
-          <a:p>
-            <a:pPr algn="ctr"/>
-            <a:r>
-              <a:rPr sz="1700" b="1">
-                <a:solidFill>
-                  <a:srgbClr val="E9EDF3"/>
-                </a:solidFill>
-                <a:latin typeface="Consolas"/>
-              </a:rPr>
-              <a:t>94.1%</a:t>
-            </a:r>
-          </a:p>
-        </p:txBody>
-      </p:sp>
-      <p:sp>
-        <p:nvSpPr>
-          <p:cNvPr id="17" name="TextBox 16"/>
-          <p:cNvSpPr txBox="1"/>
-          <p:nvPr/>
-        </p:nvSpPr>
-        <p:spPr>
-          <a:xfrm>
-            <a:off x="9829800" y="3255263"/>
-            <a:ext cx="1417320" cy="585216"/>
-          </a:xfrm>
-          <a:prstGeom prst="rect">
-            <a:avLst/>
-          </a:prstGeom>
-          <a:noFill/>
-        </p:spPr>
-        <p:txBody>
-          <a:bodyPr wrap="square" anchor="ctr" lIns="0" rIns="0" tIns="0" bIns="0">
-            <a:spAutoFit/>
-          </a:bodyPr>
-          <a:lstStyle/>
-          <a:p>
-            <a:pPr algn="ctr"/>
-            <a:r>
-              <a:rPr sz="1350" b="1">
-                <a:solidFill>
-                  <a:srgbClr val="3ED2BC"/>
-                </a:solidFill>
-                <a:latin typeface="Consolas"/>
-              </a:rPr>
-              <a:t>+0.3 pt ✓</a:t>
-            </a:r>
-          </a:p>
-        </p:txBody>
-      </p:sp>
-      <p:sp>
-        <p:nvSpPr>
-          <p:cNvPr id="18" name="Rounded Rectangle 17"/>
+              <a:t>the classic identity killer</a:t>
+            </a:r>
+          </a:p>
+        </p:txBody>
+      </p:sp>
+      <p:sp>
+        <p:nvSpPr>
+          <p:cNvPr id="10" name="Rounded Rectangle 9"/>
           <p:cNvSpPr/>
           <p:nvPr/>
         </p:nvSpPr>
         <p:spPr>
           <a:xfrm>
-            <a:off x="822960" y="3950208"/>
-            <a:ext cx="10515600" cy="585216"/>
+            <a:off x="6163056" y="2286000"/>
+            <a:ext cx="2542032" cy="3017520"/>
           </a:xfrm>
           <a:prstGeom prst="roundRect">
             <a:avLst>
@@ -5644,12 +5438,13 @@
             </a:avLst>
           </a:prstGeom>
           <a:solidFill>
-            <a:srgbClr val="131A23"/>
+            <a:srgbClr val="182230"/>
           </a:solidFill>
-          <a:ln w="22225">
+          <a:ln w="19050">
             <a:solidFill>
               <a:srgbClr val="B07D18"/>
             </a:solidFill>
+            <a:prstDash val="dash"/>
           </a:ln>
           <a:effectLst/>
         </p:spPr>
@@ -5668,23 +5463,68 @@
           </a:fontRef>
         </p:style>
         <p:txBody>
-          <a:bodyPr rtlCol="0" anchor="ctr"/>
-          <a:lstStyle/>
-          <a:p>
-            <a:pPr algn="ctr"/>
-          </a:p>
-        </p:txBody>
-      </p:sp>
-      <p:sp>
-        <p:nvSpPr>
-          <p:cNvPr id="19" name="TextBox 18"/>
+          <a:bodyPr rtlCol="0" anchor="ctr" wrap="square"/>
+          <a:lstStyle/>
+          <a:p>
+            <a:pPr algn="ctr">
+              <a:spcBef>
+                <a:spcPts val="300"/>
+              </a:spcBef>
+            </a:pPr>
+            <a:r>
+              <a:rPr sz="1100" b="1">
+                <a:solidFill>
+                  <a:srgbClr val="F5B63F"/>
+                </a:solidFill>
+                <a:latin typeface="Consolas"/>
+              </a:rPr>
+              <a:t>I6c</a:t>
+            </a:r>
+          </a:p>
+          <a:p>
+            <a:pPr algn="ctr">
+              <a:spcBef>
+                <a:spcPts val="300"/>
+              </a:spcBef>
+            </a:pPr>
+            <a:r>
+              <a:rPr sz="1250" b="0">
+                <a:solidFill>
+                  <a:srgbClr val="E9EDF3"/>
+                </a:solidFill>
+                <a:latin typeface="Segoe UI"/>
+              </a:rPr>
+              <a:t>Close range</a:t>
+            </a:r>
+          </a:p>
+          <a:p>
+            <a:pPr algn="ctr">
+              <a:spcBef>
+                <a:spcPts val="300"/>
+              </a:spcBef>
+            </a:pPr>
+            <a:r>
+              <a:rPr sz="1000" b="0">
+                <a:solidFill>
+                  <a:srgbClr val="5C6B7E"/>
+                </a:solidFill>
+                <a:latin typeface="Consolas"/>
+              </a:rPr>
+              <a:t>RGB over depth · ~260x300</a:t>
+            </a:r>
+          </a:p>
+        </p:txBody>
+      </p:sp>
+      <p:sp>
+        <p:nvSpPr>
+          <p:cNvPr id="11" name="TextBox 10"/>
           <p:cNvSpPr txBox="1"/>
           <p:nvPr/>
         </p:nvSpPr>
         <p:spPr>
           <a:xfrm>
-            <a:off x="1097280" y="3950208"/>
-            <a:ext cx="4206240" cy="585216"/>
+            <a:off x="6163056" y="5394960"/>
+            <a:ext cx="2542032" cy="320040"/>
           </a:xfrm>
           <a:prstGeom prst="rect">
             <a:avLst/>
@@ -5692,43 +5532,34 @@
           <a:noFill/>
         </p:spPr>
         <p:txBody>
-          <a:bodyPr wrap="square" anchor="ctr" lIns="0" rIns="0" tIns="0" bIns="0">
+          <a:bodyPr wrap="square" anchor="t" lIns="0" rIns="0" tIns="0" bIns="0">
             <a:spAutoFit/>
           </a:bodyPr>
           <a:lstStyle/>
           <a:p>
-            <a:pPr algn="l"/>
-            <a:r>
-              <a:rPr sz="1550" b="1">
+            <a:pPr algn="ctr"/>
+            <a:r>
+              <a:rPr sz="1450" b="1">
                 <a:solidFill>
                   <a:srgbClr val="E9EDF3"/>
                 </a:solidFill>
                 <a:latin typeface="Segoe UI"/>
               </a:rPr>
-              <a:t>Temporal error (TAE)</a:t>
-            </a:r>
-            <a:r>
-              <a:rPr sz="1150" b="0">
-                <a:solidFill>
-                  <a:srgbClr val="F5B63F"/>
-                </a:solidFill>
-                <a:latin typeface="Segoe UI"/>
-              </a:rPr>
-              <a:t>   · temporal</a:t>
-            </a:r>
-          </a:p>
-        </p:txBody>
-      </p:sp>
-      <p:sp>
-        <p:nvSpPr>
-          <p:cNvPr id="20" name="TextBox 19"/>
+              <a:t>Close range</a:t>
+            </a:r>
+          </a:p>
+        </p:txBody>
+      </p:sp>
+      <p:sp>
+        <p:nvSpPr>
+          <p:cNvPr id="12" name="TextBox 11"/>
           <p:cNvSpPr txBox="1"/>
           <p:nvPr/>
         </p:nvSpPr>
         <p:spPr>
           <a:xfrm>
-            <a:off x="5577840" y="3950208"/>
-            <a:ext cx="1920240" cy="585216"/>
+            <a:off x="6163056" y="5715000"/>
+            <a:ext cx="2542032" cy="320040"/>
           </a:xfrm>
           <a:prstGeom prst="rect">
             <a:avLst/>
@@ -5736,139 +5567,34 @@
           <a:noFill/>
         </p:spPr>
         <p:txBody>
-          <a:bodyPr wrap="square" anchor="ctr" lIns="0" rIns="0" tIns="0" bIns="0">
+          <a:bodyPr wrap="square" anchor="t" lIns="0" rIns="0" tIns="0" bIns="0">
             <a:spAutoFit/>
           </a:bodyPr>
           <a:lstStyle/>
           <a:p>
             <a:pPr algn="ctr"/>
             <a:r>
-              <a:rPr sz="1700" b="0">
+              <a:rPr sz="1150" b="0">
                 <a:solidFill>
                   <a:srgbClr val="93A3B5"/>
                 </a:solidFill>
-                <a:latin typeface="Consolas"/>
-              </a:rPr>
-              <a:t>0.0558</a:t>
-            </a:r>
-          </a:p>
-        </p:txBody>
-      </p:sp>
-      <p:sp>
-        <p:nvSpPr>
-          <p:cNvPr id="21" name="TextBox 20"/>
-          <p:cNvSpPr txBox="1"/>
-          <p:nvPr/>
-        </p:nvSpPr>
-        <p:spPr>
-          <a:xfrm>
-            <a:off x="7360920" y="3950208"/>
-            <a:ext cx="640080" cy="585216"/>
-          </a:xfrm>
-          <a:prstGeom prst="rect">
-            <a:avLst/>
-          </a:prstGeom>
-          <a:noFill/>
-        </p:spPr>
-        <p:txBody>
-          <a:bodyPr wrap="square" anchor="ctr" lIns="0" rIns="0" tIns="0" bIns="0">
-            <a:spAutoFit/>
-          </a:bodyPr>
-          <a:lstStyle/>
-          <a:p>
-            <a:pPr algn="ctr"/>
-            <a:r>
-              <a:rPr sz="1500" b="0">
-                <a:solidFill>
-                  <a:srgbClr val="5C6B7E"/>
-                </a:solidFill>
                 <a:latin typeface="Segoe UI"/>
               </a:rPr>
-              <a:t>→</a:t>
-            </a:r>
-          </a:p>
-        </p:txBody>
-      </p:sp>
-      <p:sp>
-        <p:nvSpPr>
-          <p:cNvPr id="22" name="TextBox 21"/>
-          <p:cNvSpPr txBox="1"/>
-          <p:nvPr/>
-        </p:nvSpPr>
-        <p:spPr>
-          <a:xfrm>
-            <a:off x="7863840" y="3950208"/>
-            <a:ext cx="1920240" cy="585216"/>
-          </a:xfrm>
-          <a:prstGeom prst="rect">
-            <a:avLst/>
-          </a:prstGeom>
-          <a:noFill/>
-        </p:spPr>
-        <p:txBody>
-          <a:bodyPr wrap="square" anchor="ctr" lIns="0" rIns="0" tIns="0" bIns="0">
-            <a:spAutoFit/>
-          </a:bodyPr>
-          <a:lstStyle/>
-          <a:p>
-            <a:pPr algn="ctr"/>
-            <a:r>
-              <a:rPr sz="1700" b="1">
-                <a:solidFill>
-                  <a:srgbClr val="E9EDF3"/>
-                </a:solidFill>
-                <a:latin typeface="Consolas"/>
-              </a:rPr>
-              <a:t>0.0547</a:t>
-            </a:r>
-          </a:p>
-        </p:txBody>
-      </p:sp>
-      <p:sp>
-        <p:nvSpPr>
-          <p:cNvPr id="23" name="TextBox 22"/>
-          <p:cNvSpPr txBox="1"/>
-          <p:nvPr/>
-        </p:nvSpPr>
-        <p:spPr>
-          <a:xfrm>
-            <a:off x="9829800" y="3950208"/>
-            <a:ext cx="1417320" cy="585216"/>
-          </a:xfrm>
-          <a:prstGeom prst="rect">
-            <a:avLst/>
-          </a:prstGeom>
-          <a:noFill/>
-        </p:spPr>
-        <p:txBody>
-          <a:bodyPr wrap="square" anchor="ctr" lIns="0" rIns="0" tIns="0" bIns="0">
-            <a:spAutoFit/>
-          </a:bodyPr>
-          <a:lstStyle/>
-          <a:p>
-            <a:pPr algn="ctr"/>
-            <a:r>
-              <a:rPr sz="1350" b="1">
-                <a:solidFill>
-                  <a:srgbClr val="3ED2BC"/>
-                </a:solidFill>
-                <a:latin typeface="Consolas"/>
-              </a:rPr>
-              <a:t>-2% ✓</a:t>
-            </a:r>
-          </a:p>
-        </p:txBody>
-      </p:sp>
-      <p:sp>
-        <p:nvSpPr>
-          <p:cNvPr id="24" name="Rounded Rectangle 23"/>
+              <a:t>large scale change, near the lens</a:t>
+            </a:r>
+          </a:p>
+        </p:txBody>
+      </p:sp>
+      <p:sp>
+        <p:nvSpPr>
+          <p:cNvPr id="13" name="Rounded Rectangle 12"/>
           <p:cNvSpPr/>
           <p:nvPr/>
         </p:nvSpPr>
         <p:spPr>
           <a:xfrm>
-            <a:off x="822960" y="4645152"/>
-            <a:ext cx="10515600" cy="585216"/>
+            <a:off x="8833104" y="2286000"/>
+            <a:ext cx="2542032" cy="3017520"/>
           </a:xfrm>
           <a:prstGeom prst="roundRect">
             <a:avLst>
@@ -5876,12 +5602,13 @@
             </a:avLst>
           </a:prstGeom>
           <a:solidFill>
-            <a:srgbClr val="131A23"/>
+            <a:srgbClr val="182230"/>
           </a:solidFill>
-          <a:ln w="22225">
+          <a:ln w="19050">
             <a:solidFill>
-              <a:srgbClr val="B07D18"/>
+              <a:srgbClr val="F2836C"/>
             </a:solidFill>
+            <a:prstDash val="dash"/>
           </a:ln>
           <a:effectLst/>
         </p:spPr>
@@ -5900,439 +5627,68 @@
           </a:fontRef>
         </p:style>
         <p:txBody>
-          <a:bodyPr rtlCol="0" anchor="ctr"/>
-          <a:lstStyle/>
-          <a:p>
-            <a:pPr algn="ctr"/>
-          </a:p>
-        </p:txBody>
-      </p:sp>
-      <p:sp>
-        <p:nvSpPr>
-          <p:cNvPr id="25" name="TextBox 24"/>
+          <a:bodyPr rtlCol="0" anchor="ctr" wrap="square"/>
+          <a:lstStyle/>
+          <a:p>
+            <a:pPr algn="ctr">
+              <a:spcBef>
+                <a:spcPts val="300"/>
+              </a:spcBef>
+            </a:pPr>
+            <a:r>
+              <a:rPr sz="1100" b="1">
+                <a:solidFill>
+                  <a:srgbClr val="F5B63F"/>
+                </a:solidFill>
+                <a:latin typeface="Consolas"/>
+              </a:rPr>
+              <a:t>I6d</a:t>
+            </a:r>
+          </a:p>
+          <a:p>
+            <a:pPr algn="ctr">
+              <a:spcBef>
+                <a:spcPts val="300"/>
+              </a:spcBef>
+            </a:pPr>
+            <a:r>
+              <a:rPr sz="1250" b="0">
+                <a:solidFill>
+                  <a:srgbClr val="E9EDF3"/>
+                </a:solidFill>
+                <a:latin typeface="Segoe UI"/>
+              </a:rPr>
+              <a:t>Wide &amp; sparse</a:t>
+            </a:r>
+          </a:p>
+          <a:p>
+            <a:pPr algn="ctr">
+              <a:spcBef>
+                <a:spcPts val="300"/>
+              </a:spcBef>
+            </a:pPr>
+            <a:r>
+              <a:rPr sz="1000" b="0">
+                <a:solidFill>
+                  <a:srgbClr val="5C6B7E"/>
+                </a:solidFill>
+                <a:latin typeface="Consolas"/>
+              </a:rPr>
+              <a:t>RGB over depth · ~260x300</a:t>
+            </a:r>
+          </a:p>
+        </p:txBody>
+      </p:sp>
+      <p:sp>
+        <p:nvSpPr>
+          <p:cNvPr id="14" name="TextBox 13"/>
           <p:cNvSpPr txBox="1"/>
           <p:nvPr/>
         </p:nvSpPr>
         <p:spPr>
           <a:xfrm>
-            <a:off x="1097280" y="4645152"/>
-            <a:ext cx="4206240" cy="585216"/>
-          </a:xfrm>
-          <a:prstGeom prst="rect">
-            <a:avLst/>
-          </a:prstGeom>
-          <a:noFill/>
-        </p:spPr>
-        <p:txBody>
-          <a:bodyPr wrap="square" anchor="ctr" lIns="0" rIns="0" tIns="0" bIns="0">
-            <a:spAutoFit/>
-          </a:bodyPr>
-          <a:lstStyle/>
-          <a:p>
-            <a:pPr algn="l"/>
-            <a:r>
-              <a:rPr sz="1550" b="1">
-                <a:solidFill>
-                  <a:srgbClr val="E9EDF3"/>
-                </a:solidFill>
-                <a:latin typeface="Segoe UI"/>
-              </a:rPr>
-              <a:t>Flicker (pred vs scene)</a:t>
-            </a:r>
-            <a:r>
-              <a:rPr sz="1150" b="0">
-                <a:solidFill>
-                  <a:srgbClr val="F5B63F"/>
-                </a:solidFill>
-                <a:latin typeface="Segoe UI"/>
-              </a:rPr>
-              <a:t>   · temporal</a:t>
-            </a:r>
-          </a:p>
-        </p:txBody>
-      </p:sp>
-      <p:sp>
-        <p:nvSpPr>
-          <p:cNvPr id="26" name="TextBox 25"/>
-          <p:cNvSpPr txBox="1"/>
-          <p:nvPr/>
-        </p:nvSpPr>
-        <p:spPr>
-          <a:xfrm>
-            <a:off x="5577840" y="4645152"/>
-            <a:ext cx="1920240" cy="585216"/>
-          </a:xfrm>
-          <a:prstGeom prst="rect">
-            <a:avLst/>
-          </a:prstGeom>
-          <a:noFill/>
-        </p:spPr>
-        <p:txBody>
-          <a:bodyPr wrap="square" anchor="ctr" lIns="0" rIns="0" tIns="0" bIns="0">
-            <a:spAutoFit/>
-          </a:bodyPr>
-          <a:lstStyle/>
-          <a:p>
-            <a:pPr algn="ctr"/>
-            <a:r>
-              <a:rPr sz="1700" b="0">
-                <a:solidFill>
-                  <a:srgbClr val="93A3B5"/>
-                </a:solidFill>
-                <a:latin typeface="Consolas"/>
-              </a:rPr>
-              <a:t>0.94</a:t>
-            </a:r>
-          </a:p>
-        </p:txBody>
-      </p:sp>
-      <p:sp>
-        <p:nvSpPr>
-          <p:cNvPr id="27" name="TextBox 26"/>
-          <p:cNvSpPr txBox="1"/>
-          <p:nvPr/>
-        </p:nvSpPr>
-        <p:spPr>
-          <a:xfrm>
-            <a:off x="7360920" y="4645152"/>
-            <a:ext cx="640080" cy="585216"/>
-          </a:xfrm>
-          <a:prstGeom prst="rect">
-            <a:avLst/>
-          </a:prstGeom>
-          <a:noFill/>
-        </p:spPr>
-        <p:txBody>
-          <a:bodyPr wrap="square" anchor="ctr" lIns="0" rIns="0" tIns="0" bIns="0">
-            <a:spAutoFit/>
-          </a:bodyPr>
-          <a:lstStyle/>
-          <a:p>
-            <a:pPr algn="ctr"/>
-            <a:r>
-              <a:rPr sz="1500" b="0">
-                <a:solidFill>
-                  <a:srgbClr val="5C6B7E"/>
-                </a:solidFill>
-                <a:latin typeface="Segoe UI"/>
-              </a:rPr>
-              <a:t>→</a:t>
-            </a:r>
-          </a:p>
-        </p:txBody>
-      </p:sp>
-      <p:sp>
-        <p:nvSpPr>
-          <p:cNvPr id="28" name="TextBox 27"/>
-          <p:cNvSpPr txBox="1"/>
-          <p:nvPr/>
-        </p:nvSpPr>
-        <p:spPr>
-          <a:xfrm>
-            <a:off x="7863840" y="4645152"/>
-            <a:ext cx="1920240" cy="585216"/>
-          </a:xfrm>
-          <a:prstGeom prst="rect">
-            <a:avLst/>
-          </a:prstGeom>
-          <a:noFill/>
-        </p:spPr>
-        <p:txBody>
-          <a:bodyPr wrap="square" anchor="ctr" lIns="0" rIns="0" tIns="0" bIns="0">
-            <a:spAutoFit/>
-          </a:bodyPr>
-          <a:lstStyle/>
-          <a:p>
-            <a:pPr algn="ctr"/>
-            <a:r>
-              <a:rPr sz="1700" b="1">
-                <a:solidFill>
-                  <a:srgbClr val="E9EDF3"/>
-                </a:solidFill>
-                <a:latin typeface="Consolas"/>
-              </a:rPr>
-              <a:t>0.92</a:t>
-            </a:r>
-          </a:p>
-        </p:txBody>
-      </p:sp>
-      <p:sp>
-        <p:nvSpPr>
-          <p:cNvPr id="29" name="TextBox 28"/>
-          <p:cNvSpPr txBox="1"/>
-          <p:nvPr/>
-        </p:nvSpPr>
-        <p:spPr>
-          <a:xfrm>
-            <a:off x="9829800" y="4645152"/>
-            <a:ext cx="1417320" cy="585216"/>
-          </a:xfrm>
-          <a:prstGeom prst="rect">
-            <a:avLst/>
-          </a:prstGeom>
-          <a:noFill/>
-        </p:spPr>
-        <p:txBody>
-          <a:bodyPr wrap="square" anchor="ctr" lIns="0" rIns="0" tIns="0" bIns="0">
-            <a:spAutoFit/>
-          </a:bodyPr>
-          <a:lstStyle/>
-          <a:p>
-            <a:pPr algn="ctr"/>
-            <a:r>
-              <a:rPr sz="1350" b="1">
-                <a:solidFill>
-                  <a:srgbClr val="3ED2BC"/>
-                </a:solidFill>
-                <a:latin typeface="Consolas"/>
-              </a:rPr>
-              <a:t>-3% ✓</a:t>
-            </a:r>
-          </a:p>
-        </p:txBody>
-      </p:sp>
-      <p:sp>
-        <p:nvSpPr>
-          <p:cNvPr id="30" name="Rounded Rectangle 29"/>
-          <p:cNvSpPr/>
-          <p:nvPr/>
-        </p:nvSpPr>
-        <p:spPr>
-          <a:xfrm>
-            <a:off x="822960" y="5340096"/>
-            <a:ext cx="10515600" cy="585216"/>
-          </a:xfrm>
-          <a:prstGeom prst="roundRect">
-            <a:avLst>
-              <a:gd name="adj" fmla="val 6000"/>
-            </a:avLst>
-          </a:prstGeom>
-          <a:solidFill>
-            <a:srgbClr val="131A23"/>
-          </a:solidFill>
-          <a:ln w="12700">
-            <a:solidFill>
-              <a:srgbClr val="2A3542"/>
-            </a:solidFill>
-          </a:ln>
-          <a:effectLst/>
-        </p:spPr>
-        <p:style>
-          <a:lnRef idx="1">
-            <a:schemeClr val="accent1"/>
-          </a:lnRef>
-          <a:fillRef idx="3">
-            <a:schemeClr val="accent1"/>
-          </a:fillRef>
-          <a:effectRef idx="2">
-            <a:schemeClr val="accent1"/>
-          </a:effectRef>
-          <a:fontRef idx="minor">
-            <a:schemeClr val="lt1"/>
-          </a:fontRef>
-        </p:style>
-        <p:txBody>
-          <a:bodyPr rtlCol="0" anchor="ctr"/>
-          <a:lstStyle/>
-          <a:p>
-            <a:pPr algn="ctr"/>
-          </a:p>
-        </p:txBody>
-      </p:sp>
-      <p:sp>
-        <p:nvSpPr>
-          <p:cNvPr id="31" name="TextBox 30"/>
-          <p:cNvSpPr txBox="1"/>
-          <p:nvPr/>
-        </p:nvSpPr>
-        <p:spPr>
-          <a:xfrm>
-            <a:off x="1097280" y="5340096"/>
-            <a:ext cx="4206240" cy="585216"/>
-          </a:xfrm>
-          <a:prstGeom prst="rect">
-            <a:avLst/>
-          </a:prstGeom>
-          <a:noFill/>
-        </p:spPr>
-        <p:txBody>
-          <a:bodyPr wrap="square" anchor="ctr" lIns="0" rIns="0" tIns="0" bIns="0">
-            <a:spAutoFit/>
-          </a:bodyPr>
-          <a:lstStyle/>
-          <a:p>
-            <a:pPr algn="l"/>
-            <a:r>
-              <a:rPr sz="1550" b="1">
-                <a:solidFill>
-                  <a:srgbClr val="E9EDF3"/>
-                </a:solidFill>
-                <a:latin typeface="Segoe UI"/>
-              </a:rPr>
-              <a:t>Overlap-region error</a:t>
-            </a:r>
-            <a:r>
-              <a:rPr sz="1150" b="0">
-                <a:solidFill>
-                  <a:srgbClr val="F5B63F"/>
-                </a:solidFill>
-                <a:latin typeface="Segoe UI"/>
-              </a:rPr>
-              <a:t/>
-            </a:r>
-          </a:p>
-        </p:txBody>
-      </p:sp>
-      <p:sp>
-        <p:nvSpPr>
-          <p:cNvPr id="32" name="TextBox 31"/>
-          <p:cNvSpPr txBox="1"/>
-          <p:nvPr/>
-        </p:nvSpPr>
-        <p:spPr>
-          <a:xfrm>
-            <a:off x="5577840" y="5340096"/>
-            <a:ext cx="1920240" cy="585216"/>
-          </a:xfrm>
-          <a:prstGeom prst="rect">
-            <a:avLst/>
-          </a:prstGeom>
-          <a:noFill/>
-        </p:spPr>
-        <p:txBody>
-          <a:bodyPr wrap="square" anchor="ctr" lIns="0" rIns="0" tIns="0" bIns="0">
-            <a:spAutoFit/>
-          </a:bodyPr>
-          <a:lstStyle/>
-          <a:p>
-            <a:pPr algn="ctr"/>
-            <a:r>
-              <a:rPr sz="1700" b="0">
-                <a:solidFill>
-                  <a:srgbClr val="93A3B5"/>
-                </a:solidFill>
-                <a:latin typeface="Consolas"/>
-              </a:rPr>
-              <a:t>0.056</a:t>
-            </a:r>
-          </a:p>
-        </p:txBody>
-      </p:sp>
-      <p:sp>
-        <p:nvSpPr>
-          <p:cNvPr id="33" name="TextBox 32"/>
-          <p:cNvSpPr txBox="1"/>
-          <p:nvPr/>
-        </p:nvSpPr>
-        <p:spPr>
-          <a:xfrm>
-            <a:off x="7360920" y="5340096"/>
-            <a:ext cx="640080" cy="585216"/>
-          </a:xfrm>
-          <a:prstGeom prst="rect">
-            <a:avLst/>
-          </a:prstGeom>
-          <a:noFill/>
-        </p:spPr>
-        <p:txBody>
-          <a:bodyPr wrap="square" anchor="ctr" lIns="0" rIns="0" tIns="0" bIns="0">
-            <a:spAutoFit/>
-          </a:bodyPr>
-          <a:lstStyle/>
-          <a:p>
-            <a:pPr algn="ctr"/>
-            <a:r>
-              <a:rPr sz="1500" b="0">
-                <a:solidFill>
-                  <a:srgbClr val="5C6B7E"/>
-                </a:solidFill>
-                <a:latin typeface="Segoe UI"/>
-              </a:rPr>
-              <a:t>→</a:t>
-            </a:r>
-          </a:p>
-        </p:txBody>
-      </p:sp>
-      <p:sp>
-        <p:nvSpPr>
-          <p:cNvPr id="34" name="TextBox 33"/>
-          <p:cNvSpPr txBox="1"/>
-          <p:nvPr/>
-        </p:nvSpPr>
-        <p:spPr>
-          <a:xfrm>
-            <a:off x="7863840" y="5340096"/>
-            <a:ext cx="1920240" cy="585216"/>
-          </a:xfrm>
-          <a:prstGeom prst="rect">
-            <a:avLst/>
-          </a:prstGeom>
-          <a:noFill/>
-        </p:spPr>
-        <p:txBody>
-          <a:bodyPr wrap="square" anchor="ctr" lIns="0" rIns="0" tIns="0" bIns="0">
-            <a:spAutoFit/>
-          </a:bodyPr>
-          <a:lstStyle/>
-          <a:p>
-            <a:pPr algn="ctr"/>
-            <a:r>
-              <a:rPr sz="1700" b="1">
-                <a:solidFill>
-                  <a:srgbClr val="E9EDF3"/>
-                </a:solidFill>
-                <a:latin typeface="Consolas"/>
-              </a:rPr>
-              <a:t>0.055</a:t>
-            </a:r>
-          </a:p>
-        </p:txBody>
-      </p:sp>
-      <p:sp>
-        <p:nvSpPr>
-          <p:cNvPr id="35" name="TextBox 34"/>
-          <p:cNvSpPr txBox="1"/>
-          <p:nvPr/>
-        </p:nvSpPr>
-        <p:spPr>
-          <a:xfrm>
-            <a:off x="9829800" y="5340096"/>
-            <a:ext cx="1417320" cy="585216"/>
-          </a:xfrm>
-          <a:prstGeom prst="rect">
-            <a:avLst/>
-          </a:prstGeom>
-          <a:noFill/>
-        </p:spPr>
-        <p:txBody>
-          <a:bodyPr wrap="square" anchor="ctr" lIns="0" rIns="0" tIns="0" bIns="0">
-            <a:spAutoFit/>
-          </a:bodyPr>
-          <a:lstStyle/>
-          <a:p>
-            <a:pPr algn="ctr"/>
-            <a:r>
-              <a:rPr sz="1350" b="1">
-                <a:solidFill>
-                  <a:srgbClr val="3ED2BC"/>
-                </a:solidFill>
-                <a:latin typeface="Consolas"/>
-              </a:rPr>
-              <a:t>-1.4% ✓</a:t>
-            </a:r>
-          </a:p>
-        </p:txBody>
-      </p:sp>
-      <p:sp>
-        <p:nvSpPr>
-          <p:cNvPr id="36" name="TextBox 35"/>
-          <p:cNvSpPr txBox="1"/>
-          <p:nvPr/>
-        </p:nvSpPr>
-        <p:spPr>
-          <a:xfrm>
-            <a:off x="822960" y="6291072"/>
-            <a:ext cx="10545775" cy="365760"/>
+            <a:off x="8833104" y="5394960"/>
+            <a:ext cx="2542032" cy="320040"/>
           </a:xfrm>
           <a:prstGeom prst="rect">
             <a:avLst/>
@@ -6345,6 +5701,76 @@
           </a:bodyPr>
           <a:lstStyle/>
           <a:p>
+            <a:pPr algn="ctr"/>
+            <a:r>
+              <a:rPr sz="1450" b="1">
+                <a:solidFill>
+                  <a:srgbClr val="E9EDF3"/>
+                </a:solidFill>
+                <a:latin typeface="Segoe UI"/>
+              </a:rPr>
+              <a:t>Wide &amp; sparse</a:t>
+            </a:r>
+          </a:p>
+        </p:txBody>
+      </p:sp>
+      <p:sp>
+        <p:nvSpPr>
+          <p:cNvPr id="15" name="TextBox 14"/>
+          <p:cNvSpPr txBox="1"/>
+          <p:nvPr/>
+        </p:nvSpPr>
+        <p:spPr>
+          <a:xfrm>
+            <a:off x="8833104" y="5715000"/>
+            <a:ext cx="2542032" cy="320040"/>
+          </a:xfrm>
+          <a:prstGeom prst="rect">
+            <a:avLst/>
+          </a:prstGeom>
+          <a:noFill/>
+        </p:spPr>
+        <p:txBody>
+          <a:bodyPr wrap="square" anchor="t" lIns="0" rIns="0" tIns="0" bIns="0">
+            <a:spAutoFit/>
+          </a:bodyPr>
+          <a:lstStyle/>
+          <a:p>
+            <a:pPr algn="ctr"/>
+            <a:r>
+              <a:rPr sz="1150" b="0">
+                <a:solidFill>
+                  <a:srgbClr val="93A3B5"/>
+                </a:solidFill>
+                <a:latin typeface="Segoe UI"/>
+              </a:rPr>
+              <a:t>small people, long sightlines</a:t>
+            </a:r>
+          </a:p>
+        </p:txBody>
+      </p:sp>
+      <p:sp>
+        <p:nvSpPr>
+          <p:cNvPr id="16" name="TextBox 15"/>
+          <p:cNvSpPr txBox="1"/>
+          <p:nvPr/>
+        </p:nvSpPr>
+        <p:spPr>
+          <a:xfrm>
+            <a:off x="822960" y="6291072"/>
+            <a:ext cx="10545775" cy="365760"/>
+          </a:xfrm>
+          <a:prstGeom prst="rect">
+            <a:avLst/>
+          </a:prstGeom>
+          <a:noFill/>
+        </p:spPr>
+        <p:txBody>
+          <a:bodyPr wrap="square" anchor="t" lIns="0" rIns="0" tIns="0" bIns="0">
+            <a:spAutoFit/>
+          </a:bodyPr>
+          <a:lstStyle/>
+          <a:p>
             <a:pPr algn="l"/>
             <a:r>
               <a:rPr sz="1250" b="0">
@@ -6353,7 +5779,7 @@
                 </a:solidFill>
                 <a:latin typeface="Segoe UI"/>
               </a:rPr>
-              <a:t>Same held-out test set for every row · 10,400 frames · 3,083 with real person-on-person overlap.</a:t>
+              <a:t>All from the held-out test set · same model, same settings -- no per-scene tuning.</a:t>
             </a:r>
           </a:p>
         </p:txBody>
@@ -6768,7 +6194,7 @@
                 </a:solidFill>
                 <a:latin typeface="Segoe UI"/>
               </a:rPr>
-              <a:t>Video-Mask2Former, without the cost</a:t>
+              <a:t>Training that seeks motion</a:t>
             </a:r>
           </a:p>
         </p:txBody>
@@ -6803,7 +6229,7 @@
                 </a:solidFill>
                 <a:latin typeface="Segoe UI"/>
               </a:rPr>
-              <a:t>its query-identity idea, realised with zero video training -- the queries themselves carry each person across frames</a:t>
+              <a:t>clips sampled where the scene actually moves -- the temporal module learns from frames where time matters</a:t>
             </a:r>
           </a:p>
         </p:txBody>
@@ -7325,7 +6751,7 @@
                 </a:solidFill>
                 <a:latin typeface="Segoe UI"/>
               </a:rPr>
-              <a:t>Longer memory</a:t>
+              <a:t>Occlusion benchmarks</a:t>
             </a:r>
           </a:p>
         </p:txBody>
@@ -7360,7 +6786,7 @@
                 </a:solidFill>
                 <a:latin typeface="Segoe UI"/>
               </a:rPr>
-              <a:t>clip-level training -- consistency that reaches further back</a:t>
+              <a:t>measure Pass 3 on other occlusion-heavy datasets</a:t>
             </a:r>
           </a:p>
         </p:txBody>
@@ -8960,7 +8386,7 @@
                 <a:gridCol w="1463040"/>
                 <a:gridCol w="5148072"/>
               </a:tblGrid>
-              <a:tr h="497840">
+              <a:tr h="448056">
                 <a:tc>
                   <a:txBody>
                     <a:bodyPr/>
@@ -9050,7 +8476,7 @@
                   </a:tcPr>
                 </a:tc>
               </a:tr>
-              <a:tr h="497840">
+              <a:tr h="448056">
                 <a:tc>
                   <a:txBody>
                     <a:bodyPr/>
@@ -9140,7 +8566,7 @@
                   </a:tcPr>
                 </a:tc>
               </a:tr>
-              <a:tr h="497840">
+              <a:tr h="448056">
                 <a:tc>
                   <a:txBody>
                     <a:bodyPr/>
@@ -9230,7 +8656,7 @@
                   </a:tcPr>
                 </a:tc>
               </a:tr>
-              <a:tr h="497840">
+              <a:tr h="448056">
                 <a:tc>
                   <a:txBody>
                     <a:bodyPr/>
@@ -9320,7 +8746,7 @@
                   </a:tcPr>
                 </a:tc>
               </a:tr>
-              <a:tr h="497840">
+              <a:tr h="448056">
                 <a:tc>
                   <a:txBody>
                     <a:bodyPr/>
@@ -9410,7 +8836,7 @@
                   </a:tcPr>
                 </a:tc>
               </a:tr>
-              <a:tr h="497840">
+              <a:tr h="448056">
                 <a:tc>
                   <a:txBody>
                     <a:bodyPr/>
@@ -9500,7 +8926,7 @@
                   </a:tcPr>
                 </a:tc>
               </a:tr>
-              <a:tr h="497840">
+              <a:tr h="448056">
                 <a:tc>
                   <a:txBody>
                     <a:bodyPr/>
@@ -9590,7 +9016,97 @@
                   </a:tcPr>
                 </a:tc>
               </a:tr>
-              <a:tr h="497840">
+              <a:tr h="448056">
+                <a:tc>
+                  <a:txBody>
+                    <a:bodyPr/>
+                    <a:lstStyle/>
+                    <a:p>
+                      <a:r>
+                        <a:rPr sz="1100" b="0">
+                          <a:solidFill>
+                            <a:srgbClr val="E9EDF3"/>
+                          </a:solidFill>
+                          <a:latin typeface="Consolas"/>
+                        </a:rPr>
+                        <a:t>I6a-d</a:t>
+                      </a:r>
+                    </a:p>
+                  </a:txBody>
+                  <a:tcPr marL="91440" marT="27432" marB="27432" anchor="ctr">
+                    <a:solidFill>
+                      <a:srgbClr val="131A23"/>
+                    </a:solidFill>
+                  </a:tcPr>
+                </a:tc>
+                <a:tc>
+                  <a:txBody>
+                    <a:bodyPr/>
+                    <a:lstStyle/>
+                    <a:p>
+                      <a:r>
+                        <a:rPr sz="1100" b="0">
+                          <a:solidFill>
+                            <a:srgbClr val="93A3B5"/>
+                          </a:solidFill>
+                          <a:latin typeface="Consolas"/>
+                        </a:rPr>
+                        <a:t>S10 · four tiles -- scene gallery</a:t>
+                      </a:r>
+                    </a:p>
+                  </a:txBody>
+                  <a:tcPr marL="91440" marT="27432" marB="27432" anchor="ctr">
+                    <a:solidFill>
+                      <a:srgbClr val="131A23"/>
+                    </a:solidFill>
+                  </a:tcPr>
+                </a:tc>
+                <a:tc>
+                  <a:txBody>
+                    <a:bodyPr/>
+                    <a:lstStyle/>
+                    <a:p>
+                      <a:r>
+                        <a:rPr sz="1100" b="0">
+                          <a:solidFill>
+                            <a:srgbClr val="93A3B5"/>
+                          </a:solidFill>
+                          <a:latin typeface="Consolas"/>
+                        </a:rPr>
+                        <a:t>4 × 260x300</a:t>
+                      </a:r>
+                    </a:p>
+                  </a:txBody>
+                  <a:tcPr marL="91440" marT="27432" marB="27432" anchor="ctr">
+                    <a:solidFill>
+                      <a:srgbClr val="131A23"/>
+                    </a:solidFill>
+                  </a:tcPr>
+                </a:tc>
+                <a:tc>
+                  <a:txBody>
+                    <a:bodyPr/>
+                    <a:lstStyle/>
+                    <a:p>
+                      <a:r>
+                        <a:rPr sz="1100" b="0">
+                          <a:solidFill>
+                            <a:srgbClr val="93A3B5"/>
+                          </a:solidFill>
+                          <a:latin typeface="Consolas"/>
+                        </a:rPr>
+                        <a:t>stills: crowd / crossing / close / sparse (visualize_*.py)</a:t>
+                      </a:r>
+                    </a:p>
+                  </a:txBody>
+                  <a:tcPr marL="91440" marT="27432" marB="27432" anchor="ctr">
+                    <a:solidFill>
+                      <a:srgbClr val="131A23"/>
+                    </a:solidFill>
+                  </a:tcPr>
+                </a:tc>
+              </a:tr>
+              <a:tr h="448056">
                 <a:tc>
                   <a:txBody>
                     <a:bodyPr/>
@@ -9680,7 +9196,7 @@
                   </a:tcPr>
                 </a:tc>
               </a:tr>
-              <a:tr h="497840">
+              <a:tr h="448056">
                 <a:tc>
                   <a:txBody>
                     <a:bodyPr/>
